--- a/2025-11-16 AGCC.pptx
+++ b/2025-11-16 AGCC.pptx
@@ -27,31 +27,27 @@
     <p:sldId id="277" r:id="rId21"/>
     <p:sldId id="278" r:id="rId22"/>
     <p:sldId id="279" r:id="rId23"/>
-    <p:sldId id="280" r:id="rId24"/>
-    <p:sldId id="281" r:id="rId25"/>
-    <p:sldId id="282" r:id="rId26"/>
-    <p:sldId id="283" r:id="rId27"/>
-    <p:sldId id="284" r:id="rId28"/>
-    <p:sldId id="285" r:id="rId29"/>
-    <p:sldId id="268" r:id="rId30"/>
-    <p:sldId id="286" r:id="rId31"/>
-    <p:sldId id="269" r:id="rId32"/>
-    <p:sldId id="287" r:id="rId33"/>
-    <p:sldId id="288" r:id="rId34"/>
-    <p:sldId id="289" r:id="rId35"/>
-    <p:sldId id="290" r:id="rId36"/>
-    <p:sldId id="291" r:id="rId37"/>
-    <p:sldId id="292" r:id="rId38"/>
-    <p:sldId id="293" r:id="rId39"/>
-    <p:sldId id="294" r:id="rId40"/>
-    <p:sldId id="295" r:id="rId41"/>
-    <p:sldId id="296" r:id="rId42"/>
-    <p:sldId id="297" r:id="rId43"/>
-    <p:sldId id="298" r:id="rId44"/>
-    <p:sldId id="299" r:id="rId45"/>
-    <p:sldId id="300" r:id="rId46"/>
-    <p:sldId id="301" r:id="rId47"/>
-    <p:sldId id="302" r:id="rId48"/>
+    <p:sldId id="282" r:id="rId24"/>
+    <p:sldId id="283" r:id="rId25"/>
+    <p:sldId id="268" r:id="rId26"/>
+    <p:sldId id="286" r:id="rId27"/>
+    <p:sldId id="269" r:id="rId28"/>
+    <p:sldId id="287" r:id="rId29"/>
+    <p:sldId id="288" r:id="rId30"/>
+    <p:sldId id="289" r:id="rId31"/>
+    <p:sldId id="290" r:id="rId32"/>
+    <p:sldId id="291" r:id="rId33"/>
+    <p:sldId id="292" r:id="rId34"/>
+    <p:sldId id="293" r:id="rId35"/>
+    <p:sldId id="294" r:id="rId36"/>
+    <p:sldId id="295" r:id="rId37"/>
+    <p:sldId id="296" r:id="rId38"/>
+    <p:sldId id="297" r:id="rId39"/>
+    <p:sldId id="298" r:id="rId40"/>
+    <p:sldId id="299" r:id="rId41"/>
+    <p:sldId id="300" r:id="rId42"/>
+    <p:sldId id="301" r:id="rId43"/>
+    <p:sldId id="302" r:id="rId44"/>
   </p:sldIdLst>
   <p:sldSz cx="12192000" cy="6858000"/>
   <p:notesSz cx="6858000" cy="9144000"/>
@@ -6087,285 +6083,6 @@
     <p:bg>
       <p:bgPr>
         <a:solidFill>
-          <a:srgbClr val="7030A0"/>
-        </a:solidFill>
-        <a:effectLst/>
-      </p:bgPr>
-    </p:bg>
-    <p:spTree>
-      <p:nvGrpSpPr>
-        <p:cNvPr id="1" name="">
-          <a:extLst>
-            <a:ext uri="{FF2B5EF4-FFF2-40B4-BE49-F238E27FC236}">
-              <a16:creationId xmlns:a16="http://schemas.microsoft.com/office/drawing/2014/main" id="{3BBC21AE-62D7-8212-9813-7A15697E49E3}"/>
-            </a:ext>
-          </a:extLst>
-        </p:cNvPr>
-        <p:cNvGrpSpPr/>
-        <p:nvPr/>
-      </p:nvGrpSpPr>
-      <p:grpSpPr>
-        <a:xfrm>
-          <a:off x="0" y="0"/>
-          <a:ext cx="0" cy="0"/>
-          <a:chOff x="0" y="0"/>
-          <a:chExt cx="0" cy="0"/>
-        </a:xfrm>
-      </p:grpSpPr>
-      <p:sp>
-        <p:nvSpPr>
-          <p:cNvPr id="3" name="Subtitle 2">
-            <a:extLst>
-              <a:ext uri="{FF2B5EF4-FFF2-40B4-BE49-F238E27FC236}">
-                <a16:creationId xmlns:a16="http://schemas.microsoft.com/office/drawing/2014/main" id="{C0D279BC-EC6B-E7D7-BEC4-D6AC900897E4}"/>
-              </a:ext>
-            </a:extLst>
-          </p:cNvPr>
-          <p:cNvSpPr>
-            <a:spLocks noGrp="1"/>
-          </p:cNvSpPr>
-          <p:nvPr>
-            <p:ph type="subTitle" idx="1"/>
-          </p:nvPr>
-        </p:nvSpPr>
-        <p:spPr>
-          <a:xfrm>
-            <a:off x="682831" y="497702"/>
-            <a:ext cx="10826338" cy="5862596"/>
-          </a:xfrm>
-        </p:spPr>
-        <p:txBody>
-          <a:bodyPr>
-            <a:noAutofit/>
-          </a:bodyPr>
-          <a:lstStyle/>
-          <a:p>
-            <a:endParaRPr lang="en-US" sz="4400" dirty="0">
-              <a:solidFill>
-                <a:schemeClr val="bg1"/>
-              </a:solidFill>
-              <a:latin typeface="Avenir Medium" panose="02000503020000020003" pitchFamily="2" charset="0"/>
-              <a:ea typeface="Bodoni Ornaments" pitchFamily="2" charset="0"/>
-            </a:endParaRPr>
-          </a:p>
-          <a:p>
-            <a:r>
-              <a:rPr lang="en-US" sz="4400" dirty="0">
-                <a:solidFill>
-                  <a:schemeClr val="bg1"/>
-                </a:solidFill>
-                <a:latin typeface="Avenir Medium" panose="02000503020000020003" pitchFamily="2" charset="0"/>
-                <a:ea typeface="Bodoni Ornaments" pitchFamily="2" charset="0"/>
-              </a:rPr>
-              <a:t>Praise the Lord, </a:t>
-            </a:r>
-            <a:br>
-              <a:rPr lang="en-US" sz="4400" dirty="0">
-                <a:solidFill>
-                  <a:schemeClr val="bg1"/>
-                </a:solidFill>
-                <a:latin typeface="Avenir Medium" panose="02000503020000020003" pitchFamily="2" charset="0"/>
-                <a:ea typeface="Bodoni Ornaments" pitchFamily="2" charset="0"/>
-              </a:rPr>
-            </a:br>
-            <a:endParaRPr lang="en-US" sz="4400" dirty="0">
-              <a:solidFill>
-                <a:schemeClr val="bg1"/>
-              </a:solidFill>
-              <a:latin typeface="Avenir Medium" panose="02000503020000020003" pitchFamily="2" charset="0"/>
-              <a:ea typeface="Bodoni Ornaments" pitchFamily="2" charset="0"/>
-            </a:endParaRPr>
-          </a:p>
-          <a:p>
-            <a:r>
-              <a:rPr lang="en-US" sz="4400" dirty="0">
-                <a:solidFill>
-                  <a:schemeClr val="bg1"/>
-                </a:solidFill>
-                <a:latin typeface="Avenir Medium" panose="02000503020000020003" pitchFamily="2" charset="0"/>
-                <a:ea typeface="Bodoni Ornaments" pitchFamily="2" charset="0"/>
-              </a:rPr>
-              <a:t>His mercy is more</a:t>
-            </a:r>
-          </a:p>
-          <a:p>
-            <a:endParaRPr lang="en-US" sz="4400" dirty="0">
-              <a:solidFill>
-                <a:schemeClr val="bg1"/>
-              </a:solidFill>
-              <a:latin typeface="Avenir Medium" panose="02000503020000020003" pitchFamily="2" charset="0"/>
-              <a:ea typeface="Bodoni Ornaments" pitchFamily="2" charset="0"/>
-            </a:endParaRPr>
-          </a:p>
-          <a:p>
-            <a:r>
-              <a:rPr lang="en-US" sz="4400" dirty="0">
-                <a:solidFill>
-                  <a:schemeClr val="bg1"/>
-                </a:solidFill>
-                <a:latin typeface="Avenir Medium" panose="02000503020000020003" pitchFamily="2" charset="0"/>
-                <a:ea typeface="Bodoni Ornaments" pitchFamily="2" charset="0"/>
-              </a:rPr>
-              <a:t>Stronger than darkness, </a:t>
-            </a:r>
-          </a:p>
-          <a:p>
-            <a:endParaRPr lang="en-US" sz="4400" dirty="0">
-              <a:solidFill>
-                <a:schemeClr val="bg1"/>
-              </a:solidFill>
-              <a:latin typeface="Avenir Medium" panose="02000503020000020003" pitchFamily="2" charset="0"/>
-              <a:ea typeface="Bodoni Ornaments" pitchFamily="2" charset="0"/>
-            </a:endParaRPr>
-          </a:p>
-          <a:p>
-            <a:r>
-              <a:rPr lang="en-US" sz="4400" dirty="0">
-                <a:solidFill>
-                  <a:schemeClr val="bg1"/>
-                </a:solidFill>
-                <a:latin typeface="Avenir Medium" panose="02000503020000020003" pitchFamily="2" charset="0"/>
-                <a:ea typeface="Bodoni Ornaments" pitchFamily="2" charset="0"/>
-              </a:rPr>
-              <a:t>new every morn</a:t>
-            </a:r>
-          </a:p>
-        </p:txBody>
-      </p:sp>
-    </p:spTree>
-    <p:extLst>
-      <p:ext uri="{BB962C8B-B14F-4D97-AF65-F5344CB8AC3E}">
-        <p14:creationId xmlns:p14="http://schemas.microsoft.com/office/powerpoint/2010/main" val="2267121982"/>
-      </p:ext>
-    </p:extLst>
-  </p:cSld>
-  <p:clrMapOvr>
-    <a:masterClrMapping/>
-  </p:clrMapOvr>
-</p:sld>
-</file>
-
-<file path=ppt/slides/slide24.xml><?xml version="1.0" encoding="utf-8"?>
-<p:sld xmlns:a="http://schemas.openxmlformats.org/drawingml/2006/main" xmlns:r="http://schemas.openxmlformats.org/officeDocument/2006/relationships" xmlns:p="http://schemas.openxmlformats.org/presentationml/2006/main">
-  <p:cSld>
-    <p:bg>
-      <p:bgPr>
-        <a:solidFill>
-          <a:srgbClr val="7030A0"/>
-        </a:solidFill>
-        <a:effectLst/>
-      </p:bgPr>
-    </p:bg>
-    <p:spTree>
-      <p:nvGrpSpPr>
-        <p:cNvPr id="1" name="">
-          <a:extLst>
-            <a:ext uri="{FF2B5EF4-FFF2-40B4-BE49-F238E27FC236}">
-              <a16:creationId xmlns:a16="http://schemas.microsoft.com/office/drawing/2014/main" id="{399461BD-C845-840A-EAC2-ABDFCD100904}"/>
-            </a:ext>
-          </a:extLst>
-        </p:cNvPr>
-        <p:cNvGrpSpPr/>
-        <p:nvPr/>
-      </p:nvGrpSpPr>
-      <p:grpSpPr>
-        <a:xfrm>
-          <a:off x="0" y="0"/>
-          <a:ext cx="0" cy="0"/>
-          <a:chOff x="0" y="0"/>
-          <a:chExt cx="0" cy="0"/>
-        </a:xfrm>
-      </p:grpSpPr>
-      <p:sp>
-        <p:nvSpPr>
-          <p:cNvPr id="3" name="Subtitle 2">
-            <a:extLst>
-              <a:ext uri="{FF2B5EF4-FFF2-40B4-BE49-F238E27FC236}">
-                <a16:creationId xmlns:a16="http://schemas.microsoft.com/office/drawing/2014/main" id="{A9C29F60-22B1-3E8D-ED2C-9A01A471A762}"/>
-              </a:ext>
-            </a:extLst>
-          </p:cNvPr>
-          <p:cNvSpPr>
-            <a:spLocks noGrp="1"/>
-          </p:cNvSpPr>
-          <p:nvPr>
-            <p:ph type="subTitle" idx="1"/>
-          </p:nvPr>
-        </p:nvSpPr>
-        <p:spPr>
-          <a:xfrm>
-            <a:off x="682831" y="497702"/>
-            <a:ext cx="10826338" cy="5862596"/>
-          </a:xfrm>
-        </p:spPr>
-        <p:txBody>
-          <a:bodyPr>
-            <a:noAutofit/>
-          </a:bodyPr>
-          <a:lstStyle/>
-          <a:p>
-            <a:endParaRPr lang="en-US" sz="4400" dirty="0">
-              <a:solidFill>
-                <a:schemeClr val="bg1"/>
-              </a:solidFill>
-              <a:latin typeface="Avenir Medium" panose="02000503020000020003" pitchFamily="2" charset="0"/>
-              <a:ea typeface="Bodoni Ornaments" pitchFamily="2" charset="0"/>
-            </a:endParaRPr>
-          </a:p>
-          <a:p>
-            <a:r>
-              <a:rPr lang="en-US" sz="4400" dirty="0">
-                <a:solidFill>
-                  <a:schemeClr val="bg1"/>
-                </a:solidFill>
-                <a:latin typeface="Avenir Medium" panose="02000503020000020003" pitchFamily="2" charset="0"/>
-                <a:ea typeface="Bodoni Ornaments" pitchFamily="2" charset="0"/>
-              </a:rPr>
-              <a:t>Our sins they are many, </a:t>
-            </a:r>
-          </a:p>
-          <a:p>
-            <a:endParaRPr lang="en-US" sz="4400" dirty="0">
-              <a:solidFill>
-                <a:schemeClr val="bg1"/>
-              </a:solidFill>
-              <a:latin typeface="Avenir Medium" panose="02000503020000020003" pitchFamily="2" charset="0"/>
-              <a:ea typeface="Bodoni Ornaments" pitchFamily="2" charset="0"/>
-            </a:endParaRPr>
-          </a:p>
-          <a:p>
-            <a:r>
-              <a:rPr lang="en-US" sz="4400" dirty="0">
-                <a:solidFill>
-                  <a:schemeClr val="bg1"/>
-                </a:solidFill>
-                <a:latin typeface="Avenir Medium" panose="02000503020000020003" pitchFamily="2" charset="0"/>
-                <a:ea typeface="Bodoni Ornaments" pitchFamily="2" charset="0"/>
-              </a:rPr>
-              <a:t>His mercy is more</a:t>
-            </a:r>
-          </a:p>
-        </p:txBody>
-      </p:sp>
-    </p:spTree>
-    <p:extLst>
-      <p:ext uri="{BB962C8B-B14F-4D97-AF65-F5344CB8AC3E}">
-        <p14:creationId xmlns:p14="http://schemas.microsoft.com/office/powerpoint/2010/main" val="3926302469"/>
-      </p:ext>
-    </p:extLst>
-  </p:cSld>
-  <p:clrMapOvr>
-    <a:masterClrMapping/>
-  </p:clrMapOvr>
-</p:sld>
-</file>
-
-<file path=ppt/slides/slide25.xml><?xml version="1.0" encoding="utf-8"?>
-<p:sld xmlns:a="http://schemas.openxmlformats.org/drawingml/2006/main" xmlns:r="http://schemas.openxmlformats.org/officeDocument/2006/relationships" xmlns:p="http://schemas.openxmlformats.org/presentationml/2006/main">
-  <p:cSld>
-    <p:bg>
-      <p:bgPr>
-        <a:solidFill>
           <a:schemeClr val="accent1"/>
         </a:solidFill>
         <a:effectLst/>
@@ -6517,7 +6234,7 @@
 </p:sld>
 </file>
 
-<file path=ppt/slides/slide26.xml><?xml version="1.0" encoding="utf-8"?>
+<file path=ppt/slides/slide24.xml><?xml version="1.0" encoding="utf-8"?>
 <p:sld xmlns:a="http://schemas.openxmlformats.org/drawingml/2006/main" xmlns:r="http://schemas.openxmlformats.org/officeDocument/2006/relationships" xmlns:p="http://schemas.openxmlformats.org/presentationml/2006/main">
   <p:cSld>
     <p:bg>
@@ -6674,286 +6391,7 @@
 </p:sld>
 </file>
 
-<file path=ppt/slides/slide27.xml><?xml version="1.0" encoding="utf-8"?>
-<p:sld xmlns:a="http://schemas.openxmlformats.org/drawingml/2006/main" xmlns:r="http://schemas.openxmlformats.org/officeDocument/2006/relationships" xmlns:p="http://schemas.openxmlformats.org/presentationml/2006/main">
-  <p:cSld>
-    <p:bg>
-      <p:bgPr>
-        <a:solidFill>
-          <a:srgbClr val="7030A0"/>
-        </a:solidFill>
-        <a:effectLst/>
-      </p:bgPr>
-    </p:bg>
-    <p:spTree>
-      <p:nvGrpSpPr>
-        <p:cNvPr id="1" name="">
-          <a:extLst>
-            <a:ext uri="{FF2B5EF4-FFF2-40B4-BE49-F238E27FC236}">
-              <a16:creationId xmlns:a16="http://schemas.microsoft.com/office/drawing/2014/main" id="{2F06430C-F080-BAC0-6911-7773A1C75171}"/>
-            </a:ext>
-          </a:extLst>
-        </p:cNvPr>
-        <p:cNvGrpSpPr/>
-        <p:nvPr/>
-      </p:nvGrpSpPr>
-      <p:grpSpPr>
-        <a:xfrm>
-          <a:off x="0" y="0"/>
-          <a:ext cx="0" cy="0"/>
-          <a:chOff x="0" y="0"/>
-          <a:chExt cx="0" cy="0"/>
-        </a:xfrm>
-      </p:grpSpPr>
-      <p:sp>
-        <p:nvSpPr>
-          <p:cNvPr id="3" name="Subtitle 2">
-            <a:extLst>
-              <a:ext uri="{FF2B5EF4-FFF2-40B4-BE49-F238E27FC236}">
-                <a16:creationId xmlns:a16="http://schemas.microsoft.com/office/drawing/2014/main" id="{8329FF72-2542-4B42-F83E-6F9237349C20}"/>
-              </a:ext>
-            </a:extLst>
-          </p:cNvPr>
-          <p:cNvSpPr>
-            <a:spLocks noGrp="1"/>
-          </p:cNvSpPr>
-          <p:nvPr>
-            <p:ph type="subTitle" idx="1"/>
-          </p:nvPr>
-        </p:nvSpPr>
-        <p:spPr>
-          <a:xfrm>
-            <a:off x="682831" y="497702"/>
-            <a:ext cx="10826338" cy="5862596"/>
-          </a:xfrm>
-        </p:spPr>
-        <p:txBody>
-          <a:bodyPr>
-            <a:noAutofit/>
-          </a:bodyPr>
-          <a:lstStyle/>
-          <a:p>
-            <a:endParaRPr lang="en-US" sz="4400" dirty="0">
-              <a:solidFill>
-                <a:schemeClr val="bg1"/>
-              </a:solidFill>
-              <a:latin typeface="Avenir Medium" panose="02000503020000020003" pitchFamily="2" charset="0"/>
-              <a:ea typeface="Bodoni Ornaments" pitchFamily="2" charset="0"/>
-            </a:endParaRPr>
-          </a:p>
-          <a:p>
-            <a:r>
-              <a:rPr lang="en-US" sz="4400" dirty="0">
-                <a:solidFill>
-                  <a:schemeClr val="bg1"/>
-                </a:solidFill>
-                <a:latin typeface="Avenir Medium" panose="02000503020000020003" pitchFamily="2" charset="0"/>
-                <a:ea typeface="Bodoni Ornaments" pitchFamily="2" charset="0"/>
-              </a:rPr>
-              <a:t>Praise the Lord, </a:t>
-            </a:r>
-            <a:br>
-              <a:rPr lang="en-US" sz="4400" dirty="0">
-                <a:solidFill>
-                  <a:schemeClr val="bg1"/>
-                </a:solidFill>
-                <a:latin typeface="Avenir Medium" panose="02000503020000020003" pitchFamily="2" charset="0"/>
-                <a:ea typeface="Bodoni Ornaments" pitchFamily="2" charset="0"/>
-              </a:rPr>
-            </a:br>
-            <a:endParaRPr lang="en-US" sz="4400" dirty="0">
-              <a:solidFill>
-                <a:schemeClr val="bg1"/>
-              </a:solidFill>
-              <a:latin typeface="Avenir Medium" panose="02000503020000020003" pitchFamily="2" charset="0"/>
-              <a:ea typeface="Bodoni Ornaments" pitchFamily="2" charset="0"/>
-            </a:endParaRPr>
-          </a:p>
-          <a:p>
-            <a:r>
-              <a:rPr lang="en-US" sz="4400" dirty="0">
-                <a:solidFill>
-                  <a:schemeClr val="bg1"/>
-                </a:solidFill>
-                <a:latin typeface="Avenir Medium" panose="02000503020000020003" pitchFamily="2" charset="0"/>
-                <a:ea typeface="Bodoni Ornaments" pitchFamily="2" charset="0"/>
-              </a:rPr>
-              <a:t>His mercy is more</a:t>
-            </a:r>
-          </a:p>
-          <a:p>
-            <a:endParaRPr lang="en-US" sz="4400" dirty="0">
-              <a:solidFill>
-                <a:schemeClr val="bg1"/>
-              </a:solidFill>
-              <a:latin typeface="Avenir Medium" panose="02000503020000020003" pitchFamily="2" charset="0"/>
-              <a:ea typeface="Bodoni Ornaments" pitchFamily="2" charset="0"/>
-            </a:endParaRPr>
-          </a:p>
-          <a:p>
-            <a:r>
-              <a:rPr lang="en-US" sz="4400" dirty="0">
-                <a:solidFill>
-                  <a:schemeClr val="bg1"/>
-                </a:solidFill>
-                <a:latin typeface="Avenir Medium" panose="02000503020000020003" pitchFamily="2" charset="0"/>
-                <a:ea typeface="Bodoni Ornaments" pitchFamily="2" charset="0"/>
-              </a:rPr>
-              <a:t>Stronger than darkness, </a:t>
-            </a:r>
-          </a:p>
-          <a:p>
-            <a:endParaRPr lang="en-US" sz="4400" dirty="0">
-              <a:solidFill>
-                <a:schemeClr val="bg1"/>
-              </a:solidFill>
-              <a:latin typeface="Avenir Medium" panose="02000503020000020003" pitchFamily="2" charset="0"/>
-              <a:ea typeface="Bodoni Ornaments" pitchFamily="2" charset="0"/>
-            </a:endParaRPr>
-          </a:p>
-          <a:p>
-            <a:r>
-              <a:rPr lang="en-US" sz="4400" dirty="0">
-                <a:solidFill>
-                  <a:schemeClr val="bg1"/>
-                </a:solidFill>
-                <a:latin typeface="Avenir Medium" panose="02000503020000020003" pitchFamily="2" charset="0"/>
-                <a:ea typeface="Bodoni Ornaments" pitchFamily="2" charset="0"/>
-              </a:rPr>
-              <a:t>new every morn</a:t>
-            </a:r>
-          </a:p>
-        </p:txBody>
-      </p:sp>
-    </p:spTree>
-    <p:extLst>
-      <p:ext uri="{BB962C8B-B14F-4D97-AF65-F5344CB8AC3E}">
-        <p14:creationId xmlns:p14="http://schemas.microsoft.com/office/powerpoint/2010/main" val="2300250334"/>
-      </p:ext>
-    </p:extLst>
-  </p:cSld>
-  <p:clrMapOvr>
-    <a:masterClrMapping/>
-  </p:clrMapOvr>
-</p:sld>
-</file>
-
-<file path=ppt/slides/slide28.xml><?xml version="1.0" encoding="utf-8"?>
-<p:sld xmlns:a="http://schemas.openxmlformats.org/drawingml/2006/main" xmlns:r="http://schemas.openxmlformats.org/officeDocument/2006/relationships" xmlns:p="http://schemas.openxmlformats.org/presentationml/2006/main">
-  <p:cSld>
-    <p:bg>
-      <p:bgPr>
-        <a:solidFill>
-          <a:srgbClr val="7030A0"/>
-        </a:solidFill>
-        <a:effectLst/>
-      </p:bgPr>
-    </p:bg>
-    <p:spTree>
-      <p:nvGrpSpPr>
-        <p:cNvPr id="1" name="">
-          <a:extLst>
-            <a:ext uri="{FF2B5EF4-FFF2-40B4-BE49-F238E27FC236}">
-              <a16:creationId xmlns:a16="http://schemas.microsoft.com/office/drawing/2014/main" id="{AC357511-55CF-9AF6-63C4-CA8AF74ACA99}"/>
-            </a:ext>
-          </a:extLst>
-        </p:cNvPr>
-        <p:cNvGrpSpPr/>
-        <p:nvPr/>
-      </p:nvGrpSpPr>
-      <p:grpSpPr>
-        <a:xfrm>
-          <a:off x="0" y="0"/>
-          <a:ext cx="0" cy="0"/>
-          <a:chOff x="0" y="0"/>
-          <a:chExt cx="0" cy="0"/>
-        </a:xfrm>
-      </p:grpSpPr>
-      <p:sp>
-        <p:nvSpPr>
-          <p:cNvPr id="3" name="Subtitle 2">
-            <a:extLst>
-              <a:ext uri="{FF2B5EF4-FFF2-40B4-BE49-F238E27FC236}">
-                <a16:creationId xmlns:a16="http://schemas.microsoft.com/office/drawing/2014/main" id="{5A40B855-4967-09E1-361A-6BD31C1FA5EB}"/>
-              </a:ext>
-            </a:extLst>
-          </p:cNvPr>
-          <p:cNvSpPr>
-            <a:spLocks noGrp="1"/>
-          </p:cNvSpPr>
-          <p:nvPr>
-            <p:ph type="subTitle" idx="1"/>
-          </p:nvPr>
-        </p:nvSpPr>
-        <p:spPr>
-          <a:xfrm>
-            <a:off x="682831" y="497702"/>
-            <a:ext cx="10826338" cy="5862596"/>
-          </a:xfrm>
-        </p:spPr>
-        <p:txBody>
-          <a:bodyPr>
-            <a:noAutofit/>
-          </a:bodyPr>
-          <a:lstStyle/>
-          <a:p>
-            <a:endParaRPr lang="en-US" sz="4400" dirty="0">
-              <a:solidFill>
-                <a:schemeClr val="bg1"/>
-              </a:solidFill>
-              <a:latin typeface="Avenir Medium" panose="02000503020000020003" pitchFamily="2" charset="0"/>
-              <a:ea typeface="Bodoni Ornaments" pitchFamily="2" charset="0"/>
-            </a:endParaRPr>
-          </a:p>
-          <a:p>
-            <a:r>
-              <a:rPr lang="en-US" sz="4400" dirty="0">
-                <a:solidFill>
-                  <a:schemeClr val="bg1"/>
-                </a:solidFill>
-                <a:latin typeface="Avenir Medium" panose="02000503020000020003" pitchFamily="2" charset="0"/>
-                <a:ea typeface="Bodoni Ornaments" pitchFamily="2" charset="0"/>
-              </a:rPr>
-              <a:t>Our sins they are many, </a:t>
-            </a:r>
-          </a:p>
-          <a:p>
-            <a:endParaRPr lang="en-US" sz="4400" dirty="0">
-              <a:solidFill>
-                <a:schemeClr val="bg1"/>
-              </a:solidFill>
-              <a:latin typeface="Avenir Medium" panose="02000503020000020003" pitchFamily="2" charset="0"/>
-              <a:ea typeface="Bodoni Ornaments" pitchFamily="2" charset="0"/>
-            </a:endParaRPr>
-          </a:p>
-          <a:p>
-            <a:r>
-              <a:rPr lang="en-US" sz="4400" dirty="0">
-                <a:solidFill>
-                  <a:schemeClr val="bg1"/>
-                </a:solidFill>
-                <a:latin typeface="Avenir Medium" panose="02000503020000020003" pitchFamily="2" charset="0"/>
-                <a:ea typeface="Bodoni Ornaments" pitchFamily="2" charset="0"/>
-              </a:rPr>
-              <a:t>His mercy is more</a:t>
-            </a:r>
-          </a:p>
-        </p:txBody>
-      </p:sp>
-    </p:spTree>
-    <p:extLst>
-      <p:ext uri="{BB962C8B-B14F-4D97-AF65-F5344CB8AC3E}">
-        <p14:creationId xmlns:p14="http://schemas.microsoft.com/office/powerpoint/2010/main" val="3493123151"/>
-      </p:ext>
-    </p:extLst>
-  </p:cSld>
-  <p:clrMapOvr>
-    <a:masterClrMapping/>
-  </p:clrMapOvr>
-</p:sld>
-</file>
-
-<file path=ppt/slides/slide29.xml><?xml version="1.0" encoding="utf-8"?>
+<file path=ppt/slides/slide25.xml><?xml version="1.0" encoding="utf-8"?>
 <p:sld xmlns:a="http://schemas.openxmlformats.org/drawingml/2006/main" xmlns:r="http://schemas.openxmlformats.org/officeDocument/2006/relationships" xmlns:p="http://schemas.openxmlformats.org/presentationml/2006/main">
   <p:cSld>
     <p:bg>
@@ -7101,6 +6539,992 @@
     <p:extLst>
       <p:ext uri="{BB962C8B-B14F-4D97-AF65-F5344CB8AC3E}">
         <p14:creationId xmlns:p14="http://schemas.microsoft.com/office/powerpoint/2010/main" val="1157592653"/>
+      </p:ext>
+    </p:extLst>
+  </p:cSld>
+  <p:clrMapOvr>
+    <a:masterClrMapping/>
+  </p:clrMapOvr>
+</p:sld>
+</file>
+
+<file path=ppt/slides/slide26.xml><?xml version="1.0" encoding="utf-8"?>
+<p:sld xmlns:a="http://schemas.openxmlformats.org/drawingml/2006/main" xmlns:r="http://schemas.openxmlformats.org/officeDocument/2006/relationships" xmlns:p="http://schemas.openxmlformats.org/presentationml/2006/main">
+  <p:cSld>
+    <p:bg>
+      <p:bgPr>
+        <a:solidFill>
+          <a:schemeClr val="accent1"/>
+        </a:solidFill>
+        <a:effectLst/>
+      </p:bgPr>
+    </p:bg>
+    <p:spTree>
+      <p:nvGrpSpPr>
+        <p:cNvPr id="1" name="">
+          <a:extLst>
+            <a:ext uri="{FF2B5EF4-FFF2-40B4-BE49-F238E27FC236}">
+              <a16:creationId xmlns:a16="http://schemas.microsoft.com/office/drawing/2014/main" id="{2FE6B65D-96F1-5B6D-9D9A-933A4AAB94A5}"/>
+            </a:ext>
+          </a:extLst>
+        </p:cNvPr>
+        <p:cNvGrpSpPr/>
+        <p:nvPr/>
+      </p:nvGrpSpPr>
+      <p:grpSpPr>
+        <a:xfrm>
+          <a:off x="0" y="0"/>
+          <a:ext cx="0" cy="0"/>
+          <a:chOff x="0" y="0"/>
+          <a:chExt cx="0" cy="0"/>
+        </a:xfrm>
+      </p:grpSpPr>
+      <p:sp>
+        <p:nvSpPr>
+          <p:cNvPr id="3" name="Subtitle 2">
+            <a:extLst>
+              <a:ext uri="{FF2B5EF4-FFF2-40B4-BE49-F238E27FC236}">
+                <a16:creationId xmlns:a16="http://schemas.microsoft.com/office/drawing/2014/main" id="{B27DBBAA-2033-906F-4C36-5619AE08FF31}"/>
+              </a:ext>
+            </a:extLst>
+          </p:cNvPr>
+          <p:cNvSpPr>
+            <a:spLocks noGrp="1"/>
+          </p:cNvSpPr>
+          <p:nvPr>
+            <p:ph type="subTitle" idx="1"/>
+          </p:nvPr>
+        </p:nvSpPr>
+        <p:spPr>
+          <a:xfrm>
+            <a:off x="682831" y="497702"/>
+            <a:ext cx="10826338" cy="5862596"/>
+          </a:xfrm>
+        </p:spPr>
+        <p:txBody>
+          <a:bodyPr>
+            <a:noAutofit/>
+          </a:bodyPr>
+          <a:lstStyle/>
+          <a:p>
+            <a:endParaRPr lang="en-US" sz="4400" dirty="0">
+              <a:solidFill>
+                <a:schemeClr val="bg1"/>
+              </a:solidFill>
+              <a:latin typeface="Avenir Medium" panose="02000503020000020003" pitchFamily="2" charset="0"/>
+              <a:ea typeface="Bodoni Ornaments" pitchFamily="2" charset="0"/>
+            </a:endParaRPr>
+          </a:p>
+          <a:p>
+            <a:r>
+              <a:rPr lang="en-US" sz="4400" dirty="0">
+                <a:solidFill>
+                  <a:schemeClr val="bg1"/>
+                </a:solidFill>
+                <a:latin typeface="Avenir Medium" panose="02000503020000020003" pitchFamily="2" charset="0"/>
+                <a:ea typeface="Bodoni Ornaments" pitchFamily="2" charset="0"/>
+              </a:rPr>
+              <a:t>We stood 'neath a debt </a:t>
+            </a:r>
+          </a:p>
+          <a:p>
+            <a:endParaRPr lang="en-US" sz="4400" dirty="0">
+              <a:solidFill>
+                <a:schemeClr val="bg1"/>
+              </a:solidFill>
+              <a:latin typeface="Avenir Medium" panose="02000503020000020003" pitchFamily="2" charset="0"/>
+              <a:ea typeface="Bodoni Ornaments" pitchFamily="2" charset="0"/>
+            </a:endParaRPr>
+          </a:p>
+          <a:p>
+            <a:r>
+              <a:rPr lang="en-US" sz="4400" dirty="0">
+                <a:solidFill>
+                  <a:schemeClr val="bg1"/>
+                </a:solidFill>
+                <a:latin typeface="Avenir Medium" panose="02000503020000020003" pitchFamily="2" charset="0"/>
+                <a:ea typeface="Bodoni Ornaments" pitchFamily="2" charset="0"/>
+              </a:rPr>
+              <a:t>we could never afford</a:t>
+            </a:r>
+          </a:p>
+          <a:p>
+            <a:endParaRPr lang="en-US" sz="4400" dirty="0">
+              <a:solidFill>
+                <a:schemeClr val="bg1"/>
+              </a:solidFill>
+              <a:latin typeface="Avenir Medium" panose="02000503020000020003" pitchFamily="2" charset="0"/>
+              <a:ea typeface="Bodoni Ornaments" pitchFamily="2" charset="0"/>
+            </a:endParaRPr>
+          </a:p>
+          <a:p>
+            <a:r>
+              <a:rPr lang="en-US" sz="4400" dirty="0">
+                <a:solidFill>
+                  <a:schemeClr val="bg1"/>
+                </a:solidFill>
+                <a:latin typeface="Avenir Medium" panose="02000503020000020003" pitchFamily="2" charset="0"/>
+                <a:ea typeface="Bodoni Ornaments" pitchFamily="2" charset="0"/>
+              </a:rPr>
+              <a:t>Our sins they are many, </a:t>
+            </a:r>
+          </a:p>
+          <a:p>
+            <a:endParaRPr lang="en-US" sz="4400" dirty="0">
+              <a:solidFill>
+                <a:schemeClr val="bg1"/>
+              </a:solidFill>
+              <a:latin typeface="Avenir Medium" panose="02000503020000020003" pitchFamily="2" charset="0"/>
+              <a:ea typeface="Bodoni Ornaments" pitchFamily="2" charset="0"/>
+            </a:endParaRPr>
+          </a:p>
+          <a:p>
+            <a:r>
+              <a:rPr lang="en-US" sz="4400" dirty="0">
+                <a:solidFill>
+                  <a:schemeClr val="bg1"/>
+                </a:solidFill>
+                <a:latin typeface="Avenir Medium" panose="02000503020000020003" pitchFamily="2" charset="0"/>
+                <a:ea typeface="Bodoni Ornaments" pitchFamily="2" charset="0"/>
+              </a:rPr>
+              <a:t>His mercy is more</a:t>
+            </a:r>
+          </a:p>
+        </p:txBody>
+      </p:sp>
+    </p:spTree>
+    <p:extLst>
+      <p:ext uri="{BB962C8B-B14F-4D97-AF65-F5344CB8AC3E}">
+        <p14:creationId xmlns:p14="http://schemas.microsoft.com/office/powerpoint/2010/main" val="1169012159"/>
+      </p:ext>
+    </p:extLst>
+  </p:cSld>
+  <p:clrMapOvr>
+    <a:masterClrMapping/>
+  </p:clrMapOvr>
+</p:sld>
+</file>
+
+<file path=ppt/slides/slide27.xml><?xml version="1.0" encoding="utf-8"?>
+<p:sld xmlns:a="http://schemas.openxmlformats.org/drawingml/2006/main" xmlns:r="http://schemas.openxmlformats.org/officeDocument/2006/relationships" xmlns:p="http://schemas.openxmlformats.org/presentationml/2006/main">
+  <p:cSld>
+    <p:bg>
+      <p:bgPr>
+        <a:solidFill>
+          <a:srgbClr val="7030A0"/>
+        </a:solidFill>
+        <a:effectLst/>
+      </p:bgPr>
+    </p:bg>
+    <p:spTree>
+      <p:nvGrpSpPr>
+        <p:cNvPr id="1" name="">
+          <a:extLst>
+            <a:ext uri="{FF2B5EF4-FFF2-40B4-BE49-F238E27FC236}">
+              <a16:creationId xmlns:a16="http://schemas.microsoft.com/office/drawing/2014/main" id="{C2EA5D3B-5A31-5698-7DF9-54DDEFAC9173}"/>
+            </a:ext>
+          </a:extLst>
+        </p:cNvPr>
+        <p:cNvGrpSpPr/>
+        <p:nvPr/>
+      </p:nvGrpSpPr>
+      <p:grpSpPr>
+        <a:xfrm>
+          <a:off x="0" y="0"/>
+          <a:ext cx="0" cy="0"/>
+          <a:chOff x="0" y="0"/>
+          <a:chExt cx="0" cy="0"/>
+        </a:xfrm>
+      </p:grpSpPr>
+      <p:sp>
+        <p:nvSpPr>
+          <p:cNvPr id="3" name="Subtitle 2">
+            <a:extLst>
+              <a:ext uri="{FF2B5EF4-FFF2-40B4-BE49-F238E27FC236}">
+                <a16:creationId xmlns:a16="http://schemas.microsoft.com/office/drawing/2014/main" id="{8198300B-F415-10BF-A959-7056D317E1FC}"/>
+              </a:ext>
+            </a:extLst>
+          </p:cNvPr>
+          <p:cNvSpPr>
+            <a:spLocks noGrp="1"/>
+          </p:cNvSpPr>
+          <p:nvPr>
+            <p:ph type="subTitle" idx="1"/>
+          </p:nvPr>
+        </p:nvSpPr>
+        <p:spPr>
+          <a:xfrm>
+            <a:off x="682831" y="497702"/>
+            <a:ext cx="10826338" cy="5862596"/>
+          </a:xfrm>
+        </p:spPr>
+        <p:txBody>
+          <a:bodyPr>
+            <a:noAutofit/>
+          </a:bodyPr>
+          <a:lstStyle/>
+          <a:p>
+            <a:endParaRPr lang="en-US" sz="4400" dirty="0">
+              <a:solidFill>
+                <a:schemeClr val="bg1"/>
+              </a:solidFill>
+              <a:latin typeface="Avenir Medium" panose="02000503020000020003" pitchFamily="2" charset="0"/>
+              <a:ea typeface="Bodoni Ornaments" pitchFamily="2" charset="0"/>
+            </a:endParaRPr>
+          </a:p>
+          <a:p>
+            <a:r>
+              <a:rPr lang="en-US" sz="4400" dirty="0">
+                <a:solidFill>
+                  <a:schemeClr val="bg1"/>
+                </a:solidFill>
+                <a:latin typeface="Avenir Medium" panose="02000503020000020003" pitchFamily="2" charset="0"/>
+                <a:ea typeface="Bodoni Ornaments" pitchFamily="2" charset="0"/>
+              </a:rPr>
+              <a:t>Praise the Lord, </a:t>
+            </a:r>
+            <a:br>
+              <a:rPr lang="en-US" sz="4400" dirty="0">
+                <a:solidFill>
+                  <a:schemeClr val="bg1"/>
+                </a:solidFill>
+                <a:latin typeface="Avenir Medium" panose="02000503020000020003" pitchFamily="2" charset="0"/>
+                <a:ea typeface="Bodoni Ornaments" pitchFamily="2" charset="0"/>
+              </a:rPr>
+            </a:br>
+            <a:endParaRPr lang="en-US" sz="4400" dirty="0">
+              <a:solidFill>
+                <a:schemeClr val="bg1"/>
+              </a:solidFill>
+              <a:latin typeface="Avenir Medium" panose="02000503020000020003" pitchFamily="2" charset="0"/>
+              <a:ea typeface="Bodoni Ornaments" pitchFamily="2" charset="0"/>
+            </a:endParaRPr>
+          </a:p>
+          <a:p>
+            <a:r>
+              <a:rPr lang="en-US" sz="4400" dirty="0">
+                <a:solidFill>
+                  <a:schemeClr val="bg1"/>
+                </a:solidFill>
+                <a:latin typeface="Avenir Medium" panose="02000503020000020003" pitchFamily="2" charset="0"/>
+                <a:ea typeface="Bodoni Ornaments" pitchFamily="2" charset="0"/>
+              </a:rPr>
+              <a:t>His mercy is more</a:t>
+            </a:r>
+          </a:p>
+          <a:p>
+            <a:endParaRPr lang="en-US" sz="4400" dirty="0">
+              <a:solidFill>
+                <a:schemeClr val="bg1"/>
+              </a:solidFill>
+              <a:latin typeface="Avenir Medium" panose="02000503020000020003" pitchFamily="2" charset="0"/>
+              <a:ea typeface="Bodoni Ornaments" pitchFamily="2" charset="0"/>
+            </a:endParaRPr>
+          </a:p>
+          <a:p>
+            <a:r>
+              <a:rPr lang="en-US" sz="4400" dirty="0">
+                <a:solidFill>
+                  <a:schemeClr val="bg1"/>
+                </a:solidFill>
+                <a:latin typeface="Avenir Medium" panose="02000503020000020003" pitchFamily="2" charset="0"/>
+                <a:ea typeface="Bodoni Ornaments" pitchFamily="2" charset="0"/>
+              </a:rPr>
+              <a:t>Stronger than darkness, </a:t>
+            </a:r>
+          </a:p>
+          <a:p>
+            <a:endParaRPr lang="en-US" sz="4400" dirty="0">
+              <a:solidFill>
+                <a:schemeClr val="bg1"/>
+              </a:solidFill>
+              <a:latin typeface="Avenir Medium" panose="02000503020000020003" pitchFamily="2" charset="0"/>
+              <a:ea typeface="Bodoni Ornaments" pitchFamily="2" charset="0"/>
+            </a:endParaRPr>
+          </a:p>
+          <a:p>
+            <a:r>
+              <a:rPr lang="en-US" sz="4400" dirty="0">
+                <a:solidFill>
+                  <a:schemeClr val="bg1"/>
+                </a:solidFill>
+                <a:latin typeface="Avenir Medium" panose="02000503020000020003" pitchFamily="2" charset="0"/>
+                <a:ea typeface="Bodoni Ornaments" pitchFamily="2" charset="0"/>
+              </a:rPr>
+              <a:t>new every morn</a:t>
+            </a:r>
+          </a:p>
+        </p:txBody>
+      </p:sp>
+    </p:spTree>
+    <p:extLst>
+      <p:ext uri="{BB962C8B-B14F-4D97-AF65-F5344CB8AC3E}">
+        <p14:creationId xmlns:p14="http://schemas.microsoft.com/office/powerpoint/2010/main" val="3938360840"/>
+      </p:ext>
+    </p:extLst>
+  </p:cSld>
+  <p:clrMapOvr>
+    <a:masterClrMapping/>
+  </p:clrMapOvr>
+</p:sld>
+</file>
+
+<file path=ppt/slides/slide28.xml><?xml version="1.0" encoding="utf-8"?>
+<p:sld xmlns:a="http://schemas.openxmlformats.org/drawingml/2006/main" xmlns:r="http://schemas.openxmlformats.org/officeDocument/2006/relationships" xmlns:p="http://schemas.openxmlformats.org/presentationml/2006/main">
+  <p:cSld>
+    <p:bg>
+      <p:bgPr>
+        <a:solidFill>
+          <a:srgbClr val="7030A0"/>
+        </a:solidFill>
+        <a:effectLst/>
+      </p:bgPr>
+    </p:bg>
+    <p:spTree>
+      <p:nvGrpSpPr>
+        <p:cNvPr id="1" name="">
+          <a:extLst>
+            <a:ext uri="{FF2B5EF4-FFF2-40B4-BE49-F238E27FC236}">
+              <a16:creationId xmlns:a16="http://schemas.microsoft.com/office/drawing/2014/main" id="{9877808D-1E46-8C81-5D76-B14D1413F0AC}"/>
+            </a:ext>
+          </a:extLst>
+        </p:cNvPr>
+        <p:cNvGrpSpPr/>
+        <p:nvPr/>
+      </p:nvGrpSpPr>
+      <p:grpSpPr>
+        <a:xfrm>
+          <a:off x="0" y="0"/>
+          <a:ext cx="0" cy="0"/>
+          <a:chOff x="0" y="0"/>
+          <a:chExt cx="0" cy="0"/>
+        </a:xfrm>
+      </p:grpSpPr>
+      <p:sp>
+        <p:nvSpPr>
+          <p:cNvPr id="3" name="Subtitle 2">
+            <a:extLst>
+              <a:ext uri="{FF2B5EF4-FFF2-40B4-BE49-F238E27FC236}">
+                <a16:creationId xmlns:a16="http://schemas.microsoft.com/office/drawing/2014/main" id="{06E42776-788D-F826-6994-B48B153D96FD}"/>
+              </a:ext>
+            </a:extLst>
+          </p:cNvPr>
+          <p:cNvSpPr>
+            <a:spLocks noGrp="1"/>
+          </p:cNvSpPr>
+          <p:nvPr>
+            <p:ph type="subTitle" idx="1"/>
+          </p:nvPr>
+        </p:nvSpPr>
+        <p:spPr>
+          <a:xfrm>
+            <a:off x="682831" y="497702"/>
+            <a:ext cx="10826338" cy="5862596"/>
+          </a:xfrm>
+        </p:spPr>
+        <p:txBody>
+          <a:bodyPr>
+            <a:noAutofit/>
+          </a:bodyPr>
+          <a:lstStyle/>
+          <a:p>
+            <a:endParaRPr lang="en-US" sz="4400" dirty="0">
+              <a:solidFill>
+                <a:schemeClr val="bg1"/>
+              </a:solidFill>
+              <a:latin typeface="Avenir Medium" panose="02000503020000020003" pitchFamily="2" charset="0"/>
+              <a:ea typeface="Bodoni Ornaments" pitchFamily="2" charset="0"/>
+            </a:endParaRPr>
+          </a:p>
+          <a:p>
+            <a:r>
+              <a:rPr lang="en-US" sz="4400" dirty="0">
+                <a:solidFill>
+                  <a:schemeClr val="bg1"/>
+                </a:solidFill>
+                <a:latin typeface="Avenir Medium" panose="02000503020000020003" pitchFamily="2" charset="0"/>
+                <a:ea typeface="Bodoni Ornaments" pitchFamily="2" charset="0"/>
+              </a:rPr>
+              <a:t>Our sins they are many, </a:t>
+            </a:r>
+          </a:p>
+          <a:p>
+            <a:r>
+              <a:rPr lang="en-US" sz="4400" dirty="0">
+                <a:solidFill>
+                  <a:schemeClr val="bg1"/>
+                </a:solidFill>
+                <a:latin typeface="Avenir Medium" panose="02000503020000020003" pitchFamily="2" charset="0"/>
+                <a:ea typeface="Bodoni Ornaments" pitchFamily="2" charset="0"/>
+              </a:rPr>
+              <a:t>His mercy is more</a:t>
+            </a:r>
+          </a:p>
+          <a:p>
+            <a:endParaRPr lang="en-US" sz="4400" dirty="0">
+              <a:solidFill>
+                <a:schemeClr val="bg1"/>
+              </a:solidFill>
+              <a:latin typeface="Avenir Medium" panose="02000503020000020003" pitchFamily="2" charset="0"/>
+              <a:ea typeface="Bodoni Ornaments" pitchFamily="2" charset="0"/>
+            </a:endParaRPr>
+          </a:p>
+          <a:p>
+            <a:r>
+              <a:rPr lang="en-US" sz="4400" dirty="0">
+                <a:solidFill>
+                  <a:schemeClr val="bg1"/>
+                </a:solidFill>
+                <a:latin typeface="Avenir Medium" panose="02000503020000020003" pitchFamily="2" charset="0"/>
+                <a:ea typeface="Bodoni Ornaments" pitchFamily="2" charset="0"/>
+              </a:rPr>
+              <a:t>Our sins they are many, </a:t>
+            </a:r>
+          </a:p>
+          <a:p>
+            <a:r>
+              <a:rPr lang="en-US" sz="4400" dirty="0">
+                <a:solidFill>
+                  <a:schemeClr val="bg1"/>
+                </a:solidFill>
+                <a:latin typeface="Avenir Medium" panose="02000503020000020003" pitchFamily="2" charset="0"/>
+                <a:ea typeface="Bodoni Ornaments" pitchFamily="2" charset="0"/>
+              </a:rPr>
+              <a:t>His mercy is more</a:t>
+            </a:r>
+          </a:p>
+          <a:p>
+            <a:endParaRPr lang="en-US" sz="4400" dirty="0">
+              <a:solidFill>
+                <a:schemeClr val="bg1"/>
+              </a:solidFill>
+              <a:latin typeface="Avenir Medium" panose="02000503020000020003" pitchFamily="2" charset="0"/>
+              <a:ea typeface="Bodoni Ornaments" pitchFamily="2" charset="0"/>
+            </a:endParaRPr>
+          </a:p>
+        </p:txBody>
+      </p:sp>
+    </p:spTree>
+    <p:extLst>
+      <p:ext uri="{BB962C8B-B14F-4D97-AF65-F5344CB8AC3E}">
+        <p14:creationId xmlns:p14="http://schemas.microsoft.com/office/powerpoint/2010/main" val="404716244"/>
+      </p:ext>
+    </p:extLst>
+  </p:cSld>
+  <p:clrMapOvr>
+    <a:masterClrMapping/>
+  </p:clrMapOvr>
+</p:sld>
+</file>
+
+<file path=ppt/slides/slide29.xml><?xml version="1.0" encoding="utf-8"?>
+<p:sld xmlns:a="http://schemas.openxmlformats.org/drawingml/2006/main" xmlns:r="http://schemas.openxmlformats.org/officeDocument/2006/relationships" xmlns:p="http://schemas.openxmlformats.org/presentationml/2006/main">
+  <p:cSld>
+    <p:bg>
+      <p:bgPr>
+        <a:solidFill>
+          <a:schemeClr val="bg1"/>
+        </a:solidFill>
+        <a:effectLst/>
+      </p:bgPr>
+    </p:bg>
+    <p:spTree>
+      <p:nvGrpSpPr>
+        <p:cNvPr id="1" name="">
+          <a:extLst>
+            <a:ext uri="{FF2B5EF4-FFF2-40B4-BE49-F238E27FC236}">
+              <a16:creationId xmlns:a16="http://schemas.microsoft.com/office/drawing/2014/main" id="{43ACF013-4574-2AD0-7BFD-6E771B7E5C0B}"/>
+            </a:ext>
+          </a:extLst>
+        </p:cNvPr>
+        <p:cNvGrpSpPr/>
+        <p:nvPr/>
+      </p:nvGrpSpPr>
+      <p:grpSpPr>
+        <a:xfrm>
+          <a:off x="0" y="0"/>
+          <a:ext cx="0" cy="0"/>
+          <a:chOff x="0" y="0"/>
+          <a:chExt cx="0" cy="0"/>
+        </a:xfrm>
+      </p:grpSpPr>
+      <p:sp useBgFill="1">
+        <p:nvSpPr>
+          <p:cNvPr id="14" name="Rectangle 13">
+            <a:extLst>
+              <a:ext uri="{FF2B5EF4-FFF2-40B4-BE49-F238E27FC236}">
+                <a16:creationId xmlns:a16="http://schemas.microsoft.com/office/drawing/2014/main" id="{E91DC736-0EF8-4F87-9146-EBF1D2EE4D3D}"/>
+              </a:ext>
+              <a:ext uri="{C183D7F6-B498-43B3-948B-1728B52AA6E4}">
+                <adec:decorative xmlns:adec="http://schemas.microsoft.com/office/drawing/2017/decorative" val="1"/>
+              </a:ext>
+            </a:extLst>
+          </p:cNvPr>
+          <p:cNvSpPr>
+            <a:spLocks noGrp="1" noRot="1" noChangeAspect="1" noMove="1" noResize="1" noEditPoints="1" noAdjustHandles="1" noChangeArrowheads="1" noChangeShapeType="1" noTextEdit="1"/>
+          </p:cNvSpPr>
+          <p:nvPr>
+            <p:extLst>
+              <p:ext uri="{386F3935-93C4-4BCD-93E2-E3B085C9AB24}">
+                <p16:designElem xmlns:p16="http://schemas.microsoft.com/office/powerpoint/2015/main" val="1"/>
+              </p:ext>
+            </p:extLst>
+          </p:nvPr>
+        </p:nvSpPr>
+        <p:spPr>
+          <a:xfrm>
+            <a:off x="0" y="0"/>
+            <a:ext cx="12192000" cy="6858000"/>
+          </a:xfrm>
+          <a:prstGeom prst="rect">
+            <a:avLst/>
+          </a:prstGeom>
+          <a:ln>
+            <a:noFill/>
+          </a:ln>
+        </p:spPr>
+        <p:style>
+          <a:lnRef idx="2">
+            <a:schemeClr val="accent1">
+              <a:shade val="50000"/>
+            </a:schemeClr>
+          </a:lnRef>
+          <a:fillRef idx="1">
+            <a:schemeClr val="accent1"/>
+          </a:fillRef>
+          <a:effectRef idx="0">
+            <a:schemeClr val="accent1"/>
+          </a:effectRef>
+          <a:fontRef idx="minor">
+            <a:schemeClr val="lt1"/>
+          </a:fontRef>
+        </p:style>
+        <p:txBody>
+          <a:bodyPr rtlCol="0" anchor="ctr"/>
+          <a:lstStyle/>
+          <a:p>
+            <a:pPr marL="0" marR="0" lvl="0" indent="0" algn="ctr" defTabSz="914400" rtl="0" eaLnBrk="1" fontAlgn="auto" latinLnBrk="0" hangingPunct="1">
+              <a:lnSpc>
+                <a:spcPct val="100000"/>
+              </a:lnSpc>
+              <a:spcBef>
+                <a:spcPts val="0"/>
+              </a:spcBef>
+              <a:spcAft>
+                <a:spcPts val="0"/>
+              </a:spcAft>
+              <a:buClrTx/>
+              <a:buSzTx/>
+              <a:buFontTx/>
+              <a:buNone/>
+              <a:tabLst/>
+              <a:defRPr/>
+            </a:pPr>
+            <a:endParaRPr kumimoji="0" lang="en-US" sz="1800" b="0" i="0" u="none" strike="noStrike" kern="1200" cap="none" spc="0" normalizeH="0" baseline="0" noProof="0">
+              <a:ln>
+                <a:noFill/>
+              </a:ln>
+              <a:solidFill>
+                <a:prstClr val="white"/>
+              </a:solidFill>
+              <a:effectLst/>
+              <a:uLnTx/>
+              <a:uFillTx/>
+              <a:latin typeface="Aptos" panose="02110004020202020204"/>
+              <a:ea typeface="+mn-ea"/>
+              <a:cs typeface="+mn-cs"/>
+            </a:endParaRPr>
+          </a:p>
+        </p:txBody>
+      </p:sp>
+      <p:pic>
+        <p:nvPicPr>
+          <p:cNvPr id="4" name="Picture 3" descr="Matterhorn with snow and stars in the sky&#10;&#10;AI-generated content may be incorrect.">
+            <a:extLst>
+              <a:ext uri="{FF2B5EF4-FFF2-40B4-BE49-F238E27FC236}">
+                <a16:creationId xmlns:a16="http://schemas.microsoft.com/office/drawing/2014/main" id="{20FF3D56-E105-8F19-A54E-4F173C83BFB7}"/>
+              </a:ext>
+            </a:extLst>
+          </p:cNvPr>
+          <p:cNvPicPr>
+            <a:picLocks noChangeAspect="1"/>
+          </p:cNvPicPr>
+          <p:nvPr/>
+        </p:nvPicPr>
+        <p:blipFill>
+          <a:blip r:embed="rId2"/>
+          <a:srcRect l="10159" t="9091" r="25205"/>
+          <a:stretch>
+            <a:fillRect/>
+          </a:stretch>
+        </p:blipFill>
+        <p:spPr>
+          <a:xfrm>
+            <a:off x="3523488" y="10"/>
+            <a:ext cx="8668512" cy="6857990"/>
+          </a:xfrm>
+          <a:prstGeom prst="rect">
+            <a:avLst/>
+          </a:prstGeom>
+        </p:spPr>
+      </p:pic>
+      <p:sp>
+        <p:nvSpPr>
+          <p:cNvPr id="16" name="Rectangle 15">
+            <a:extLst>
+              <a:ext uri="{FF2B5EF4-FFF2-40B4-BE49-F238E27FC236}">
+                <a16:creationId xmlns:a16="http://schemas.microsoft.com/office/drawing/2014/main" id="{097CD68E-23E3-4007-8847-CD0944C4F7BE}"/>
+              </a:ext>
+              <a:ext uri="{C183D7F6-B498-43B3-948B-1728B52AA6E4}">
+                <adec:decorative xmlns:adec="http://schemas.microsoft.com/office/drawing/2017/decorative" val="1"/>
+              </a:ext>
+            </a:extLst>
+          </p:cNvPr>
+          <p:cNvSpPr>
+            <a:spLocks noGrp="1" noRot="1" noChangeAspect="1" noMove="1" noResize="1" noEditPoints="1" noAdjustHandles="1" noChangeArrowheads="1" noChangeShapeType="1" noTextEdit="1"/>
+          </p:cNvSpPr>
+          <p:nvPr>
+            <p:extLst>
+              <p:ext uri="{386F3935-93C4-4BCD-93E2-E3B085C9AB24}">
+                <p16:designElem xmlns:p16="http://schemas.microsoft.com/office/powerpoint/2015/main" val="1"/>
+              </p:ext>
+            </p:extLst>
+          </p:nvPr>
+        </p:nvSpPr>
+        <p:spPr>
+          <a:xfrm>
+            <a:off x="0" y="0"/>
+            <a:ext cx="9756601" cy="6858000"/>
+          </a:xfrm>
+          <a:prstGeom prst="rect">
+            <a:avLst/>
+          </a:prstGeom>
+          <a:gradFill>
+            <a:gsLst>
+              <a:gs pos="58000">
+                <a:schemeClr val="bg1"/>
+              </a:gs>
+              <a:gs pos="35000">
+                <a:schemeClr val="bg1">
+                  <a:alpha val="79000"/>
+                </a:schemeClr>
+              </a:gs>
+              <a:gs pos="19000">
+                <a:schemeClr val="bg1">
+                  <a:alpha val="38000"/>
+                </a:schemeClr>
+              </a:gs>
+              <a:gs pos="0">
+                <a:schemeClr val="bg1">
+                  <a:alpha val="0"/>
+                </a:schemeClr>
+              </a:gs>
+              <a:gs pos="100000">
+                <a:schemeClr val="bg1"/>
+              </a:gs>
+            </a:gsLst>
+            <a:lin ang="10800000" scaled="0"/>
+          </a:gradFill>
+          <a:ln>
+            <a:noFill/>
+          </a:ln>
+        </p:spPr>
+        <p:style>
+          <a:lnRef idx="2">
+            <a:schemeClr val="accent1">
+              <a:shade val="50000"/>
+            </a:schemeClr>
+          </a:lnRef>
+          <a:fillRef idx="1">
+            <a:schemeClr val="accent1"/>
+          </a:fillRef>
+          <a:effectRef idx="0">
+            <a:schemeClr val="accent1"/>
+          </a:effectRef>
+          <a:fontRef idx="minor">
+            <a:schemeClr val="lt1"/>
+          </a:fontRef>
+        </p:style>
+        <p:txBody>
+          <a:bodyPr rtlCol="0" anchor="ctr"/>
+          <a:lstStyle/>
+          <a:p>
+            <a:pPr marL="0" marR="0" lvl="0" indent="0" algn="ctr" defTabSz="914400" rtl="0" eaLnBrk="1" fontAlgn="auto" latinLnBrk="0" hangingPunct="1">
+              <a:lnSpc>
+                <a:spcPct val="100000"/>
+              </a:lnSpc>
+              <a:spcBef>
+                <a:spcPts val="0"/>
+              </a:spcBef>
+              <a:spcAft>
+                <a:spcPts val="0"/>
+              </a:spcAft>
+              <a:buClrTx/>
+              <a:buSzTx/>
+              <a:buFontTx/>
+              <a:buNone/>
+              <a:tabLst/>
+              <a:defRPr/>
+            </a:pPr>
+            <a:endParaRPr kumimoji="0" lang="en-US" sz="1800" b="0" i="0" u="none" strike="noStrike" kern="1200" cap="none" spc="0" normalizeH="0" baseline="0" noProof="0" dirty="0">
+              <a:ln>
+                <a:noFill/>
+              </a:ln>
+              <a:solidFill>
+                <a:prstClr val="white"/>
+              </a:solidFill>
+              <a:effectLst/>
+              <a:uLnTx/>
+              <a:uFillTx/>
+              <a:latin typeface="Aptos" panose="02110004020202020204"/>
+              <a:ea typeface="+mn-ea"/>
+              <a:cs typeface="+mn-cs"/>
+            </a:endParaRPr>
+          </a:p>
+        </p:txBody>
+      </p:sp>
+      <p:sp>
+        <p:nvSpPr>
+          <p:cNvPr id="3" name="Subtitle 2">
+            <a:extLst>
+              <a:ext uri="{FF2B5EF4-FFF2-40B4-BE49-F238E27FC236}">
+                <a16:creationId xmlns:a16="http://schemas.microsoft.com/office/drawing/2014/main" id="{F0FD9A51-1655-DF8C-52C5-2398AD7832C4}"/>
+              </a:ext>
+            </a:extLst>
+          </p:cNvPr>
+          <p:cNvSpPr>
+            <a:spLocks noGrp="1"/>
+          </p:cNvSpPr>
+          <p:nvPr>
+            <p:ph type="subTitle" idx="1"/>
+          </p:nvPr>
+        </p:nvSpPr>
+        <p:spPr>
+          <a:xfrm>
+            <a:off x="477980" y="4872922"/>
+            <a:ext cx="4023359" cy="1208141"/>
+          </a:xfrm>
+        </p:spPr>
+        <p:txBody>
+          <a:bodyPr>
+            <a:normAutofit fontScale="92500"/>
+          </a:bodyPr>
+          <a:lstStyle/>
+          <a:p>
+            <a:pPr algn="l"/>
+            <a:endParaRPr lang="en-US" sz="2000" dirty="0">
+              <a:latin typeface="Avenir Medium" panose="02000503020000020003" pitchFamily="2" charset="0"/>
+              <a:ea typeface="Bodoni Ornaments" pitchFamily="2" charset="0"/>
+            </a:endParaRPr>
+          </a:p>
+          <a:p>
+            <a:pPr algn="l"/>
+            <a:r>
+              <a:rPr lang="en-US" sz="4000" i="1" dirty="0">
+                <a:latin typeface="Avenir Oblique" panose="02000503020000020003" pitchFamily="2" charset="0"/>
+                <a:ea typeface="Bodoni Ornaments" pitchFamily="2" charset="0"/>
+              </a:rPr>
+              <a:t>All sufficient merit</a:t>
+            </a:r>
+          </a:p>
+          <a:p>
+            <a:pPr algn="l"/>
+            <a:endParaRPr lang="en-US" sz="2000" dirty="0">
+              <a:latin typeface="Avenir Medium" panose="02000503020000020003" pitchFamily="2" charset="0"/>
+              <a:ea typeface="Bodoni Ornaments" pitchFamily="2" charset="0"/>
+            </a:endParaRPr>
+          </a:p>
+        </p:txBody>
+      </p:sp>
+      <p:sp>
+        <p:nvSpPr>
+          <p:cNvPr id="13" name="Rectangle 12">
+            <a:extLst>
+              <a:ext uri="{FF2B5EF4-FFF2-40B4-BE49-F238E27FC236}">
+                <a16:creationId xmlns:a16="http://schemas.microsoft.com/office/drawing/2014/main" id="{AF2F604E-43BE-4DC3-B983-E071523364F8}"/>
+              </a:ext>
+              <a:ext uri="{C183D7F6-B498-43B3-948B-1728B52AA6E4}">
+                <adec:decorative xmlns:adec="http://schemas.microsoft.com/office/drawing/2017/decorative" val="1"/>
+              </a:ext>
+            </a:extLst>
+          </p:cNvPr>
+          <p:cNvSpPr>
+            <a:spLocks noGrp="1" noRot="1" noChangeAspect="1" noMove="1" noResize="1" noEditPoints="1" noAdjustHandles="1" noChangeArrowheads="1" noChangeShapeType="1" noTextEdit="1"/>
+          </p:cNvSpPr>
+          <p:nvPr>
+            <p:extLst>
+              <p:ext uri="{386F3935-93C4-4BCD-93E2-E3B085C9AB24}">
+                <p16:designElem xmlns:p16="http://schemas.microsoft.com/office/powerpoint/2015/main" val="1"/>
+              </p:ext>
+            </p:extLst>
+          </p:nvPr>
+        </p:nvSpPr>
+        <p:spPr>
+          <a:xfrm rot="5400000">
+            <a:off x="759921" y="346791"/>
+            <a:ext cx="146304" cy="704088"/>
+          </a:xfrm>
+          <a:prstGeom prst="rect">
+            <a:avLst/>
+          </a:prstGeom>
+          <a:solidFill>
+            <a:schemeClr val="accent2"/>
+          </a:solidFill>
+          <a:ln>
+            <a:noFill/>
+          </a:ln>
+        </p:spPr>
+        <p:style>
+          <a:lnRef idx="2">
+            <a:schemeClr val="accent1">
+              <a:shade val="50000"/>
+            </a:schemeClr>
+          </a:lnRef>
+          <a:fillRef idx="1">
+            <a:schemeClr val="accent1"/>
+          </a:fillRef>
+          <a:effectRef idx="0">
+            <a:schemeClr val="accent1"/>
+          </a:effectRef>
+          <a:fontRef idx="minor">
+            <a:schemeClr val="lt1"/>
+          </a:fontRef>
+        </p:style>
+        <p:txBody>
+          <a:bodyPr rtlCol="0" anchor="ctr"/>
+          <a:lstStyle/>
+          <a:p>
+            <a:pPr marL="0" marR="0" lvl="0" indent="0" algn="ctr" defTabSz="914400" rtl="0" eaLnBrk="1" fontAlgn="auto" latinLnBrk="0" hangingPunct="1">
+              <a:lnSpc>
+                <a:spcPct val="100000"/>
+              </a:lnSpc>
+              <a:spcBef>
+                <a:spcPts val="0"/>
+              </a:spcBef>
+              <a:spcAft>
+                <a:spcPts val="0"/>
+              </a:spcAft>
+              <a:buClrTx/>
+              <a:buSzTx/>
+              <a:buFontTx/>
+              <a:buNone/>
+              <a:tabLst/>
+              <a:defRPr/>
+            </a:pPr>
+            <a:endParaRPr kumimoji="0" lang="en-US" sz="1800" b="0" i="0" u="none" strike="noStrike" kern="1200" cap="none" spc="0" normalizeH="0" baseline="0" noProof="0">
+              <a:ln>
+                <a:noFill/>
+              </a:ln>
+              <a:solidFill>
+                <a:prstClr val="white"/>
+              </a:solidFill>
+              <a:effectLst/>
+              <a:uLnTx/>
+              <a:uFillTx/>
+              <a:latin typeface="Calibri" panose="020F0502020204030204"/>
+              <a:ea typeface="+mn-ea"/>
+              <a:cs typeface="+mn-cs"/>
+            </a:endParaRPr>
+          </a:p>
+        </p:txBody>
+      </p:sp>
+      <p:sp>
+        <p:nvSpPr>
+          <p:cNvPr id="15" name="Rectangle 14">
+            <a:extLst>
+              <a:ext uri="{FF2B5EF4-FFF2-40B4-BE49-F238E27FC236}">
+                <a16:creationId xmlns:a16="http://schemas.microsoft.com/office/drawing/2014/main" id="{08C9B587-E65E-4B52-B37C-ABEBB6E87928}"/>
+              </a:ext>
+              <a:ext uri="{C183D7F6-B498-43B3-948B-1728B52AA6E4}">
+                <adec:decorative xmlns:adec="http://schemas.microsoft.com/office/drawing/2017/decorative" val="1"/>
+              </a:ext>
+            </a:extLst>
+          </p:cNvPr>
+          <p:cNvSpPr>
+            <a:spLocks noGrp="1" noRot="1" noChangeAspect="1" noMove="1" noResize="1" noEditPoints="1" noAdjustHandles="1" noChangeArrowheads="1" noChangeShapeType="1" noTextEdit="1"/>
+          </p:cNvSpPr>
+          <p:nvPr>
+            <p:extLst>
+              <p:ext uri="{386F3935-93C4-4BCD-93E2-E3B085C9AB24}">
+                <p16:designElem xmlns:p16="http://schemas.microsoft.com/office/powerpoint/2015/main" val="1"/>
+              </p:ext>
+            </p:extLst>
+          </p:nvPr>
+        </p:nvSpPr>
+        <p:spPr>
+          <a:xfrm>
+            <a:off x="481029" y="4546920"/>
+            <a:ext cx="3977640" cy="18288"/>
+          </a:xfrm>
+          <a:prstGeom prst="rect">
+            <a:avLst/>
+          </a:prstGeom>
+          <a:solidFill>
+            <a:srgbClr val="D5D5D5"/>
+          </a:solidFill>
+          <a:ln w="3175">
+            <a:noFill/>
+          </a:ln>
+          <a:effectLst/>
+        </p:spPr>
+        <p:style>
+          <a:lnRef idx="2">
+            <a:schemeClr val="accent1">
+              <a:shade val="50000"/>
+            </a:schemeClr>
+          </a:lnRef>
+          <a:fillRef idx="1">
+            <a:schemeClr val="accent1"/>
+          </a:fillRef>
+          <a:effectRef idx="0">
+            <a:schemeClr val="accent1"/>
+          </a:effectRef>
+          <a:fontRef idx="minor">
+            <a:schemeClr val="lt1"/>
+          </a:fontRef>
+        </p:style>
+        <p:txBody>
+          <a:bodyPr rtlCol="0" anchor="ctr"/>
+          <a:lstStyle/>
+          <a:p>
+            <a:pPr marL="0" marR="0" lvl="0" indent="0" algn="ctr" defTabSz="914400" rtl="0" eaLnBrk="1" fontAlgn="auto" latinLnBrk="0" hangingPunct="1">
+              <a:lnSpc>
+                <a:spcPct val="100000"/>
+              </a:lnSpc>
+              <a:spcBef>
+                <a:spcPts val="0"/>
+              </a:spcBef>
+              <a:spcAft>
+                <a:spcPts val="0"/>
+              </a:spcAft>
+              <a:buClrTx/>
+              <a:buSzTx/>
+              <a:buFontTx/>
+              <a:buNone/>
+              <a:tabLst/>
+              <a:defRPr/>
+            </a:pPr>
+            <a:endParaRPr kumimoji="0" lang="en-US" sz="1800" b="0" i="0" u="none" strike="noStrike" kern="1200" cap="none" spc="0" normalizeH="0" baseline="0" noProof="0">
+              <a:ln>
+                <a:noFill/>
+              </a:ln>
+              <a:solidFill>
+                <a:prstClr val="white"/>
+              </a:solidFill>
+              <a:effectLst/>
+              <a:uLnTx/>
+              <a:uFillTx/>
+              <a:latin typeface="Calibri" panose="020F0502020204030204"/>
+              <a:ea typeface="+mn-ea"/>
+              <a:cs typeface="+mn-cs"/>
+            </a:endParaRPr>
+          </a:p>
+        </p:txBody>
+      </p:sp>
+    </p:spTree>
+    <p:extLst>
+      <p:ext uri="{BB962C8B-B14F-4D97-AF65-F5344CB8AC3E}">
+        <p14:creationId xmlns:p14="http://schemas.microsoft.com/office/powerpoint/2010/main" val="1364850361"/>
       </p:ext>
     </p:extLst>
   </p:cSld>
@@ -7250,992 +7674,6 @@
         <p:cNvPr id="1" name="">
           <a:extLst>
             <a:ext uri="{FF2B5EF4-FFF2-40B4-BE49-F238E27FC236}">
-              <a16:creationId xmlns:a16="http://schemas.microsoft.com/office/drawing/2014/main" id="{2FE6B65D-96F1-5B6D-9D9A-933A4AAB94A5}"/>
-            </a:ext>
-          </a:extLst>
-        </p:cNvPr>
-        <p:cNvGrpSpPr/>
-        <p:nvPr/>
-      </p:nvGrpSpPr>
-      <p:grpSpPr>
-        <a:xfrm>
-          <a:off x="0" y="0"/>
-          <a:ext cx="0" cy="0"/>
-          <a:chOff x="0" y="0"/>
-          <a:chExt cx="0" cy="0"/>
-        </a:xfrm>
-      </p:grpSpPr>
-      <p:sp>
-        <p:nvSpPr>
-          <p:cNvPr id="3" name="Subtitle 2">
-            <a:extLst>
-              <a:ext uri="{FF2B5EF4-FFF2-40B4-BE49-F238E27FC236}">
-                <a16:creationId xmlns:a16="http://schemas.microsoft.com/office/drawing/2014/main" id="{B27DBBAA-2033-906F-4C36-5619AE08FF31}"/>
-              </a:ext>
-            </a:extLst>
-          </p:cNvPr>
-          <p:cNvSpPr>
-            <a:spLocks noGrp="1"/>
-          </p:cNvSpPr>
-          <p:nvPr>
-            <p:ph type="subTitle" idx="1"/>
-          </p:nvPr>
-        </p:nvSpPr>
-        <p:spPr>
-          <a:xfrm>
-            <a:off x="682831" y="497702"/>
-            <a:ext cx="10826338" cy="5862596"/>
-          </a:xfrm>
-        </p:spPr>
-        <p:txBody>
-          <a:bodyPr>
-            <a:noAutofit/>
-          </a:bodyPr>
-          <a:lstStyle/>
-          <a:p>
-            <a:endParaRPr lang="en-US" sz="4400" dirty="0">
-              <a:solidFill>
-                <a:schemeClr val="bg1"/>
-              </a:solidFill>
-              <a:latin typeface="Avenir Medium" panose="02000503020000020003" pitchFamily="2" charset="0"/>
-              <a:ea typeface="Bodoni Ornaments" pitchFamily="2" charset="0"/>
-            </a:endParaRPr>
-          </a:p>
-          <a:p>
-            <a:r>
-              <a:rPr lang="en-US" sz="4400" dirty="0">
-                <a:solidFill>
-                  <a:schemeClr val="bg1"/>
-                </a:solidFill>
-                <a:latin typeface="Avenir Medium" panose="02000503020000020003" pitchFamily="2" charset="0"/>
-                <a:ea typeface="Bodoni Ornaments" pitchFamily="2" charset="0"/>
-              </a:rPr>
-              <a:t>We stood 'neath a debt </a:t>
-            </a:r>
-          </a:p>
-          <a:p>
-            <a:endParaRPr lang="en-US" sz="4400" dirty="0">
-              <a:solidFill>
-                <a:schemeClr val="bg1"/>
-              </a:solidFill>
-              <a:latin typeface="Avenir Medium" panose="02000503020000020003" pitchFamily="2" charset="0"/>
-              <a:ea typeface="Bodoni Ornaments" pitchFamily="2" charset="0"/>
-            </a:endParaRPr>
-          </a:p>
-          <a:p>
-            <a:r>
-              <a:rPr lang="en-US" sz="4400" dirty="0">
-                <a:solidFill>
-                  <a:schemeClr val="bg1"/>
-                </a:solidFill>
-                <a:latin typeface="Avenir Medium" panose="02000503020000020003" pitchFamily="2" charset="0"/>
-                <a:ea typeface="Bodoni Ornaments" pitchFamily="2" charset="0"/>
-              </a:rPr>
-              <a:t>we could never afford</a:t>
-            </a:r>
-          </a:p>
-          <a:p>
-            <a:endParaRPr lang="en-US" sz="4400" dirty="0">
-              <a:solidFill>
-                <a:schemeClr val="bg1"/>
-              </a:solidFill>
-              <a:latin typeface="Avenir Medium" panose="02000503020000020003" pitchFamily="2" charset="0"/>
-              <a:ea typeface="Bodoni Ornaments" pitchFamily="2" charset="0"/>
-            </a:endParaRPr>
-          </a:p>
-          <a:p>
-            <a:r>
-              <a:rPr lang="en-US" sz="4400" dirty="0">
-                <a:solidFill>
-                  <a:schemeClr val="bg1"/>
-                </a:solidFill>
-                <a:latin typeface="Avenir Medium" panose="02000503020000020003" pitchFamily="2" charset="0"/>
-                <a:ea typeface="Bodoni Ornaments" pitchFamily="2" charset="0"/>
-              </a:rPr>
-              <a:t>Our sins they are many, </a:t>
-            </a:r>
-          </a:p>
-          <a:p>
-            <a:endParaRPr lang="en-US" sz="4400" dirty="0">
-              <a:solidFill>
-                <a:schemeClr val="bg1"/>
-              </a:solidFill>
-              <a:latin typeface="Avenir Medium" panose="02000503020000020003" pitchFamily="2" charset="0"/>
-              <a:ea typeface="Bodoni Ornaments" pitchFamily="2" charset="0"/>
-            </a:endParaRPr>
-          </a:p>
-          <a:p>
-            <a:r>
-              <a:rPr lang="en-US" sz="4400" dirty="0">
-                <a:solidFill>
-                  <a:schemeClr val="bg1"/>
-                </a:solidFill>
-                <a:latin typeface="Avenir Medium" panose="02000503020000020003" pitchFamily="2" charset="0"/>
-                <a:ea typeface="Bodoni Ornaments" pitchFamily="2" charset="0"/>
-              </a:rPr>
-              <a:t>His mercy is more</a:t>
-            </a:r>
-          </a:p>
-        </p:txBody>
-      </p:sp>
-    </p:spTree>
-    <p:extLst>
-      <p:ext uri="{BB962C8B-B14F-4D97-AF65-F5344CB8AC3E}">
-        <p14:creationId xmlns:p14="http://schemas.microsoft.com/office/powerpoint/2010/main" val="1169012159"/>
-      </p:ext>
-    </p:extLst>
-  </p:cSld>
-  <p:clrMapOvr>
-    <a:masterClrMapping/>
-  </p:clrMapOvr>
-</p:sld>
-</file>
-
-<file path=ppt/slides/slide31.xml><?xml version="1.0" encoding="utf-8"?>
-<p:sld xmlns:a="http://schemas.openxmlformats.org/drawingml/2006/main" xmlns:r="http://schemas.openxmlformats.org/officeDocument/2006/relationships" xmlns:p="http://schemas.openxmlformats.org/presentationml/2006/main">
-  <p:cSld>
-    <p:bg>
-      <p:bgPr>
-        <a:solidFill>
-          <a:srgbClr val="7030A0"/>
-        </a:solidFill>
-        <a:effectLst/>
-      </p:bgPr>
-    </p:bg>
-    <p:spTree>
-      <p:nvGrpSpPr>
-        <p:cNvPr id="1" name="">
-          <a:extLst>
-            <a:ext uri="{FF2B5EF4-FFF2-40B4-BE49-F238E27FC236}">
-              <a16:creationId xmlns:a16="http://schemas.microsoft.com/office/drawing/2014/main" id="{C2EA5D3B-5A31-5698-7DF9-54DDEFAC9173}"/>
-            </a:ext>
-          </a:extLst>
-        </p:cNvPr>
-        <p:cNvGrpSpPr/>
-        <p:nvPr/>
-      </p:nvGrpSpPr>
-      <p:grpSpPr>
-        <a:xfrm>
-          <a:off x="0" y="0"/>
-          <a:ext cx="0" cy="0"/>
-          <a:chOff x="0" y="0"/>
-          <a:chExt cx="0" cy="0"/>
-        </a:xfrm>
-      </p:grpSpPr>
-      <p:sp>
-        <p:nvSpPr>
-          <p:cNvPr id="3" name="Subtitle 2">
-            <a:extLst>
-              <a:ext uri="{FF2B5EF4-FFF2-40B4-BE49-F238E27FC236}">
-                <a16:creationId xmlns:a16="http://schemas.microsoft.com/office/drawing/2014/main" id="{8198300B-F415-10BF-A959-7056D317E1FC}"/>
-              </a:ext>
-            </a:extLst>
-          </p:cNvPr>
-          <p:cNvSpPr>
-            <a:spLocks noGrp="1"/>
-          </p:cNvSpPr>
-          <p:nvPr>
-            <p:ph type="subTitle" idx="1"/>
-          </p:nvPr>
-        </p:nvSpPr>
-        <p:spPr>
-          <a:xfrm>
-            <a:off x="682831" y="497702"/>
-            <a:ext cx="10826338" cy="5862596"/>
-          </a:xfrm>
-        </p:spPr>
-        <p:txBody>
-          <a:bodyPr>
-            <a:noAutofit/>
-          </a:bodyPr>
-          <a:lstStyle/>
-          <a:p>
-            <a:endParaRPr lang="en-US" sz="4400" dirty="0">
-              <a:solidFill>
-                <a:schemeClr val="bg1"/>
-              </a:solidFill>
-              <a:latin typeface="Avenir Medium" panose="02000503020000020003" pitchFamily="2" charset="0"/>
-              <a:ea typeface="Bodoni Ornaments" pitchFamily="2" charset="0"/>
-            </a:endParaRPr>
-          </a:p>
-          <a:p>
-            <a:r>
-              <a:rPr lang="en-US" sz="4400" dirty="0">
-                <a:solidFill>
-                  <a:schemeClr val="bg1"/>
-                </a:solidFill>
-                <a:latin typeface="Avenir Medium" panose="02000503020000020003" pitchFamily="2" charset="0"/>
-                <a:ea typeface="Bodoni Ornaments" pitchFamily="2" charset="0"/>
-              </a:rPr>
-              <a:t>Praise the Lord, </a:t>
-            </a:r>
-            <a:br>
-              <a:rPr lang="en-US" sz="4400" dirty="0">
-                <a:solidFill>
-                  <a:schemeClr val="bg1"/>
-                </a:solidFill>
-                <a:latin typeface="Avenir Medium" panose="02000503020000020003" pitchFamily="2" charset="0"/>
-                <a:ea typeface="Bodoni Ornaments" pitchFamily="2" charset="0"/>
-              </a:rPr>
-            </a:br>
-            <a:endParaRPr lang="en-US" sz="4400" dirty="0">
-              <a:solidFill>
-                <a:schemeClr val="bg1"/>
-              </a:solidFill>
-              <a:latin typeface="Avenir Medium" panose="02000503020000020003" pitchFamily="2" charset="0"/>
-              <a:ea typeface="Bodoni Ornaments" pitchFamily="2" charset="0"/>
-            </a:endParaRPr>
-          </a:p>
-          <a:p>
-            <a:r>
-              <a:rPr lang="en-US" sz="4400" dirty="0">
-                <a:solidFill>
-                  <a:schemeClr val="bg1"/>
-                </a:solidFill>
-                <a:latin typeface="Avenir Medium" panose="02000503020000020003" pitchFamily="2" charset="0"/>
-                <a:ea typeface="Bodoni Ornaments" pitchFamily="2" charset="0"/>
-              </a:rPr>
-              <a:t>His mercy is more</a:t>
-            </a:r>
-          </a:p>
-          <a:p>
-            <a:endParaRPr lang="en-US" sz="4400" dirty="0">
-              <a:solidFill>
-                <a:schemeClr val="bg1"/>
-              </a:solidFill>
-              <a:latin typeface="Avenir Medium" panose="02000503020000020003" pitchFamily="2" charset="0"/>
-              <a:ea typeface="Bodoni Ornaments" pitchFamily="2" charset="0"/>
-            </a:endParaRPr>
-          </a:p>
-          <a:p>
-            <a:r>
-              <a:rPr lang="en-US" sz="4400" dirty="0">
-                <a:solidFill>
-                  <a:schemeClr val="bg1"/>
-                </a:solidFill>
-                <a:latin typeface="Avenir Medium" panose="02000503020000020003" pitchFamily="2" charset="0"/>
-                <a:ea typeface="Bodoni Ornaments" pitchFamily="2" charset="0"/>
-              </a:rPr>
-              <a:t>Stronger than darkness, </a:t>
-            </a:r>
-          </a:p>
-          <a:p>
-            <a:endParaRPr lang="en-US" sz="4400" dirty="0">
-              <a:solidFill>
-                <a:schemeClr val="bg1"/>
-              </a:solidFill>
-              <a:latin typeface="Avenir Medium" panose="02000503020000020003" pitchFamily="2" charset="0"/>
-              <a:ea typeface="Bodoni Ornaments" pitchFamily="2" charset="0"/>
-            </a:endParaRPr>
-          </a:p>
-          <a:p>
-            <a:r>
-              <a:rPr lang="en-US" sz="4400" dirty="0">
-                <a:solidFill>
-                  <a:schemeClr val="bg1"/>
-                </a:solidFill>
-                <a:latin typeface="Avenir Medium" panose="02000503020000020003" pitchFamily="2" charset="0"/>
-                <a:ea typeface="Bodoni Ornaments" pitchFamily="2" charset="0"/>
-              </a:rPr>
-              <a:t>new every morn</a:t>
-            </a:r>
-          </a:p>
-        </p:txBody>
-      </p:sp>
-    </p:spTree>
-    <p:extLst>
-      <p:ext uri="{BB962C8B-B14F-4D97-AF65-F5344CB8AC3E}">
-        <p14:creationId xmlns:p14="http://schemas.microsoft.com/office/powerpoint/2010/main" val="3938360840"/>
-      </p:ext>
-    </p:extLst>
-  </p:cSld>
-  <p:clrMapOvr>
-    <a:masterClrMapping/>
-  </p:clrMapOvr>
-</p:sld>
-</file>
-
-<file path=ppt/slides/slide32.xml><?xml version="1.0" encoding="utf-8"?>
-<p:sld xmlns:a="http://schemas.openxmlformats.org/drawingml/2006/main" xmlns:r="http://schemas.openxmlformats.org/officeDocument/2006/relationships" xmlns:p="http://schemas.openxmlformats.org/presentationml/2006/main">
-  <p:cSld>
-    <p:bg>
-      <p:bgPr>
-        <a:solidFill>
-          <a:srgbClr val="7030A0"/>
-        </a:solidFill>
-        <a:effectLst/>
-      </p:bgPr>
-    </p:bg>
-    <p:spTree>
-      <p:nvGrpSpPr>
-        <p:cNvPr id="1" name="">
-          <a:extLst>
-            <a:ext uri="{FF2B5EF4-FFF2-40B4-BE49-F238E27FC236}">
-              <a16:creationId xmlns:a16="http://schemas.microsoft.com/office/drawing/2014/main" id="{9877808D-1E46-8C81-5D76-B14D1413F0AC}"/>
-            </a:ext>
-          </a:extLst>
-        </p:cNvPr>
-        <p:cNvGrpSpPr/>
-        <p:nvPr/>
-      </p:nvGrpSpPr>
-      <p:grpSpPr>
-        <a:xfrm>
-          <a:off x="0" y="0"/>
-          <a:ext cx="0" cy="0"/>
-          <a:chOff x="0" y="0"/>
-          <a:chExt cx="0" cy="0"/>
-        </a:xfrm>
-      </p:grpSpPr>
-      <p:sp>
-        <p:nvSpPr>
-          <p:cNvPr id="3" name="Subtitle 2">
-            <a:extLst>
-              <a:ext uri="{FF2B5EF4-FFF2-40B4-BE49-F238E27FC236}">
-                <a16:creationId xmlns:a16="http://schemas.microsoft.com/office/drawing/2014/main" id="{06E42776-788D-F826-6994-B48B153D96FD}"/>
-              </a:ext>
-            </a:extLst>
-          </p:cNvPr>
-          <p:cNvSpPr>
-            <a:spLocks noGrp="1"/>
-          </p:cNvSpPr>
-          <p:nvPr>
-            <p:ph type="subTitle" idx="1"/>
-          </p:nvPr>
-        </p:nvSpPr>
-        <p:spPr>
-          <a:xfrm>
-            <a:off x="682831" y="497702"/>
-            <a:ext cx="10826338" cy="5862596"/>
-          </a:xfrm>
-        </p:spPr>
-        <p:txBody>
-          <a:bodyPr>
-            <a:noAutofit/>
-          </a:bodyPr>
-          <a:lstStyle/>
-          <a:p>
-            <a:endParaRPr lang="en-US" sz="4400" dirty="0">
-              <a:solidFill>
-                <a:schemeClr val="bg1"/>
-              </a:solidFill>
-              <a:latin typeface="Avenir Medium" panose="02000503020000020003" pitchFamily="2" charset="0"/>
-              <a:ea typeface="Bodoni Ornaments" pitchFamily="2" charset="0"/>
-            </a:endParaRPr>
-          </a:p>
-          <a:p>
-            <a:r>
-              <a:rPr lang="en-US" sz="4400" dirty="0">
-                <a:solidFill>
-                  <a:schemeClr val="bg1"/>
-                </a:solidFill>
-                <a:latin typeface="Avenir Medium" panose="02000503020000020003" pitchFamily="2" charset="0"/>
-                <a:ea typeface="Bodoni Ornaments" pitchFamily="2" charset="0"/>
-              </a:rPr>
-              <a:t>Our sins they are many, </a:t>
-            </a:r>
-          </a:p>
-          <a:p>
-            <a:r>
-              <a:rPr lang="en-US" sz="4400" dirty="0">
-                <a:solidFill>
-                  <a:schemeClr val="bg1"/>
-                </a:solidFill>
-                <a:latin typeface="Avenir Medium" panose="02000503020000020003" pitchFamily="2" charset="0"/>
-                <a:ea typeface="Bodoni Ornaments" pitchFamily="2" charset="0"/>
-              </a:rPr>
-              <a:t>His mercy is more</a:t>
-            </a:r>
-          </a:p>
-          <a:p>
-            <a:endParaRPr lang="en-US" sz="4400" dirty="0">
-              <a:solidFill>
-                <a:schemeClr val="bg1"/>
-              </a:solidFill>
-              <a:latin typeface="Avenir Medium" panose="02000503020000020003" pitchFamily="2" charset="0"/>
-              <a:ea typeface="Bodoni Ornaments" pitchFamily="2" charset="0"/>
-            </a:endParaRPr>
-          </a:p>
-          <a:p>
-            <a:r>
-              <a:rPr lang="en-US" sz="4400" dirty="0">
-                <a:solidFill>
-                  <a:schemeClr val="bg1"/>
-                </a:solidFill>
-                <a:latin typeface="Avenir Medium" panose="02000503020000020003" pitchFamily="2" charset="0"/>
-                <a:ea typeface="Bodoni Ornaments" pitchFamily="2" charset="0"/>
-              </a:rPr>
-              <a:t>Our sins they are many, </a:t>
-            </a:r>
-          </a:p>
-          <a:p>
-            <a:r>
-              <a:rPr lang="en-US" sz="4400" dirty="0">
-                <a:solidFill>
-                  <a:schemeClr val="bg1"/>
-                </a:solidFill>
-                <a:latin typeface="Avenir Medium" panose="02000503020000020003" pitchFamily="2" charset="0"/>
-                <a:ea typeface="Bodoni Ornaments" pitchFamily="2" charset="0"/>
-              </a:rPr>
-              <a:t>His mercy is more</a:t>
-            </a:r>
-          </a:p>
-          <a:p>
-            <a:endParaRPr lang="en-US" sz="4400" dirty="0">
-              <a:solidFill>
-                <a:schemeClr val="bg1"/>
-              </a:solidFill>
-              <a:latin typeface="Avenir Medium" panose="02000503020000020003" pitchFamily="2" charset="0"/>
-              <a:ea typeface="Bodoni Ornaments" pitchFamily="2" charset="0"/>
-            </a:endParaRPr>
-          </a:p>
-        </p:txBody>
-      </p:sp>
-    </p:spTree>
-    <p:extLst>
-      <p:ext uri="{BB962C8B-B14F-4D97-AF65-F5344CB8AC3E}">
-        <p14:creationId xmlns:p14="http://schemas.microsoft.com/office/powerpoint/2010/main" val="404716244"/>
-      </p:ext>
-    </p:extLst>
-  </p:cSld>
-  <p:clrMapOvr>
-    <a:masterClrMapping/>
-  </p:clrMapOvr>
-</p:sld>
-</file>
-
-<file path=ppt/slides/slide33.xml><?xml version="1.0" encoding="utf-8"?>
-<p:sld xmlns:a="http://schemas.openxmlformats.org/drawingml/2006/main" xmlns:r="http://schemas.openxmlformats.org/officeDocument/2006/relationships" xmlns:p="http://schemas.openxmlformats.org/presentationml/2006/main">
-  <p:cSld>
-    <p:bg>
-      <p:bgPr>
-        <a:solidFill>
-          <a:schemeClr val="bg1"/>
-        </a:solidFill>
-        <a:effectLst/>
-      </p:bgPr>
-    </p:bg>
-    <p:spTree>
-      <p:nvGrpSpPr>
-        <p:cNvPr id="1" name="">
-          <a:extLst>
-            <a:ext uri="{FF2B5EF4-FFF2-40B4-BE49-F238E27FC236}">
-              <a16:creationId xmlns:a16="http://schemas.microsoft.com/office/drawing/2014/main" id="{43ACF013-4574-2AD0-7BFD-6E771B7E5C0B}"/>
-            </a:ext>
-          </a:extLst>
-        </p:cNvPr>
-        <p:cNvGrpSpPr/>
-        <p:nvPr/>
-      </p:nvGrpSpPr>
-      <p:grpSpPr>
-        <a:xfrm>
-          <a:off x="0" y="0"/>
-          <a:ext cx="0" cy="0"/>
-          <a:chOff x="0" y="0"/>
-          <a:chExt cx="0" cy="0"/>
-        </a:xfrm>
-      </p:grpSpPr>
-      <p:sp useBgFill="1">
-        <p:nvSpPr>
-          <p:cNvPr id="14" name="Rectangle 13">
-            <a:extLst>
-              <a:ext uri="{FF2B5EF4-FFF2-40B4-BE49-F238E27FC236}">
-                <a16:creationId xmlns:a16="http://schemas.microsoft.com/office/drawing/2014/main" id="{E91DC736-0EF8-4F87-9146-EBF1D2EE4D3D}"/>
-              </a:ext>
-              <a:ext uri="{C183D7F6-B498-43B3-948B-1728B52AA6E4}">
-                <adec:decorative xmlns:adec="http://schemas.microsoft.com/office/drawing/2017/decorative" val="1"/>
-              </a:ext>
-            </a:extLst>
-          </p:cNvPr>
-          <p:cNvSpPr>
-            <a:spLocks noGrp="1" noRot="1" noChangeAspect="1" noMove="1" noResize="1" noEditPoints="1" noAdjustHandles="1" noChangeArrowheads="1" noChangeShapeType="1" noTextEdit="1"/>
-          </p:cNvSpPr>
-          <p:nvPr>
-            <p:extLst>
-              <p:ext uri="{386F3935-93C4-4BCD-93E2-E3B085C9AB24}">
-                <p16:designElem xmlns:p16="http://schemas.microsoft.com/office/powerpoint/2015/main" val="1"/>
-              </p:ext>
-            </p:extLst>
-          </p:nvPr>
-        </p:nvSpPr>
-        <p:spPr>
-          <a:xfrm>
-            <a:off x="0" y="0"/>
-            <a:ext cx="12192000" cy="6858000"/>
-          </a:xfrm>
-          <a:prstGeom prst="rect">
-            <a:avLst/>
-          </a:prstGeom>
-          <a:ln>
-            <a:noFill/>
-          </a:ln>
-        </p:spPr>
-        <p:style>
-          <a:lnRef idx="2">
-            <a:schemeClr val="accent1">
-              <a:shade val="50000"/>
-            </a:schemeClr>
-          </a:lnRef>
-          <a:fillRef idx="1">
-            <a:schemeClr val="accent1"/>
-          </a:fillRef>
-          <a:effectRef idx="0">
-            <a:schemeClr val="accent1"/>
-          </a:effectRef>
-          <a:fontRef idx="minor">
-            <a:schemeClr val="lt1"/>
-          </a:fontRef>
-        </p:style>
-        <p:txBody>
-          <a:bodyPr rtlCol="0" anchor="ctr"/>
-          <a:lstStyle/>
-          <a:p>
-            <a:pPr marL="0" marR="0" lvl="0" indent="0" algn="ctr" defTabSz="914400" rtl="0" eaLnBrk="1" fontAlgn="auto" latinLnBrk="0" hangingPunct="1">
-              <a:lnSpc>
-                <a:spcPct val="100000"/>
-              </a:lnSpc>
-              <a:spcBef>
-                <a:spcPts val="0"/>
-              </a:spcBef>
-              <a:spcAft>
-                <a:spcPts val="0"/>
-              </a:spcAft>
-              <a:buClrTx/>
-              <a:buSzTx/>
-              <a:buFontTx/>
-              <a:buNone/>
-              <a:tabLst/>
-              <a:defRPr/>
-            </a:pPr>
-            <a:endParaRPr kumimoji="0" lang="en-US" sz="1800" b="0" i="0" u="none" strike="noStrike" kern="1200" cap="none" spc="0" normalizeH="0" baseline="0" noProof="0">
-              <a:ln>
-                <a:noFill/>
-              </a:ln>
-              <a:solidFill>
-                <a:prstClr val="white"/>
-              </a:solidFill>
-              <a:effectLst/>
-              <a:uLnTx/>
-              <a:uFillTx/>
-              <a:latin typeface="Aptos" panose="02110004020202020204"/>
-              <a:ea typeface="+mn-ea"/>
-              <a:cs typeface="+mn-cs"/>
-            </a:endParaRPr>
-          </a:p>
-        </p:txBody>
-      </p:sp>
-      <p:pic>
-        <p:nvPicPr>
-          <p:cNvPr id="4" name="Picture 3" descr="Matterhorn with snow and stars in the sky&#10;&#10;AI-generated content may be incorrect.">
-            <a:extLst>
-              <a:ext uri="{FF2B5EF4-FFF2-40B4-BE49-F238E27FC236}">
-                <a16:creationId xmlns:a16="http://schemas.microsoft.com/office/drawing/2014/main" id="{20FF3D56-E105-8F19-A54E-4F173C83BFB7}"/>
-              </a:ext>
-            </a:extLst>
-          </p:cNvPr>
-          <p:cNvPicPr>
-            <a:picLocks noChangeAspect="1"/>
-          </p:cNvPicPr>
-          <p:nvPr/>
-        </p:nvPicPr>
-        <p:blipFill>
-          <a:blip r:embed="rId2"/>
-          <a:srcRect l="10159" t="9091" r="25205"/>
-          <a:stretch>
-            <a:fillRect/>
-          </a:stretch>
-        </p:blipFill>
-        <p:spPr>
-          <a:xfrm>
-            <a:off x="3523488" y="10"/>
-            <a:ext cx="8668512" cy="6857990"/>
-          </a:xfrm>
-          <a:prstGeom prst="rect">
-            <a:avLst/>
-          </a:prstGeom>
-        </p:spPr>
-      </p:pic>
-      <p:sp>
-        <p:nvSpPr>
-          <p:cNvPr id="16" name="Rectangle 15">
-            <a:extLst>
-              <a:ext uri="{FF2B5EF4-FFF2-40B4-BE49-F238E27FC236}">
-                <a16:creationId xmlns:a16="http://schemas.microsoft.com/office/drawing/2014/main" id="{097CD68E-23E3-4007-8847-CD0944C4F7BE}"/>
-              </a:ext>
-              <a:ext uri="{C183D7F6-B498-43B3-948B-1728B52AA6E4}">
-                <adec:decorative xmlns:adec="http://schemas.microsoft.com/office/drawing/2017/decorative" val="1"/>
-              </a:ext>
-            </a:extLst>
-          </p:cNvPr>
-          <p:cNvSpPr>
-            <a:spLocks noGrp="1" noRot="1" noChangeAspect="1" noMove="1" noResize="1" noEditPoints="1" noAdjustHandles="1" noChangeArrowheads="1" noChangeShapeType="1" noTextEdit="1"/>
-          </p:cNvSpPr>
-          <p:nvPr>
-            <p:extLst>
-              <p:ext uri="{386F3935-93C4-4BCD-93E2-E3B085C9AB24}">
-                <p16:designElem xmlns:p16="http://schemas.microsoft.com/office/powerpoint/2015/main" val="1"/>
-              </p:ext>
-            </p:extLst>
-          </p:nvPr>
-        </p:nvSpPr>
-        <p:spPr>
-          <a:xfrm>
-            <a:off x="0" y="0"/>
-            <a:ext cx="9756601" cy="6858000"/>
-          </a:xfrm>
-          <a:prstGeom prst="rect">
-            <a:avLst/>
-          </a:prstGeom>
-          <a:gradFill>
-            <a:gsLst>
-              <a:gs pos="58000">
-                <a:schemeClr val="bg1"/>
-              </a:gs>
-              <a:gs pos="35000">
-                <a:schemeClr val="bg1">
-                  <a:alpha val="79000"/>
-                </a:schemeClr>
-              </a:gs>
-              <a:gs pos="19000">
-                <a:schemeClr val="bg1">
-                  <a:alpha val="38000"/>
-                </a:schemeClr>
-              </a:gs>
-              <a:gs pos="0">
-                <a:schemeClr val="bg1">
-                  <a:alpha val="0"/>
-                </a:schemeClr>
-              </a:gs>
-              <a:gs pos="100000">
-                <a:schemeClr val="bg1"/>
-              </a:gs>
-            </a:gsLst>
-            <a:lin ang="10800000" scaled="0"/>
-          </a:gradFill>
-          <a:ln>
-            <a:noFill/>
-          </a:ln>
-        </p:spPr>
-        <p:style>
-          <a:lnRef idx="2">
-            <a:schemeClr val="accent1">
-              <a:shade val="50000"/>
-            </a:schemeClr>
-          </a:lnRef>
-          <a:fillRef idx="1">
-            <a:schemeClr val="accent1"/>
-          </a:fillRef>
-          <a:effectRef idx="0">
-            <a:schemeClr val="accent1"/>
-          </a:effectRef>
-          <a:fontRef idx="minor">
-            <a:schemeClr val="lt1"/>
-          </a:fontRef>
-        </p:style>
-        <p:txBody>
-          <a:bodyPr rtlCol="0" anchor="ctr"/>
-          <a:lstStyle/>
-          <a:p>
-            <a:pPr marL="0" marR="0" lvl="0" indent="0" algn="ctr" defTabSz="914400" rtl="0" eaLnBrk="1" fontAlgn="auto" latinLnBrk="0" hangingPunct="1">
-              <a:lnSpc>
-                <a:spcPct val="100000"/>
-              </a:lnSpc>
-              <a:spcBef>
-                <a:spcPts val="0"/>
-              </a:spcBef>
-              <a:spcAft>
-                <a:spcPts val="0"/>
-              </a:spcAft>
-              <a:buClrTx/>
-              <a:buSzTx/>
-              <a:buFontTx/>
-              <a:buNone/>
-              <a:tabLst/>
-              <a:defRPr/>
-            </a:pPr>
-            <a:endParaRPr kumimoji="0" lang="en-US" sz="1800" b="0" i="0" u="none" strike="noStrike" kern="1200" cap="none" spc="0" normalizeH="0" baseline="0" noProof="0" dirty="0">
-              <a:ln>
-                <a:noFill/>
-              </a:ln>
-              <a:solidFill>
-                <a:prstClr val="white"/>
-              </a:solidFill>
-              <a:effectLst/>
-              <a:uLnTx/>
-              <a:uFillTx/>
-              <a:latin typeface="Aptos" panose="02110004020202020204"/>
-              <a:ea typeface="+mn-ea"/>
-              <a:cs typeface="+mn-cs"/>
-            </a:endParaRPr>
-          </a:p>
-        </p:txBody>
-      </p:sp>
-      <p:sp>
-        <p:nvSpPr>
-          <p:cNvPr id="3" name="Subtitle 2">
-            <a:extLst>
-              <a:ext uri="{FF2B5EF4-FFF2-40B4-BE49-F238E27FC236}">
-                <a16:creationId xmlns:a16="http://schemas.microsoft.com/office/drawing/2014/main" id="{F0FD9A51-1655-DF8C-52C5-2398AD7832C4}"/>
-              </a:ext>
-            </a:extLst>
-          </p:cNvPr>
-          <p:cNvSpPr>
-            <a:spLocks noGrp="1"/>
-          </p:cNvSpPr>
-          <p:nvPr>
-            <p:ph type="subTitle" idx="1"/>
-          </p:nvPr>
-        </p:nvSpPr>
-        <p:spPr>
-          <a:xfrm>
-            <a:off x="477980" y="4872922"/>
-            <a:ext cx="4023359" cy="1208141"/>
-          </a:xfrm>
-        </p:spPr>
-        <p:txBody>
-          <a:bodyPr>
-            <a:normAutofit fontScale="92500"/>
-          </a:bodyPr>
-          <a:lstStyle/>
-          <a:p>
-            <a:pPr algn="l"/>
-            <a:endParaRPr lang="en-US" sz="2000" dirty="0">
-              <a:latin typeface="Avenir Medium" panose="02000503020000020003" pitchFamily="2" charset="0"/>
-              <a:ea typeface="Bodoni Ornaments" pitchFamily="2" charset="0"/>
-            </a:endParaRPr>
-          </a:p>
-          <a:p>
-            <a:pPr algn="l"/>
-            <a:r>
-              <a:rPr lang="en-US" sz="4000" i="1" dirty="0">
-                <a:latin typeface="Avenir Oblique" panose="02000503020000020003" pitchFamily="2" charset="0"/>
-                <a:ea typeface="Bodoni Ornaments" pitchFamily="2" charset="0"/>
-              </a:rPr>
-              <a:t>All sufficient merit</a:t>
-            </a:r>
-          </a:p>
-          <a:p>
-            <a:pPr algn="l"/>
-            <a:endParaRPr lang="en-US" sz="2000" dirty="0">
-              <a:latin typeface="Avenir Medium" panose="02000503020000020003" pitchFamily="2" charset="0"/>
-              <a:ea typeface="Bodoni Ornaments" pitchFamily="2" charset="0"/>
-            </a:endParaRPr>
-          </a:p>
-        </p:txBody>
-      </p:sp>
-      <p:sp>
-        <p:nvSpPr>
-          <p:cNvPr id="13" name="Rectangle 12">
-            <a:extLst>
-              <a:ext uri="{FF2B5EF4-FFF2-40B4-BE49-F238E27FC236}">
-                <a16:creationId xmlns:a16="http://schemas.microsoft.com/office/drawing/2014/main" id="{AF2F604E-43BE-4DC3-B983-E071523364F8}"/>
-              </a:ext>
-              <a:ext uri="{C183D7F6-B498-43B3-948B-1728B52AA6E4}">
-                <adec:decorative xmlns:adec="http://schemas.microsoft.com/office/drawing/2017/decorative" val="1"/>
-              </a:ext>
-            </a:extLst>
-          </p:cNvPr>
-          <p:cNvSpPr>
-            <a:spLocks noGrp="1" noRot="1" noChangeAspect="1" noMove="1" noResize="1" noEditPoints="1" noAdjustHandles="1" noChangeArrowheads="1" noChangeShapeType="1" noTextEdit="1"/>
-          </p:cNvSpPr>
-          <p:nvPr>
-            <p:extLst>
-              <p:ext uri="{386F3935-93C4-4BCD-93E2-E3B085C9AB24}">
-                <p16:designElem xmlns:p16="http://schemas.microsoft.com/office/powerpoint/2015/main" val="1"/>
-              </p:ext>
-            </p:extLst>
-          </p:nvPr>
-        </p:nvSpPr>
-        <p:spPr>
-          <a:xfrm rot="5400000">
-            <a:off x="759921" y="346791"/>
-            <a:ext cx="146304" cy="704088"/>
-          </a:xfrm>
-          <a:prstGeom prst="rect">
-            <a:avLst/>
-          </a:prstGeom>
-          <a:solidFill>
-            <a:schemeClr val="accent2"/>
-          </a:solidFill>
-          <a:ln>
-            <a:noFill/>
-          </a:ln>
-        </p:spPr>
-        <p:style>
-          <a:lnRef idx="2">
-            <a:schemeClr val="accent1">
-              <a:shade val="50000"/>
-            </a:schemeClr>
-          </a:lnRef>
-          <a:fillRef idx="1">
-            <a:schemeClr val="accent1"/>
-          </a:fillRef>
-          <a:effectRef idx="0">
-            <a:schemeClr val="accent1"/>
-          </a:effectRef>
-          <a:fontRef idx="minor">
-            <a:schemeClr val="lt1"/>
-          </a:fontRef>
-        </p:style>
-        <p:txBody>
-          <a:bodyPr rtlCol="0" anchor="ctr"/>
-          <a:lstStyle/>
-          <a:p>
-            <a:pPr marL="0" marR="0" lvl="0" indent="0" algn="ctr" defTabSz="914400" rtl="0" eaLnBrk="1" fontAlgn="auto" latinLnBrk="0" hangingPunct="1">
-              <a:lnSpc>
-                <a:spcPct val="100000"/>
-              </a:lnSpc>
-              <a:spcBef>
-                <a:spcPts val="0"/>
-              </a:spcBef>
-              <a:spcAft>
-                <a:spcPts val="0"/>
-              </a:spcAft>
-              <a:buClrTx/>
-              <a:buSzTx/>
-              <a:buFontTx/>
-              <a:buNone/>
-              <a:tabLst/>
-              <a:defRPr/>
-            </a:pPr>
-            <a:endParaRPr kumimoji="0" lang="en-US" sz="1800" b="0" i="0" u="none" strike="noStrike" kern="1200" cap="none" spc="0" normalizeH="0" baseline="0" noProof="0">
-              <a:ln>
-                <a:noFill/>
-              </a:ln>
-              <a:solidFill>
-                <a:prstClr val="white"/>
-              </a:solidFill>
-              <a:effectLst/>
-              <a:uLnTx/>
-              <a:uFillTx/>
-              <a:latin typeface="Calibri" panose="020F0502020204030204"/>
-              <a:ea typeface="+mn-ea"/>
-              <a:cs typeface="+mn-cs"/>
-            </a:endParaRPr>
-          </a:p>
-        </p:txBody>
-      </p:sp>
-      <p:sp>
-        <p:nvSpPr>
-          <p:cNvPr id="15" name="Rectangle 14">
-            <a:extLst>
-              <a:ext uri="{FF2B5EF4-FFF2-40B4-BE49-F238E27FC236}">
-                <a16:creationId xmlns:a16="http://schemas.microsoft.com/office/drawing/2014/main" id="{08C9B587-E65E-4B52-B37C-ABEBB6E87928}"/>
-              </a:ext>
-              <a:ext uri="{C183D7F6-B498-43B3-948B-1728B52AA6E4}">
-                <adec:decorative xmlns:adec="http://schemas.microsoft.com/office/drawing/2017/decorative" val="1"/>
-              </a:ext>
-            </a:extLst>
-          </p:cNvPr>
-          <p:cNvSpPr>
-            <a:spLocks noGrp="1" noRot="1" noChangeAspect="1" noMove="1" noResize="1" noEditPoints="1" noAdjustHandles="1" noChangeArrowheads="1" noChangeShapeType="1" noTextEdit="1"/>
-          </p:cNvSpPr>
-          <p:nvPr>
-            <p:extLst>
-              <p:ext uri="{386F3935-93C4-4BCD-93E2-E3B085C9AB24}">
-                <p16:designElem xmlns:p16="http://schemas.microsoft.com/office/powerpoint/2015/main" val="1"/>
-              </p:ext>
-            </p:extLst>
-          </p:nvPr>
-        </p:nvSpPr>
-        <p:spPr>
-          <a:xfrm>
-            <a:off x="481029" y="4546920"/>
-            <a:ext cx="3977640" cy="18288"/>
-          </a:xfrm>
-          <a:prstGeom prst="rect">
-            <a:avLst/>
-          </a:prstGeom>
-          <a:solidFill>
-            <a:srgbClr val="D5D5D5"/>
-          </a:solidFill>
-          <a:ln w="3175">
-            <a:noFill/>
-          </a:ln>
-          <a:effectLst/>
-        </p:spPr>
-        <p:style>
-          <a:lnRef idx="2">
-            <a:schemeClr val="accent1">
-              <a:shade val="50000"/>
-            </a:schemeClr>
-          </a:lnRef>
-          <a:fillRef idx="1">
-            <a:schemeClr val="accent1"/>
-          </a:fillRef>
-          <a:effectRef idx="0">
-            <a:schemeClr val="accent1"/>
-          </a:effectRef>
-          <a:fontRef idx="minor">
-            <a:schemeClr val="lt1"/>
-          </a:fontRef>
-        </p:style>
-        <p:txBody>
-          <a:bodyPr rtlCol="0" anchor="ctr"/>
-          <a:lstStyle/>
-          <a:p>
-            <a:pPr marL="0" marR="0" lvl="0" indent="0" algn="ctr" defTabSz="914400" rtl="0" eaLnBrk="1" fontAlgn="auto" latinLnBrk="0" hangingPunct="1">
-              <a:lnSpc>
-                <a:spcPct val="100000"/>
-              </a:lnSpc>
-              <a:spcBef>
-                <a:spcPts val="0"/>
-              </a:spcBef>
-              <a:spcAft>
-                <a:spcPts val="0"/>
-              </a:spcAft>
-              <a:buClrTx/>
-              <a:buSzTx/>
-              <a:buFontTx/>
-              <a:buNone/>
-              <a:tabLst/>
-              <a:defRPr/>
-            </a:pPr>
-            <a:endParaRPr kumimoji="0" lang="en-US" sz="1800" b="0" i="0" u="none" strike="noStrike" kern="1200" cap="none" spc="0" normalizeH="0" baseline="0" noProof="0">
-              <a:ln>
-                <a:noFill/>
-              </a:ln>
-              <a:solidFill>
-                <a:prstClr val="white"/>
-              </a:solidFill>
-              <a:effectLst/>
-              <a:uLnTx/>
-              <a:uFillTx/>
-              <a:latin typeface="Calibri" panose="020F0502020204030204"/>
-              <a:ea typeface="+mn-ea"/>
-              <a:cs typeface="+mn-cs"/>
-            </a:endParaRPr>
-          </a:p>
-        </p:txBody>
-      </p:sp>
-    </p:spTree>
-    <p:extLst>
-      <p:ext uri="{BB962C8B-B14F-4D97-AF65-F5344CB8AC3E}">
-        <p14:creationId xmlns:p14="http://schemas.microsoft.com/office/powerpoint/2010/main" val="1364850361"/>
-      </p:ext>
-    </p:extLst>
-  </p:cSld>
-  <p:clrMapOvr>
-    <a:masterClrMapping/>
-  </p:clrMapOvr>
-</p:sld>
-</file>
-
-<file path=ppt/slides/slide34.xml><?xml version="1.0" encoding="utf-8"?>
-<p:sld xmlns:a="http://schemas.openxmlformats.org/drawingml/2006/main" xmlns:r="http://schemas.openxmlformats.org/officeDocument/2006/relationships" xmlns:p="http://schemas.openxmlformats.org/presentationml/2006/main">
-  <p:cSld>
-    <p:bg>
-      <p:bgPr>
-        <a:solidFill>
-          <a:schemeClr val="accent1"/>
-        </a:solidFill>
-        <a:effectLst/>
-      </p:bgPr>
-    </p:bg>
-    <p:spTree>
-      <p:nvGrpSpPr>
-        <p:cNvPr id="1" name="">
-          <a:extLst>
-            <a:ext uri="{FF2B5EF4-FFF2-40B4-BE49-F238E27FC236}">
               <a16:creationId xmlns:a16="http://schemas.microsoft.com/office/drawing/2014/main" id="{083E1F97-17F4-001F-7673-B8EFA09D831D}"/>
             </a:ext>
           </a:extLst>
@@ -8377,7 +7815,7 @@
 </p:sld>
 </file>
 
-<file path=ppt/slides/slide35.xml><?xml version="1.0" encoding="utf-8"?>
+<file path=ppt/slides/slide31.xml><?xml version="1.0" encoding="utf-8"?>
 <p:sld xmlns:a="http://schemas.openxmlformats.org/drawingml/2006/main" xmlns:r="http://schemas.openxmlformats.org/officeDocument/2006/relationships" xmlns:p="http://schemas.openxmlformats.org/presentationml/2006/main">
   <p:cSld>
     <p:bg>
@@ -8534,7 +7972,7 @@
 </p:sld>
 </file>
 
-<file path=ppt/slides/slide36.xml><?xml version="1.0" encoding="utf-8"?>
+<file path=ppt/slides/slide32.xml><?xml version="1.0" encoding="utf-8"?>
 <p:sld xmlns:a="http://schemas.openxmlformats.org/drawingml/2006/main" xmlns:r="http://schemas.openxmlformats.org/officeDocument/2006/relationships" xmlns:p="http://schemas.openxmlformats.org/presentationml/2006/main">
   <p:cSld>
     <p:bg>
@@ -8691,7 +8129,7 @@
 </p:sld>
 </file>
 
-<file path=ppt/slides/slide37.xml><?xml version="1.0" encoding="utf-8"?>
+<file path=ppt/slides/slide33.xml><?xml version="1.0" encoding="utf-8"?>
 <p:sld xmlns:a="http://schemas.openxmlformats.org/drawingml/2006/main" xmlns:r="http://schemas.openxmlformats.org/officeDocument/2006/relationships" xmlns:p="http://schemas.openxmlformats.org/presentationml/2006/main">
   <p:cSld>
     <p:bg>
@@ -8848,7 +8286,7 @@
 </p:sld>
 </file>
 
-<file path=ppt/slides/slide38.xml><?xml version="1.0" encoding="utf-8"?>
+<file path=ppt/slides/slide34.xml><?xml version="1.0" encoding="utf-8"?>
 <p:sld xmlns:a="http://schemas.openxmlformats.org/drawingml/2006/main" xmlns:r="http://schemas.openxmlformats.org/officeDocument/2006/relationships" xmlns:p="http://schemas.openxmlformats.org/presentationml/2006/main">
   <p:cSld>
     <p:bg>
@@ -8984,7 +8422,7 @@
 </p:sld>
 </file>
 
-<file path=ppt/slides/slide39.xml><?xml version="1.0" encoding="utf-8"?>
+<file path=ppt/slides/slide35.xml><?xml version="1.0" encoding="utf-8"?>
 <p:sld xmlns:a="http://schemas.openxmlformats.org/drawingml/2006/main" xmlns:r="http://schemas.openxmlformats.org/officeDocument/2006/relationships" xmlns:p="http://schemas.openxmlformats.org/presentationml/2006/main">
   <p:cSld>
     <p:bg>
@@ -9090,6 +8528,544 @@
     <p:extLst>
       <p:ext uri="{BB962C8B-B14F-4D97-AF65-F5344CB8AC3E}">
         <p14:creationId xmlns:p14="http://schemas.microsoft.com/office/powerpoint/2010/main" val="2424527069"/>
+      </p:ext>
+    </p:extLst>
+  </p:cSld>
+  <p:clrMapOvr>
+    <a:masterClrMapping/>
+  </p:clrMapOvr>
+</p:sld>
+</file>
+
+<file path=ppt/slides/slide36.xml><?xml version="1.0" encoding="utf-8"?>
+<p:sld xmlns:a="http://schemas.openxmlformats.org/drawingml/2006/main" xmlns:r="http://schemas.openxmlformats.org/officeDocument/2006/relationships" xmlns:p="http://schemas.openxmlformats.org/presentationml/2006/main">
+  <p:cSld>
+    <p:bg>
+      <p:bgPr>
+        <a:solidFill>
+          <a:schemeClr val="accent1"/>
+        </a:solidFill>
+        <a:effectLst/>
+      </p:bgPr>
+    </p:bg>
+    <p:spTree>
+      <p:nvGrpSpPr>
+        <p:cNvPr id="1" name="">
+          <a:extLst>
+            <a:ext uri="{FF2B5EF4-FFF2-40B4-BE49-F238E27FC236}">
+              <a16:creationId xmlns:a16="http://schemas.microsoft.com/office/drawing/2014/main" id="{BEF6EB98-5F43-3DA3-94A9-EB6300F45A3C}"/>
+            </a:ext>
+          </a:extLst>
+        </p:cNvPr>
+        <p:cNvGrpSpPr/>
+        <p:nvPr/>
+      </p:nvGrpSpPr>
+      <p:grpSpPr>
+        <a:xfrm>
+          <a:off x="0" y="0"/>
+          <a:ext cx="0" cy="0"/>
+          <a:chOff x="0" y="0"/>
+          <a:chExt cx="0" cy="0"/>
+        </a:xfrm>
+      </p:grpSpPr>
+      <p:sp>
+        <p:nvSpPr>
+          <p:cNvPr id="3" name="Subtitle 2">
+            <a:extLst>
+              <a:ext uri="{FF2B5EF4-FFF2-40B4-BE49-F238E27FC236}">
+                <a16:creationId xmlns:a16="http://schemas.microsoft.com/office/drawing/2014/main" id="{71DE054B-FBE9-55DC-2B7F-6146B7B7E5C0}"/>
+              </a:ext>
+            </a:extLst>
+          </p:cNvPr>
+          <p:cNvSpPr>
+            <a:spLocks noGrp="1"/>
+          </p:cNvSpPr>
+          <p:nvPr>
+            <p:ph type="subTitle" idx="1"/>
+          </p:nvPr>
+        </p:nvSpPr>
+        <p:spPr>
+          <a:xfrm>
+            <a:off x="682831" y="497702"/>
+            <a:ext cx="10826338" cy="5862596"/>
+          </a:xfrm>
+        </p:spPr>
+        <p:txBody>
+          <a:bodyPr>
+            <a:noAutofit/>
+          </a:bodyPr>
+          <a:lstStyle/>
+          <a:p>
+            <a:endParaRPr lang="en-US" sz="4400" dirty="0">
+              <a:solidFill>
+                <a:schemeClr val="bg1"/>
+              </a:solidFill>
+              <a:latin typeface="Avenir Medium" panose="02000503020000020003" pitchFamily="2" charset="0"/>
+              <a:ea typeface="Bodoni Ornaments" pitchFamily="2" charset="0"/>
+            </a:endParaRPr>
+          </a:p>
+          <a:p>
+            <a:r>
+              <a:rPr lang="en-US" sz="4400" dirty="0">
+                <a:solidFill>
+                  <a:schemeClr val="bg1"/>
+                </a:solidFill>
+                <a:latin typeface="Avenir Medium" panose="02000503020000020003" pitchFamily="2" charset="0"/>
+                <a:ea typeface="Bodoni Ornaments" pitchFamily="2" charset="0"/>
+              </a:rPr>
+              <a:t>I lay down my garments</a:t>
+            </a:r>
+          </a:p>
+          <a:p>
+            <a:r>
+              <a:rPr lang="en-US" sz="4400" dirty="0">
+                <a:solidFill>
+                  <a:schemeClr val="bg1"/>
+                </a:solidFill>
+                <a:latin typeface="Avenir Medium" panose="02000503020000020003" pitchFamily="2" charset="0"/>
+                <a:ea typeface="Bodoni Ornaments" pitchFamily="2" charset="0"/>
+              </a:rPr>
+              <a:t>Any empty boast</a:t>
+            </a:r>
+          </a:p>
+          <a:p>
+            <a:r>
+              <a:rPr lang="en-US" sz="4400" dirty="0">
+                <a:solidFill>
+                  <a:schemeClr val="bg1"/>
+                </a:solidFill>
+                <a:latin typeface="Avenir Medium" panose="02000503020000020003" pitchFamily="2" charset="0"/>
+                <a:ea typeface="Bodoni Ornaments" pitchFamily="2" charset="0"/>
+              </a:rPr>
+              <a:t>Good works now all corrupted</a:t>
+            </a:r>
+          </a:p>
+          <a:p>
+            <a:r>
+              <a:rPr lang="en-US" sz="4400" dirty="0">
+                <a:solidFill>
+                  <a:schemeClr val="bg1"/>
+                </a:solidFill>
+                <a:latin typeface="Avenir Medium" panose="02000503020000020003" pitchFamily="2" charset="0"/>
+                <a:ea typeface="Bodoni Ornaments" pitchFamily="2" charset="0"/>
+              </a:rPr>
+              <a:t>By the sinful host</a:t>
+            </a:r>
+          </a:p>
+        </p:txBody>
+      </p:sp>
+    </p:spTree>
+    <p:extLst>
+      <p:ext uri="{BB962C8B-B14F-4D97-AF65-F5344CB8AC3E}">
+        <p14:creationId xmlns:p14="http://schemas.microsoft.com/office/powerpoint/2010/main" val="291943255"/>
+      </p:ext>
+    </p:extLst>
+  </p:cSld>
+  <p:clrMapOvr>
+    <a:masterClrMapping/>
+  </p:clrMapOvr>
+</p:sld>
+</file>
+
+<file path=ppt/slides/slide37.xml><?xml version="1.0" encoding="utf-8"?>
+<p:sld xmlns:a="http://schemas.openxmlformats.org/drawingml/2006/main" xmlns:r="http://schemas.openxmlformats.org/officeDocument/2006/relationships" xmlns:p="http://schemas.openxmlformats.org/presentationml/2006/main">
+  <p:cSld>
+    <p:bg>
+      <p:bgPr>
+        <a:solidFill>
+          <a:schemeClr val="accent1"/>
+        </a:solidFill>
+        <a:effectLst/>
+      </p:bgPr>
+    </p:bg>
+    <p:spTree>
+      <p:nvGrpSpPr>
+        <p:cNvPr id="1" name="">
+          <a:extLst>
+            <a:ext uri="{FF2B5EF4-FFF2-40B4-BE49-F238E27FC236}">
+              <a16:creationId xmlns:a16="http://schemas.microsoft.com/office/drawing/2014/main" id="{767266B9-C9EE-B7FF-FDA9-A064D3B5A98B}"/>
+            </a:ext>
+          </a:extLst>
+        </p:cNvPr>
+        <p:cNvGrpSpPr/>
+        <p:nvPr/>
+      </p:nvGrpSpPr>
+      <p:grpSpPr>
+        <a:xfrm>
+          <a:off x="0" y="0"/>
+          <a:ext cx="0" cy="0"/>
+          <a:chOff x="0" y="0"/>
+          <a:chExt cx="0" cy="0"/>
+        </a:xfrm>
+      </p:grpSpPr>
+      <p:sp>
+        <p:nvSpPr>
+          <p:cNvPr id="3" name="Subtitle 2">
+            <a:extLst>
+              <a:ext uri="{FF2B5EF4-FFF2-40B4-BE49-F238E27FC236}">
+                <a16:creationId xmlns:a16="http://schemas.microsoft.com/office/drawing/2014/main" id="{17847247-1E8D-0181-52EF-49ECFD333147}"/>
+              </a:ext>
+            </a:extLst>
+          </p:cNvPr>
+          <p:cNvSpPr>
+            <a:spLocks noGrp="1"/>
+          </p:cNvSpPr>
+          <p:nvPr>
+            <p:ph type="subTitle" idx="1"/>
+          </p:nvPr>
+        </p:nvSpPr>
+        <p:spPr>
+          <a:xfrm>
+            <a:off x="682831" y="497702"/>
+            <a:ext cx="10826338" cy="5862596"/>
+          </a:xfrm>
+        </p:spPr>
+        <p:txBody>
+          <a:bodyPr>
+            <a:noAutofit/>
+          </a:bodyPr>
+          <a:lstStyle/>
+          <a:p>
+            <a:endParaRPr lang="en-US" sz="4400" dirty="0">
+              <a:solidFill>
+                <a:schemeClr val="bg1"/>
+              </a:solidFill>
+              <a:latin typeface="Avenir Medium" panose="02000503020000020003" pitchFamily="2" charset="0"/>
+              <a:ea typeface="Bodoni Ornaments" pitchFamily="2" charset="0"/>
+            </a:endParaRPr>
+          </a:p>
+          <a:p>
+            <a:r>
+              <a:rPr lang="en-US" sz="4400" dirty="0">
+                <a:solidFill>
+                  <a:schemeClr val="bg1"/>
+                </a:solidFill>
+                <a:latin typeface="Avenir Medium" panose="02000503020000020003" pitchFamily="2" charset="0"/>
+                <a:ea typeface="Bodoni Ornaments" pitchFamily="2" charset="0"/>
+              </a:rPr>
+              <a:t>I’m dressed in my LORD Jesus</a:t>
+            </a:r>
+          </a:p>
+          <a:p>
+            <a:endParaRPr lang="en-US" sz="4400" dirty="0">
+              <a:solidFill>
+                <a:schemeClr val="bg1"/>
+              </a:solidFill>
+              <a:latin typeface="Avenir Medium" panose="02000503020000020003" pitchFamily="2" charset="0"/>
+              <a:ea typeface="Bodoni Ornaments" pitchFamily="2" charset="0"/>
+            </a:endParaRPr>
+          </a:p>
+          <a:p>
+            <a:r>
+              <a:rPr lang="en-US" sz="4400" dirty="0">
+                <a:solidFill>
+                  <a:schemeClr val="bg1"/>
+                </a:solidFill>
+                <a:latin typeface="Avenir Medium" panose="02000503020000020003" pitchFamily="2" charset="0"/>
+                <a:ea typeface="Bodoni Ornaments" pitchFamily="2" charset="0"/>
+              </a:rPr>
+              <a:t>A crimson robe made white</a:t>
+            </a:r>
+          </a:p>
+          <a:p>
+            <a:endParaRPr lang="en-US" sz="4400" dirty="0">
+              <a:solidFill>
+                <a:schemeClr val="bg1"/>
+              </a:solidFill>
+              <a:latin typeface="Avenir Medium" panose="02000503020000020003" pitchFamily="2" charset="0"/>
+              <a:ea typeface="Bodoni Ornaments" pitchFamily="2" charset="0"/>
+            </a:endParaRPr>
+          </a:p>
+          <a:p>
+            <a:r>
+              <a:rPr lang="en-US" sz="4400" dirty="0">
+                <a:solidFill>
+                  <a:schemeClr val="bg1"/>
+                </a:solidFill>
+                <a:latin typeface="Avenir Medium" panose="02000503020000020003" pitchFamily="2" charset="0"/>
+                <a:ea typeface="Bodoni Ornaments" pitchFamily="2" charset="0"/>
+              </a:rPr>
+              <a:t>No more fear of judgement </a:t>
+            </a:r>
+          </a:p>
+          <a:p>
+            <a:endParaRPr lang="en-US" sz="4400" dirty="0">
+              <a:solidFill>
+                <a:schemeClr val="bg1"/>
+              </a:solidFill>
+              <a:latin typeface="Avenir Medium" panose="02000503020000020003" pitchFamily="2" charset="0"/>
+              <a:ea typeface="Bodoni Ornaments" pitchFamily="2" charset="0"/>
+            </a:endParaRPr>
+          </a:p>
+          <a:p>
+            <a:r>
+              <a:rPr lang="en-US" sz="4400" dirty="0">
+                <a:solidFill>
+                  <a:schemeClr val="bg1"/>
+                </a:solidFill>
+                <a:latin typeface="Avenir Medium" panose="02000503020000020003" pitchFamily="2" charset="0"/>
+                <a:ea typeface="Bodoni Ornaments" pitchFamily="2" charset="0"/>
+              </a:rPr>
+              <a:t>His righteousness is mine</a:t>
+            </a:r>
+          </a:p>
+        </p:txBody>
+      </p:sp>
+    </p:spTree>
+    <p:extLst>
+      <p:ext uri="{BB962C8B-B14F-4D97-AF65-F5344CB8AC3E}">
+        <p14:creationId xmlns:p14="http://schemas.microsoft.com/office/powerpoint/2010/main" val="2305385221"/>
+      </p:ext>
+    </p:extLst>
+  </p:cSld>
+  <p:clrMapOvr>
+    <a:masterClrMapping/>
+  </p:clrMapOvr>
+</p:sld>
+</file>
+
+<file path=ppt/slides/slide38.xml><?xml version="1.0" encoding="utf-8"?>
+<p:sld xmlns:a="http://schemas.openxmlformats.org/drawingml/2006/main" xmlns:r="http://schemas.openxmlformats.org/officeDocument/2006/relationships" xmlns:p="http://schemas.openxmlformats.org/presentationml/2006/main">
+  <p:cSld>
+    <p:bg>
+      <p:bgPr>
+        <a:solidFill>
+          <a:srgbClr val="7030A0"/>
+        </a:solidFill>
+        <a:effectLst/>
+      </p:bgPr>
+    </p:bg>
+    <p:spTree>
+      <p:nvGrpSpPr>
+        <p:cNvPr id="1" name="">
+          <a:extLst>
+            <a:ext uri="{FF2B5EF4-FFF2-40B4-BE49-F238E27FC236}">
+              <a16:creationId xmlns:a16="http://schemas.microsoft.com/office/drawing/2014/main" id="{DC6C86CD-4E1D-3561-16CB-290155117CC0}"/>
+            </a:ext>
+          </a:extLst>
+        </p:cNvPr>
+        <p:cNvGrpSpPr/>
+        <p:nvPr/>
+      </p:nvGrpSpPr>
+      <p:grpSpPr>
+        <a:xfrm>
+          <a:off x="0" y="0"/>
+          <a:ext cx="0" cy="0"/>
+          <a:chOff x="0" y="0"/>
+          <a:chExt cx="0" cy="0"/>
+        </a:xfrm>
+      </p:grpSpPr>
+      <p:sp>
+        <p:nvSpPr>
+          <p:cNvPr id="3" name="Subtitle 2">
+            <a:extLst>
+              <a:ext uri="{FF2B5EF4-FFF2-40B4-BE49-F238E27FC236}">
+                <a16:creationId xmlns:a16="http://schemas.microsoft.com/office/drawing/2014/main" id="{787F42E7-D1DC-DB2D-C43A-E9C05A0A881F}"/>
+              </a:ext>
+            </a:extLst>
+          </p:cNvPr>
+          <p:cNvSpPr>
+            <a:spLocks noGrp="1"/>
+          </p:cNvSpPr>
+          <p:nvPr>
+            <p:ph type="subTitle" idx="1"/>
+          </p:nvPr>
+        </p:nvSpPr>
+        <p:spPr>
+          <a:xfrm>
+            <a:off x="682831" y="497702"/>
+            <a:ext cx="10826338" cy="5862596"/>
+          </a:xfrm>
+        </p:spPr>
+        <p:txBody>
+          <a:bodyPr>
+            <a:noAutofit/>
+          </a:bodyPr>
+          <a:lstStyle/>
+          <a:p>
+            <a:endParaRPr lang="en-US" sz="4400" dirty="0">
+              <a:solidFill>
+                <a:schemeClr val="bg1"/>
+              </a:solidFill>
+              <a:latin typeface="Avenir Medium" panose="02000503020000020003" pitchFamily="2" charset="0"/>
+              <a:ea typeface="Bodoni Ornaments" pitchFamily="2" charset="0"/>
+            </a:endParaRPr>
+          </a:p>
+          <a:p>
+            <a:r>
+              <a:rPr lang="en-US" sz="4400" dirty="0">
+                <a:solidFill>
+                  <a:schemeClr val="bg1"/>
+                </a:solidFill>
+                <a:latin typeface="Avenir Medium" panose="02000503020000020003" pitchFamily="2" charset="0"/>
+                <a:ea typeface="Bodoni Ornaments" pitchFamily="2" charset="0"/>
+              </a:rPr>
+              <a:t>It is done</a:t>
+            </a:r>
+          </a:p>
+          <a:p>
+            <a:endParaRPr lang="en-US" sz="4400" dirty="0">
+              <a:solidFill>
+                <a:schemeClr val="bg1"/>
+              </a:solidFill>
+              <a:latin typeface="Avenir Medium" panose="02000503020000020003" pitchFamily="2" charset="0"/>
+              <a:ea typeface="Bodoni Ornaments" pitchFamily="2" charset="0"/>
+            </a:endParaRPr>
+          </a:p>
+          <a:p>
+            <a:r>
+              <a:rPr lang="en-US" sz="4400" dirty="0">
+                <a:solidFill>
+                  <a:schemeClr val="bg1"/>
+                </a:solidFill>
+                <a:latin typeface="Avenir Medium" panose="02000503020000020003" pitchFamily="2" charset="0"/>
+                <a:ea typeface="Bodoni Ornaments" pitchFamily="2" charset="0"/>
+              </a:rPr>
+              <a:t>It is finished</a:t>
+            </a:r>
+          </a:p>
+          <a:p>
+            <a:endParaRPr lang="en-US" sz="4400" dirty="0">
+              <a:solidFill>
+                <a:schemeClr val="bg1"/>
+              </a:solidFill>
+              <a:latin typeface="Avenir Medium" panose="02000503020000020003" pitchFamily="2" charset="0"/>
+              <a:ea typeface="Bodoni Ornaments" pitchFamily="2" charset="0"/>
+            </a:endParaRPr>
+          </a:p>
+          <a:p>
+            <a:r>
+              <a:rPr lang="en-US" sz="4400" dirty="0">
+                <a:solidFill>
+                  <a:schemeClr val="bg1"/>
+                </a:solidFill>
+                <a:latin typeface="Avenir Medium" panose="02000503020000020003" pitchFamily="2" charset="0"/>
+                <a:ea typeface="Bodoni Ornaments" pitchFamily="2" charset="0"/>
+              </a:rPr>
+              <a:t>No more debt I owe</a:t>
+            </a:r>
+          </a:p>
+        </p:txBody>
+      </p:sp>
+    </p:spTree>
+    <p:extLst>
+      <p:ext uri="{BB962C8B-B14F-4D97-AF65-F5344CB8AC3E}">
+        <p14:creationId xmlns:p14="http://schemas.microsoft.com/office/powerpoint/2010/main" val="881652052"/>
+      </p:ext>
+    </p:extLst>
+  </p:cSld>
+  <p:clrMapOvr>
+    <a:masterClrMapping/>
+  </p:clrMapOvr>
+</p:sld>
+</file>
+
+<file path=ppt/slides/slide39.xml><?xml version="1.0" encoding="utf-8"?>
+<p:sld xmlns:a="http://schemas.openxmlformats.org/drawingml/2006/main" xmlns:r="http://schemas.openxmlformats.org/officeDocument/2006/relationships" xmlns:p="http://schemas.openxmlformats.org/presentationml/2006/main">
+  <p:cSld>
+    <p:bg>
+      <p:bgPr>
+        <a:solidFill>
+          <a:srgbClr val="7030A0"/>
+        </a:solidFill>
+        <a:effectLst/>
+      </p:bgPr>
+    </p:bg>
+    <p:spTree>
+      <p:nvGrpSpPr>
+        <p:cNvPr id="1" name="">
+          <a:extLst>
+            <a:ext uri="{FF2B5EF4-FFF2-40B4-BE49-F238E27FC236}">
+              <a16:creationId xmlns:a16="http://schemas.microsoft.com/office/drawing/2014/main" id="{930D35CF-1EB1-F96C-F585-C6412E95B890}"/>
+            </a:ext>
+          </a:extLst>
+        </p:cNvPr>
+        <p:cNvGrpSpPr/>
+        <p:nvPr/>
+      </p:nvGrpSpPr>
+      <p:grpSpPr>
+        <a:xfrm>
+          <a:off x="0" y="0"/>
+          <a:ext cx="0" cy="0"/>
+          <a:chOff x="0" y="0"/>
+          <a:chExt cx="0" cy="0"/>
+        </a:xfrm>
+      </p:grpSpPr>
+      <p:sp>
+        <p:nvSpPr>
+          <p:cNvPr id="3" name="Subtitle 2">
+            <a:extLst>
+              <a:ext uri="{FF2B5EF4-FFF2-40B4-BE49-F238E27FC236}">
+                <a16:creationId xmlns:a16="http://schemas.microsoft.com/office/drawing/2014/main" id="{0AD8B3DD-E39F-8B93-A66C-07B87B2BF8AD}"/>
+              </a:ext>
+            </a:extLst>
+          </p:cNvPr>
+          <p:cNvSpPr>
+            <a:spLocks noGrp="1"/>
+          </p:cNvSpPr>
+          <p:nvPr>
+            <p:ph type="subTitle" idx="1"/>
+          </p:nvPr>
+        </p:nvSpPr>
+        <p:spPr>
+          <a:xfrm>
+            <a:off x="682831" y="497702"/>
+            <a:ext cx="10826338" cy="5862596"/>
+          </a:xfrm>
+        </p:spPr>
+        <p:txBody>
+          <a:bodyPr>
+            <a:noAutofit/>
+          </a:bodyPr>
+          <a:lstStyle/>
+          <a:p>
+            <a:endParaRPr lang="en-US" sz="4400" dirty="0">
+              <a:solidFill>
+                <a:schemeClr val="bg1"/>
+              </a:solidFill>
+              <a:latin typeface="Avenir Medium" panose="02000503020000020003" pitchFamily="2" charset="0"/>
+              <a:ea typeface="Bodoni Ornaments" pitchFamily="2" charset="0"/>
+            </a:endParaRPr>
+          </a:p>
+          <a:p>
+            <a:r>
+              <a:rPr lang="en-US" sz="4400" dirty="0">
+                <a:solidFill>
+                  <a:schemeClr val="bg1"/>
+                </a:solidFill>
+                <a:latin typeface="Avenir Medium" panose="02000503020000020003" pitchFamily="2" charset="0"/>
+                <a:ea typeface="Bodoni Ornaments" pitchFamily="2" charset="0"/>
+              </a:rPr>
+              <a:t>Paid in full</a:t>
+            </a:r>
+          </a:p>
+          <a:p>
+            <a:endParaRPr lang="en-US" sz="4400" dirty="0">
+              <a:solidFill>
+                <a:schemeClr val="bg1"/>
+              </a:solidFill>
+              <a:latin typeface="Avenir Medium" panose="02000503020000020003" pitchFamily="2" charset="0"/>
+              <a:ea typeface="Bodoni Ornaments" pitchFamily="2" charset="0"/>
+            </a:endParaRPr>
+          </a:p>
+          <a:p>
+            <a:r>
+              <a:rPr lang="en-US" sz="4400" dirty="0">
+                <a:solidFill>
+                  <a:schemeClr val="bg1"/>
+                </a:solidFill>
+                <a:latin typeface="Avenir Medium" panose="02000503020000020003" pitchFamily="2" charset="0"/>
+                <a:ea typeface="Bodoni Ornaments" pitchFamily="2" charset="0"/>
+              </a:rPr>
+              <a:t>All sufficient merit now my own</a:t>
+            </a:r>
+          </a:p>
+        </p:txBody>
+      </p:sp>
+    </p:spTree>
+    <p:extLst>
+      <p:ext uri="{BB962C8B-B14F-4D97-AF65-F5344CB8AC3E}">
+        <p14:creationId xmlns:p14="http://schemas.microsoft.com/office/powerpoint/2010/main" val="1514148742"/>
       </p:ext>
     </p:extLst>
   </p:cSld>
@@ -9263,544 +9239,6 @@
         <p:cNvPr id="1" name="">
           <a:extLst>
             <a:ext uri="{FF2B5EF4-FFF2-40B4-BE49-F238E27FC236}">
-              <a16:creationId xmlns:a16="http://schemas.microsoft.com/office/drawing/2014/main" id="{BEF6EB98-5F43-3DA3-94A9-EB6300F45A3C}"/>
-            </a:ext>
-          </a:extLst>
-        </p:cNvPr>
-        <p:cNvGrpSpPr/>
-        <p:nvPr/>
-      </p:nvGrpSpPr>
-      <p:grpSpPr>
-        <a:xfrm>
-          <a:off x="0" y="0"/>
-          <a:ext cx="0" cy="0"/>
-          <a:chOff x="0" y="0"/>
-          <a:chExt cx="0" cy="0"/>
-        </a:xfrm>
-      </p:grpSpPr>
-      <p:sp>
-        <p:nvSpPr>
-          <p:cNvPr id="3" name="Subtitle 2">
-            <a:extLst>
-              <a:ext uri="{FF2B5EF4-FFF2-40B4-BE49-F238E27FC236}">
-                <a16:creationId xmlns:a16="http://schemas.microsoft.com/office/drawing/2014/main" id="{71DE054B-FBE9-55DC-2B7F-6146B7B7E5C0}"/>
-              </a:ext>
-            </a:extLst>
-          </p:cNvPr>
-          <p:cNvSpPr>
-            <a:spLocks noGrp="1"/>
-          </p:cNvSpPr>
-          <p:nvPr>
-            <p:ph type="subTitle" idx="1"/>
-          </p:nvPr>
-        </p:nvSpPr>
-        <p:spPr>
-          <a:xfrm>
-            <a:off x="682831" y="497702"/>
-            <a:ext cx="10826338" cy="5862596"/>
-          </a:xfrm>
-        </p:spPr>
-        <p:txBody>
-          <a:bodyPr>
-            <a:noAutofit/>
-          </a:bodyPr>
-          <a:lstStyle/>
-          <a:p>
-            <a:endParaRPr lang="en-US" sz="4400" dirty="0">
-              <a:solidFill>
-                <a:schemeClr val="bg1"/>
-              </a:solidFill>
-              <a:latin typeface="Avenir Medium" panose="02000503020000020003" pitchFamily="2" charset="0"/>
-              <a:ea typeface="Bodoni Ornaments" pitchFamily="2" charset="0"/>
-            </a:endParaRPr>
-          </a:p>
-          <a:p>
-            <a:r>
-              <a:rPr lang="en-US" sz="4400" dirty="0">
-                <a:solidFill>
-                  <a:schemeClr val="bg1"/>
-                </a:solidFill>
-                <a:latin typeface="Avenir Medium" panose="02000503020000020003" pitchFamily="2" charset="0"/>
-                <a:ea typeface="Bodoni Ornaments" pitchFamily="2" charset="0"/>
-              </a:rPr>
-              <a:t>I lay down my garments</a:t>
-            </a:r>
-          </a:p>
-          <a:p>
-            <a:r>
-              <a:rPr lang="en-US" sz="4400" dirty="0">
-                <a:solidFill>
-                  <a:schemeClr val="bg1"/>
-                </a:solidFill>
-                <a:latin typeface="Avenir Medium" panose="02000503020000020003" pitchFamily="2" charset="0"/>
-                <a:ea typeface="Bodoni Ornaments" pitchFamily="2" charset="0"/>
-              </a:rPr>
-              <a:t>Any empty boast</a:t>
-            </a:r>
-          </a:p>
-          <a:p>
-            <a:r>
-              <a:rPr lang="en-US" sz="4400" dirty="0">
-                <a:solidFill>
-                  <a:schemeClr val="bg1"/>
-                </a:solidFill>
-                <a:latin typeface="Avenir Medium" panose="02000503020000020003" pitchFamily="2" charset="0"/>
-                <a:ea typeface="Bodoni Ornaments" pitchFamily="2" charset="0"/>
-              </a:rPr>
-              <a:t>Good works now all corrupted</a:t>
-            </a:r>
-          </a:p>
-          <a:p>
-            <a:r>
-              <a:rPr lang="en-US" sz="4400" dirty="0">
-                <a:solidFill>
-                  <a:schemeClr val="bg1"/>
-                </a:solidFill>
-                <a:latin typeface="Avenir Medium" panose="02000503020000020003" pitchFamily="2" charset="0"/>
-                <a:ea typeface="Bodoni Ornaments" pitchFamily="2" charset="0"/>
-              </a:rPr>
-              <a:t>By the sinful host</a:t>
-            </a:r>
-          </a:p>
-        </p:txBody>
-      </p:sp>
-    </p:spTree>
-    <p:extLst>
-      <p:ext uri="{BB962C8B-B14F-4D97-AF65-F5344CB8AC3E}">
-        <p14:creationId xmlns:p14="http://schemas.microsoft.com/office/powerpoint/2010/main" val="291943255"/>
-      </p:ext>
-    </p:extLst>
-  </p:cSld>
-  <p:clrMapOvr>
-    <a:masterClrMapping/>
-  </p:clrMapOvr>
-</p:sld>
-</file>
-
-<file path=ppt/slides/slide41.xml><?xml version="1.0" encoding="utf-8"?>
-<p:sld xmlns:a="http://schemas.openxmlformats.org/drawingml/2006/main" xmlns:r="http://schemas.openxmlformats.org/officeDocument/2006/relationships" xmlns:p="http://schemas.openxmlformats.org/presentationml/2006/main">
-  <p:cSld>
-    <p:bg>
-      <p:bgPr>
-        <a:solidFill>
-          <a:schemeClr val="accent1"/>
-        </a:solidFill>
-        <a:effectLst/>
-      </p:bgPr>
-    </p:bg>
-    <p:spTree>
-      <p:nvGrpSpPr>
-        <p:cNvPr id="1" name="">
-          <a:extLst>
-            <a:ext uri="{FF2B5EF4-FFF2-40B4-BE49-F238E27FC236}">
-              <a16:creationId xmlns:a16="http://schemas.microsoft.com/office/drawing/2014/main" id="{767266B9-C9EE-B7FF-FDA9-A064D3B5A98B}"/>
-            </a:ext>
-          </a:extLst>
-        </p:cNvPr>
-        <p:cNvGrpSpPr/>
-        <p:nvPr/>
-      </p:nvGrpSpPr>
-      <p:grpSpPr>
-        <a:xfrm>
-          <a:off x="0" y="0"/>
-          <a:ext cx="0" cy="0"/>
-          <a:chOff x="0" y="0"/>
-          <a:chExt cx="0" cy="0"/>
-        </a:xfrm>
-      </p:grpSpPr>
-      <p:sp>
-        <p:nvSpPr>
-          <p:cNvPr id="3" name="Subtitle 2">
-            <a:extLst>
-              <a:ext uri="{FF2B5EF4-FFF2-40B4-BE49-F238E27FC236}">
-                <a16:creationId xmlns:a16="http://schemas.microsoft.com/office/drawing/2014/main" id="{17847247-1E8D-0181-52EF-49ECFD333147}"/>
-              </a:ext>
-            </a:extLst>
-          </p:cNvPr>
-          <p:cNvSpPr>
-            <a:spLocks noGrp="1"/>
-          </p:cNvSpPr>
-          <p:nvPr>
-            <p:ph type="subTitle" idx="1"/>
-          </p:nvPr>
-        </p:nvSpPr>
-        <p:spPr>
-          <a:xfrm>
-            <a:off x="682831" y="497702"/>
-            <a:ext cx="10826338" cy="5862596"/>
-          </a:xfrm>
-        </p:spPr>
-        <p:txBody>
-          <a:bodyPr>
-            <a:noAutofit/>
-          </a:bodyPr>
-          <a:lstStyle/>
-          <a:p>
-            <a:endParaRPr lang="en-US" sz="4400" dirty="0">
-              <a:solidFill>
-                <a:schemeClr val="bg1"/>
-              </a:solidFill>
-              <a:latin typeface="Avenir Medium" panose="02000503020000020003" pitchFamily="2" charset="0"/>
-              <a:ea typeface="Bodoni Ornaments" pitchFamily="2" charset="0"/>
-            </a:endParaRPr>
-          </a:p>
-          <a:p>
-            <a:r>
-              <a:rPr lang="en-US" sz="4400" dirty="0">
-                <a:solidFill>
-                  <a:schemeClr val="bg1"/>
-                </a:solidFill>
-                <a:latin typeface="Avenir Medium" panose="02000503020000020003" pitchFamily="2" charset="0"/>
-                <a:ea typeface="Bodoni Ornaments" pitchFamily="2" charset="0"/>
-              </a:rPr>
-              <a:t>I’m dressed in my LORD Jesus</a:t>
-            </a:r>
-          </a:p>
-          <a:p>
-            <a:endParaRPr lang="en-US" sz="4400" dirty="0">
-              <a:solidFill>
-                <a:schemeClr val="bg1"/>
-              </a:solidFill>
-              <a:latin typeface="Avenir Medium" panose="02000503020000020003" pitchFamily="2" charset="0"/>
-              <a:ea typeface="Bodoni Ornaments" pitchFamily="2" charset="0"/>
-            </a:endParaRPr>
-          </a:p>
-          <a:p>
-            <a:r>
-              <a:rPr lang="en-US" sz="4400" dirty="0">
-                <a:solidFill>
-                  <a:schemeClr val="bg1"/>
-                </a:solidFill>
-                <a:latin typeface="Avenir Medium" panose="02000503020000020003" pitchFamily="2" charset="0"/>
-                <a:ea typeface="Bodoni Ornaments" pitchFamily="2" charset="0"/>
-              </a:rPr>
-              <a:t>A crimson robe made white</a:t>
-            </a:r>
-          </a:p>
-          <a:p>
-            <a:endParaRPr lang="en-US" sz="4400" dirty="0">
-              <a:solidFill>
-                <a:schemeClr val="bg1"/>
-              </a:solidFill>
-              <a:latin typeface="Avenir Medium" panose="02000503020000020003" pitchFamily="2" charset="0"/>
-              <a:ea typeface="Bodoni Ornaments" pitchFamily="2" charset="0"/>
-            </a:endParaRPr>
-          </a:p>
-          <a:p>
-            <a:r>
-              <a:rPr lang="en-US" sz="4400" dirty="0">
-                <a:solidFill>
-                  <a:schemeClr val="bg1"/>
-                </a:solidFill>
-                <a:latin typeface="Avenir Medium" panose="02000503020000020003" pitchFamily="2" charset="0"/>
-                <a:ea typeface="Bodoni Ornaments" pitchFamily="2" charset="0"/>
-              </a:rPr>
-              <a:t>No more fear of judgement </a:t>
-            </a:r>
-          </a:p>
-          <a:p>
-            <a:endParaRPr lang="en-US" sz="4400" dirty="0">
-              <a:solidFill>
-                <a:schemeClr val="bg1"/>
-              </a:solidFill>
-              <a:latin typeface="Avenir Medium" panose="02000503020000020003" pitchFamily="2" charset="0"/>
-              <a:ea typeface="Bodoni Ornaments" pitchFamily="2" charset="0"/>
-            </a:endParaRPr>
-          </a:p>
-          <a:p>
-            <a:r>
-              <a:rPr lang="en-US" sz="4400" dirty="0">
-                <a:solidFill>
-                  <a:schemeClr val="bg1"/>
-                </a:solidFill>
-                <a:latin typeface="Avenir Medium" panose="02000503020000020003" pitchFamily="2" charset="0"/>
-                <a:ea typeface="Bodoni Ornaments" pitchFamily="2" charset="0"/>
-              </a:rPr>
-              <a:t>His righteousness is mine</a:t>
-            </a:r>
-          </a:p>
-        </p:txBody>
-      </p:sp>
-    </p:spTree>
-    <p:extLst>
-      <p:ext uri="{BB962C8B-B14F-4D97-AF65-F5344CB8AC3E}">
-        <p14:creationId xmlns:p14="http://schemas.microsoft.com/office/powerpoint/2010/main" val="2305385221"/>
-      </p:ext>
-    </p:extLst>
-  </p:cSld>
-  <p:clrMapOvr>
-    <a:masterClrMapping/>
-  </p:clrMapOvr>
-</p:sld>
-</file>
-
-<file path=ppt/slides/slide42.xml><?xml version="1.0" encoding="utf-8"?>
-<p:sld xmlns:a="http://schemas.openxmlformats.org/drawingml/2006/main" xmlns:r="http://schemas.openxmlformats.org/officeDocument/2006/relationships" xmlns:p="http://schemas.openxmlformats.org/presentationml/2006/main">
-  <p:cSld>
-    <p:bg>
-      <p:bgPr>
-        <a:solidFill>
-          <a:srgbClr val="7030A0"/>
-        </a:solidFill>
-        <a:effectLst/>
-      </p:bgPr>
-    </p:bg>
-    <p:spTree>
-      <p:nvGrpSpPr>
-        <p:cNvPr id="1" name="">
-          <a:extLst>
-            <a:ext uri="{FF2B5EF4-FFF2-40B4-BE49-F238E27FC236}">
-              <a16:creationId xmlns:a16="http://schemas.microsoft.com/office/drawing/2014/main" id="{DC6C86CD-4E1D-3561-16CB-290155117CC0}"/>
-            </a:ext>
-          </a:extLst>
-        </p:cNvPr>
-        <p:cNvGrpSpPr/>
-        <p:nvPr/>
-      </p:nvGrpSpPr>
-      <p:grpSpPr>
-        <a:xfrm>
-          <a:off x="0" y="0"/>
-          <a:ext cx="0" cy="0"/>
-          <a:chOff x="0" y="0"/>
-          <a:chExt cx="0" cy="0"/>
-        </a:xfrm>
-      </p:grpSpPr>
-      <p:sp>
-        <p:nvSpPr>
-          <p:cNvPr id="3" name="Subtitle 2">
-            <a:extLst>
-              <a:ext uri="{FF2B5EF4-FFF2-40B4-BE49-F238E27FC236}">
-                <a16:creationId xmlns:a16="http://schemas.microsoft.com/office/drawing/2014/main" id="{787F42E7-D1DC-DB2D-C43A-E9C05A0A881F}"/>
-              </a:ext>
-            </a:extLst>
-          </p:cNvPr>
-          <p:cNvSpPr>
-            <a:spLocks noGrp="1"/>
-          </p:cNvSpPr>
-          <p:nvPr>
-            <p:ph type="subTitle" idx="1"/>
-          </p:nvPr>
-        </p:nvSpPr>
-        <p:spPr>
-          <a:xfrm>
-            <a:off x="682831" y="497702"/>
-            <a:ext cx="10826338" cy="5862596"/>
-          </a:xfrm>
-        </p:spPr>
-        <p:txBody>
-          <a:bodyPr>
-            <a:noAutofit/>
-          </a:bodyPr>
-          <a:lstStyle/>
-          <a:p>
-            <a:endParaRPr lang="en-US" sz="4400" dirty="0">
-              <a:solidFill>
-                <a:schemeClr val="bg1"/>
-              </a:solidFill>
-              <a:latin typeface="Avenir Medium" panose="02000503020000020003" pitchFamily="2" charset="0"/>
-              <a:ea typeface="Bodoni Ornaments" pitchFamily="2" charset="0"/>
-            </a:endParaRPr>
-          </a:p>
-          <a:p>
-            <a:r>
-              <a:rPr lang="en-US" sz="4400" dirty="0">
-                <a:solidFill>
-                  <a:schemeClr val="bg1"/>
-                </a:solidFill>
-                <a:latin typeface="Avenir Medium" panose="02000503020000020003" pitchFamily="2" charset="0"/>
-                <a:ea typeface="Bodoni Ornaments" pitchFamily="2" charset="0"/>
-              </a:rPr>
-              <a:t>It is done</a:t>
-            </a:r>
-          </a:p>
-          <a:p>
-            <a:endParaRPr lang="en-US" sz="4400" dirty="0">
-              <a:solidFill>
-                <a:schemeClr val="bg1"/>
-              </a:solidFill>
-              <a:latin typeface="Avenir Medium" panose="02000503020000020003" pitchFamily="2" charset="0"/>
-              <a:ea typeface="Bodoni Ornaments" pitchFamily="2" charset="0"/>
-            </a:endParaRPr>
-          </a:p>
-          <a:p>
-            <a:r>
-              <a:rPr lang="en-US" sz="4400" dirty="0">
-                <a:solidFill>
-                  <a:schemeClr val="bg1"/>
-                </a:solidFill>
-                <a:latin typeface="Avenir Medium" panose="02000503020000020003" pitchFamily="2" charset="0"/>
-                <a:ea typeface="Bodoni Ornaments" pitchFamily="2" charset="0"/>
-              </a:rPr>
-              <a:t>It is finished</a:t>
-            </a:r>
-          </a:p>
-          <a:p>
-            <a:endParaRPr lang="en-US" sz="4400" dirty="0">
-              <a:solidFill>
-                <a:schemeClr val="bg1"/>
-              </a:solidFill>
-              <a:latin typeface="Avenir Medium" panose="02000503020000020003" pitchFamily="2" charset="0"/>
-              <a:ea typeface="Bodoni Ornaments" pitchFamily="2" charset="0"/>
-            </a:endParaRPr>
-          </a:p>
-          <a:p>
-            <a:r>
-              <a:rPr lang="en-US" sz="4400" dirty="0">
-                <a:solidFill>
-                  <a:schemeClr val="bg1"/>
-                </a:solidFill>
-                <a:latin typeface="Avenir Medium" panose="02000503020000020003" pitchFamily="2" charset="0"/>
-                <a:ea typeface="Bodoni Ornaments" pitchFamily="2" charset="0"/>
-              </a:rPr>
-              <a:t>No more debt I owe</a:t>
-            </a:r>
-          </a:p>
-        </p:txBody>
-      </p:sp>
-    </p:spTree>
-    <p:extLst>
-      <p:ext uri="{BB962C8B-B14F-4D97-AF65-F5344CB8AC3E}">
-        <p14:creationId xmlns:p14="http://schemas.microsoft.com/office/powerpoint/2010/main" val="881652052"/>
-      </p:ext>
-    </p:extLst>
-  </p:cSld>
-  <p:clrMapOvr>
-    <a:masterClrMapping/>
-  </p:clrMapOvr>
-</p:sld>
-</file>
-
-<file path=ppt/slides/slide43.xml><?xml version="1.0" encoding="utf-8"?>
-<p:sld xmlns:a="http://schemas.openxmlformats.org/drawingml/2006/main" xmlns:r="http://schemas.openxmlformats.org/officeDocument/2006/relationships" xmlns:p="http://schemas.openxmlformats.org/presentationml/2006/main">
-  <p:cSld>
-    <p:bg>
-      <p:bgPr>
-        <a:solidFill>
-          <a:srgbClr val="7030A0"/>
-        </a:solidFill>
-        <a:effectLst/>
-      </p:bgPr>
-    </p:bg>
-    <p:spTree>
-      <p:nvGrpSpPr>
-        <p:cNvPr id="1" name="">
-          <a:extLst>
-            <a:ext uri="{FF2B5EF4-FFF2-40B4-BE49-F238E27FC236}">
-              <a16:creationId xmlns:a16="http://schemas.microsoft.com/office/drawing/2014/main" id="{930D35CF-1EB1-F96C-F585-C6412E95B890}"/>
-            </a:ext>
-          </a:extLst>
-        </p:cNvPr>
-        <p:cNvGrpSpPr/>
-        <p:nvPr/>
-      </p:nvGrpSpPr>
-      <p:grpSpPr>
-        <a:xfrm>
-          <a:off x="0" y="0"/>
-          <a:ext cx="0" cy="0"/>
-          <a:chOff x="0" y="0"/>
-          <a:chExt cx="0" cy="0"/>
-        </a:xfrm>
-      </p:grpSpPr>
-      <p:sp>
-        <p:nvSpPr>
-          <p:cNvPr id="3" name="Subtitle 2">
-            <a:extLst>
-              <a:ext uri="{FF2B5EF4-FFF2-40B4-BE49-F238E27FC236}">
-                <a16:creationId xmlns:a16="http://schemas.microsoft.com/office/drawing/2014/main" id="{0AD8B3DD-E39F-8B93-A66C-07B87B2BF8AD}"/>
-              </a:ext>
-            </a:extLst>
-          </p:cNvPr>
-          <p:cNvSpPr>
-            <a:spLocks noGrp="1"/>
-          </p:cNvSpPr>
-          <p:nvPr>
-            <p:ph type="subTitle" idx="1"/>
-          </p:nvPr>
-        </p:nvSpPr>
-        <p:spPr>
-          <a:xfrm>
-            <a:off x="682831" y="497702"/>
-            <a:ext cx="10826338" cy="5862596"/>
-          </a:xfrm>
-        </p:spPr>
-        <p:txBody>
-          <a:bodyPr>
-            <a:noAutofit/>
-          </a:bodyPr>
-          <a:lstStyle/>
-          <a:p>
-            <a:endParaRPr lang="en-US" sz="4400" dirty="0">
-              <a:solidFill>
-                <a:schemeClr val="bg1"/>
-              </a:solidFill>
-              <a:latin typeface="Avenir Medium" panose="02000503020000020003" pitchFamily="2" charset="0"/>
-              <a:ea typeface="Bodoni Ornaments" pitchFamily="2" charset="0"/>
-            </a:endParaRPr>
-          </a:p>
-          <a:p>
-            <a:r>
-              <a:rPr lang="en-US" sz="4400" dirty="0">
-                <a:solidFill>
-                  <a:schemeClr val="bg1"/>
-                </a:solidFill>
-                <a:latin typeface="Avenir Medium" panose="02000503020000020003" pitchFamily="2" charset="0"/>
-                <a:ea typeface="Bodoni Ornaments" pitchFamily="2" charset="0"/>
-              </a:rPr>
-              <a:t>Paid in full</a:t>
-            </a:r>
-          </a:p>
-          <a:p>
-            <a:endParaRPr lang="en-US" sz="4400" dirty="0">
-              <a:solidFill>
-                <a:schemeClr val="bg1"/>
-              </a:solidFill>
-              <a:latin typeface="Avenir Medium" panose="02000503020000020003" pitchFamily="2" charset="0"/>
-              <a:ea typeface="Bodoni Ornaments" pitchFamily="2" charset="0"/>
-            </a:endParaRPr>
-          </a:p>
-          <a:p>
-            <a:r>
-              <a:rPr lang="en-US" sz="4400" dirty="0">
-                <a:solidFill>
-                  <a:schemeClr val="bg1"/>
-                </a:solidFill>
-                <a:latin typeface="Avenir Medium" panose="02000503020000020003" pitchFamily="2" charset="0"/>
-                <a:ea typeface="Bodoni Ornaments" pitchFamily="2" charset="0"/>
-              </a:rPr>
-              <a:t>All sufficient merit now my own</a:t>
-            </a:r>
-          </a:p>
-        </p:txBody>
-      </p:sp>
-    </p:spTree>
-    <p:extLst>
-      <p:ext uri="{BB962C8B-B14F-4D97-AF65-F5344CB8AC3E}">
-        <p14:creationId xmlns:p14="http://schemas.microsoft.com/office/powerpoint/2010/main" val="1514148742"/>
-      </p:ext>
-    </p:extLst>
-  </p:cSld>
-  <p:clrMapOvr>
-    <a:masterClrMapping/>
-  </p:clrMapOvr>
-</p:sld>
-</file>
-
-<file path=ppt/slides/slide44.xml><?xml version="1.0" encoding="utf-8"?>
-<p:sld xmlns:a="http://schemas.openxmlformats.org/drawingml/2006/main" xmlns:r="http://schemas.openxmlformats.org/officeDocument/2006/relationships" xmlns:p="http://schemas.openxmlformats.org/presentationml/2006/main">
-  <p:cSld>
-    <p:bg>
-      <p:bgPr>
-        <a:solidFill>
-          <a:schemeClr val="accent1"/>
-        </a:solidFill>
-        <a:effectLst/>
-      </p:bgPr>
-    </p:bg>
-    <p:spTree>
-      <p:nvGrpSpPr>
-        <p:cNvPr id="1" name="">
-          <a:extLst>
-            <a:ext uri="{FF2B5EF4-FFF2-40B4-BE49-F238E27FC236}">
               <a16:creationId xmlns:a16="http://schemas.microsoft.com/office/drawing/2014/main" id="{7F8EAD9D-411B-BBB0-2853-4AE179FD56CE}"/>
             </a:ext>
           </a:extLst>
@@ -9942,7 +9380,7 @@
 </p:sld>
 </file>
 
-<file path=ppt/slides/slide45.xml><?xml version="1.0" encoding="utf-8"?>
+<file path=ppt/slides/slide41.xml><?xml version="1.0" encoding="utf-8"?>
 <p:sld xmlns:a="http://schemas.openxmlformats.org/drawingml/2006/main" xmlns:r="http://schemas.openxmlformats.org/officeDocument/2006/relationships" xmlns:p="http://schemas.openxmlformats.org/presentationml/2006/main">
   <p:cSld>
     <p:bg>
@@ -10102,7 +9540,7 @@
 </p:sld>
 </file>
 
-<file path=ppt/slides/slide46.xml><?xml version="1.0" encoding="utf-8"?>
+<file path=ppt/slides/slide42.xml><?xml version="1.0" encoding="utf-8"?>
 <p:sld xmlns:a="http://schemas.openxmlformats.org/drawingml/2006/main" xmlns:r="http://schemas.openxmlformats.org/officeDocument/2006/relationships" xmlns:p="http://schemas.openxmlformats.org/presentationml/2006/main">
   <p:cSld>
     <p:bg>
@@ -10238,7 +9676,7 @@
 </p:sld>
 </file>
 
-<file path=ppt/slides/slide47.xml><?xml version="1.0" encoding="utf-8"?>
+<file path=ppt/slides/slide43.xml><?xml version="1.0" encoding="utf-8"?>
 <p:sld xmlns:a="http://schemas.openxmlformats.org/drawingml/2006/main" xmlns:r="http://schemas.openxmlformats.org/officeDocument/2006/relationships" xmlns:p="http://schemas.openxmlformats.org/presentationml/2006/main">
   <p:cSld>
     <p:bg>

--- a/2025-11-16 AGCC.pptx
+++ b/2025-11-16 AGCC.pptx
@@ -23,31 +23,29 @@
     <p:sldId id="272" r:id="rId17"/>
     <p:sldId id="273" r:id="rId18"/>
     <p:sldId id="275" r:id="rId19"/>
-    <p:sldId id="276" r:id="rId20"/>
-    <p:sldId id="277" r:id="rId21"/>
-    <p:sldId id="278" r:id="rId22"/>
-    <p:sldId id="279" r:id="rId23"/>
-    <p:sldId id="282" r:id="rId24"/>
-    <p:sldId id="283" r:id="rId25"/>
-    <p:sldId id="268" r:id="rId26"/>
-    <p:sldId id="286" r:id="rId27"/>
-    <p:sldId id="269" r:id="rId28"/>
-    <p:sldId id="287" r:id="rId29"/>
-    <p:sldId id="288" r:id="rId30"/>
-    <p:sldId id="289" r:id="rId31"/>
-    <p:sldId id="290" r:id="rId32"/>
-    <p:sldId id="291" r:id="rId33"/>
-    <p:sldId id="292" r:id="rId34"/>
-    <p:sldId id="293" r:id="rId35"/>
-    <p:sldId id="294" r:id="rId36"/>
-    <p:sldId id="295" r:id="rId37"/>
-    <p:sldId id="296" r:id="rId38"/>
-    <p:sldId id="297" r:id="rId39"/>
-    <p:sldId id="298" r:id="rId40"/>
-    <p:sldId id="299" r:id="rId41"/>
-    <p:sldId id="300" r:id="rId42"/>
-    <p:sldId id="301" r:id="rId43"/>
-    <p:sldId id="302" r:id="rId44"/>
+    <p:sldId id="278" r:id="rId20"/>
+    <p:sldId id="279" r:id="rId21"/>
+    <p:sldId id="282" r:id="rId22"/>
+    <p:sldId id="283" r:id="rId23"/>
+    <p:sldId id="268" r:id="rId24"/>
+    <p:sldId id="286" r:id="rId25"/>
+    <p:sldId id="269" r:id="rId26"/>
+    <p:sldId id="287" r:id="rId27"/>
+    <p:sldId id="288" r:id="rId28"/>
+    <p:sldId id="289" r:id="rId29"/>
+    <p:sldId id="290" r:id="rId30"/>
+    <p:sldId id="291" r:id="rId31"/>
+    <p:sldId id="292" r:id="rId32"/>
+    <p:sldId id="293" r:id="rId33"/>
+    <p:sldId id="294" r:id="rId34"/>
+    <p:sldId id="295" r:id="rId35"/>
+    <p:sldId id="296" r:id="rId36"/>
+    <p:sldId id="297" r:id="rId37"/>
+    <p:sldId id="298" r:id="rId38"/>
+    <p:sldId id="299" r:id="rId39"/>
+    <p:sldId id="300" r:id="rId40"/>
+    <p:sldId id="301" r:id="rId41"/>
+    <p:sldId id="302" r:id="rId42"/>
   </p:sldIdLst>
   <p:sldSz cx="12192000" cy="6858000"/>
   <p:notesSz cx="6858000" cy="9144000"/>
@@ -5354,7 +5352,7 @@
     <p:bg>
       <p:bgPr>
         <a:solidFill>
-          <a:srgbClr val="7030A0"/>
+          <a:schemeClr val="accent1"/>
         </a:solidFill>
         <a:effectLst/>
       </p:bgPr>
@@ -5364,7 +5362,7 @@
         <p:cNvPr id="1" name="">
           <a:extLst>
             <a:ext uri="{FF2B5EF4-FFF2-40B4-BE49-F238E27FC236}">
-              <a16:creationId xmlns:a16="http://schemas.microsoft.com/office/drawing/2014/main" id="{D48471BC-71FA-5050-E195-E824F107A16A}"/>
+              <a16:creationId xmlns:a16="http://schemas.microsoft.com/office/drawing/2014/main" id="{43ACF013-4574-2AD0-7BFD-6E771B7E5C0B}"/>
             </a:ext>
           </a:extLst>
         </p:cNvPr>
@@ -5384,7 +5382,7 @@
           <p:cNvPr id="3" name="Subtitle 2">
             <a:extLst>
               <a:ext uri="{FF2B5EF4-FFF2-40B4-BE49-F238E27FC236}">
-                <a16:creationId xmlns:a16="http://schemas.microsoft.com/office/drawing/2014/main" id="{70F4B07D-1F4C-FAA9-270A-D4E9E8B3C5D2}"/>
+                <a16:creationId xmlns:a16="http://schemas.microsoft.com/office/drawing/2014/main" id="{F0FD9A51-1655-DF8C-52C5-2398AD7832C4}"/>
               </a:ext>
             </a:extLst>
           </p:cNvPr>
@@ -5424,77 +5422,70 @@
                 <a:latin typeface="Avenir Medium" panose="02000503020000020003" pitchFamily="2" charset="0"/>
                 <a:ea typeface="Bodoni Ornaments" pitchFamily="2" charset="0"/>
               </a:rPr>
-              <a:t>Praise the Lord, </a:t>
-            </a:r>
-            <a:br>
-              <a:rPr lang="en-US" sz="4400" dirty="0">
-                <a:solidFill>
-                  <a:schemeClr val="bg1"/>
-                </a:solidFill>
-                <a:latin typeface="Avenir Medium" panose="02000503020000020003" pitchFamily="2" charset="0"/>
-                <a:ea typeface="Bodoni Ornaments" pitchFamily="2" charset="0"/>
-              </a:rPr>
-            </a:br>
-            <a:endParaRPr lang="en-US" sz="4400" dirty="0">
-              <a:solidFill>
-                <a:schemeClr val="bg1"/>
-              </a:solidFill>
-              <a:latin typeface="Avenir Medium" panose="02000503020000020003" pitchFamily="2" charset="0"/>
-              <a:ea typeface="Bodoni Ornaments" pitchFamily="2" charset="0"/>
-            </a:endParaRPr>
-          </a:p>
-          <a:p>
-            <a:r>
-              <a:rPr lang="en-US" sz="4400" dirty="0">
-                <a:solidFill>
-                  <a:schemeClr val="bg1"/>
-                </a:solidFill>
-                <a:latin typeface="Avenir Medium" panose="02000503020000020003" pitchFamily="2" charset="0"/>
-                <a:ea typeface="Bodoni Ornaments" pitchFamily="2" charset="0"/>
-              </a:rPr>
-              <a:t>His mercy is more</a:t>
-            </a:r>
-          </a:p>
-          <a:p>
-            <a:endParaRPr lang="en-US" sz="4400" dirty="0">
-              <a:solidFill>
-                <a:schemeClr val="bg1"/>
-              </a:solidFill>
-              <a:latin typeface="Avenir Medium" panose="02000503020000020003" pitchFamily="2" charset="0"/>
-              <a:ea typeface="Bodoni Ornaments" pitchFamily="2" charset="0"/>
-            </a:endParaRPr>
-          </a:p>
-          <a:p>
-            <a:r>
-              <a:rPr lang="en-US" sz="4400" dirty="0">
-                <a:solidFill>
-                  <a:schemeClr val="bg1"/>
-                </a:solidFill>
-                <a:latin typeface="Avenir Medium" panose="02000503020000020003" pitchFamily="2" charset="0"/>
-                <a:ea typeface="Bodoni Ornaments" pitchFamily="2" charset="0"/>
-              </a:rPr>
-              <a:t>Stronger than darkness, </a:t>
-            </a:r>
-          </a:p>
-          <a:p>
-            <a:endParaRPr lang="en-US" sz="4400" dirty="0">
-              <a:solidFill>
-                <a:schemeClr val="bg1"/>
-              </a:solidFill>
-              <a:latin typeface="Avenir Medium" panose="02000503020000020003" pitchFamily="2" charset="0"/>
-              <a:ea typeface="Bodoni Ornaments" pitchFamily="2" charset="0"/>
-            </a:endParaRPr>
-          </a:p>
-          <a:p>
-            <a:r>
-              <a:rPr lang="en-US" sz="4400" dirty="0">
-                <a:solidFill>
-                  <a:schemeClr val="bg1"/>
-                </a:solidFill>
-                <a:latin typeface="Avenir Medium" panose="02000503020000020003" pitchFamily="2" charset="0"/>
-                <a:ea typeface="Bodoni Ornaments" pitchFamily="2" charset="0"/>
-              </a:rPr>
-              <a:t>new every morn</a:t>
+              <a:t>What love could remember, </a:t>
+            </a:r>
+          </a:p>
+          <a:p>
+            <a:endParaRPr lang="en-US" sz="4400" dirty="0">
+              <a:solidFill>
+                <a:schemeClr val="bg1"/>
+              </a:solidFill>
+              <a:latin typeface="Avenir Medium" panose="02000503020000020003" pitchFamily="2" charset="0"/>
+              <a:ea typeface="Bodoni Ornaments" pitchFamily="2" charset="0"/>
+            </a:endParaRPr>
+          </a:p>
+          <a:p>
+            <a:r>
+              <a:rPr lang="en-US" sz="4400" dirty="0">
+                <a:solidFill>
+                  <a:schemeClr val="bg1"/>
+                </a:solidFill>
+                <a:latin typeface="Avenir Medium" panose="02000503020000020003" pitchFamily="2" charset="0"/>
+                <a:ea typeface="Bodoni Ornaments" pitchFamily="2" charset="0"/>
+              </a:rPr>
+              <a:t>no wrongs we have done</a:t>
+            </a:r>
+          </a:p>
+          <a:p>
+            <a:endParaRPr lang="en-US" sz="4400" dirty="0">
+              <a:solidFill>
+                <a:schemeClr val="bg1"/>
+              </a:solidFill>
+              <a:latin typeface="Avenir Medium" panose="02000503020000020003" pitchFamily="2" charset="0"/>
+              <a:ea typeface="Bodoni Ornaments" pitchFamily="2" charset="0"/>
+            </a:endParaRPr>
+          </a:p>
+          <a:p>
+            <a:r>
+              <a:rPr lang="en-US" sz="4400" dirty="0">
+                <a:solidFill>
+                  <a:schemeClr val="bg1"/>
+                </a:solidFill>
+                <a:latin typeface="Avenir Medium" panose="02000503020000020003" pitchFamily="2" charset="0"/>
+                <a:ea typeface="Bodoni Ornaments" pitchFamily="2" charset="0"/>
+              </a:rPr>
+              <a:t>Omniscient all-knowing, </a:t>
+            </a:r>
+          </a:p>
+          <a:p>
+            <a:endParaRPr lang="en-US" sz="4400" dirty="0">
+              <a:solidFill>
+                <a:schemeClr val="bg1"/>
+              </a:solidFill>
+              <a:latin typeface="Avenir Medium" panose="02000503020000020003" pitchFamily="2" charset="0"/>
+              <a:ea typeface="Bodoni Ornaments" pitchFamily="2" charset="0"/>
+            </a:endParaRPr>
+          </a:p>
+          <a:p>
+            <a:r>
+              <a:rPr lang="en-US" sz="4400" dirty="0">
+                <a:solidFill>
+                  <a:schemeClr val="bg1"/>
+                </a:solidFill>
+                <a:latin typeface="Avenir Medium" panose="02000503020000020003" pitchFamily="2" charset="0"/>
+                <a:ea typeface="Bodoni Ornaments" pitchFamily="2" charset="0"/>
+              </a:rPr>
+              <a:t>He counts not their sum</a:t>
             </a:r>
           </a:p>
         </p:txBody>
@@ -5502,7 +5493,7 @@
     </p:spTree>
     <p:extLst>
       <p:ext uri="{BB962C8B-B14F-4D97-AF65-F5344CB8AC3E}">
-        <p14:creationId xmlns:p14="http://schemas.microsoft.com/office/powerpoint/2010/main" val="3414640861"/>
+        <p14:creationId xmlns:p14="http://schemas.microsoft.com/office/powerpoint/2010/main" val="1606047208"/>
       </p:ext>
     </p:extLst>
   </p:cSld>
@@ -5654,278 +5645,6 @@
     <p:bg>
       <p:bgPr>
         <a:solidFill>
-          <a:srgbClr val="7030A0"/>
-        </a:solidFill>
-        <a:effectLst/>
-      </p:bgPr>
-    </p:bg>
-    <p:spTree>
-      <p:nvGrpSpPr>
-        <p:cNvPr id="1" name="">
-          <a:extLst>
-            <a:ext uri="{FF2B5EF4-FFF2-40B4-BE49-F238E27FC236}">
-              <a16:creationId xmlns:a16="http://schemas.microsoft.com/office/drawing/2014/main" id="{FD6171DC-FEDD-4A1C-FD22-D2CB403DDC21}"/>
-            </a:ext>
-          </a:extLst>
-        </p:cNvPr>
-        <p:cNvGrpSpPr/>
-        <p:nvPr/>
-      </p:nvGrpSpPr>
-      <p:grpSpPr>
-        <a:xfrm>
-          <a:off x="0" y="0"/>
-          <a:ext cx="0" cy="0"/>
-          <a:chOff x="0" y="0"/>
-          <a:chExt cx="0" cy="0"/>
-        </a:xfrm>
-      </p:grpSpPr>
-      <p:sp>
-        <p:nvSpPr>
-          <p:cNvPr id="3" name="Subtitle 2">
-            <a:extLst>
-              <a:ext uri="{FF2B5EF4-FFF2-40B4-BE49-F238E27FC236}">
-                <a16:creationId xmlns:a16="http://schemas.microsoft.com/office/drawing/2014/main" id="{E763502A-CAAA-C6D0-037F-1A6AA07A9772}"/>
-              </a:ext>
-            </a:extLst>
-          </p:cNvPr>
-          <p:cNvSpPr>
-            <a:spLocks noGrp="1"/>
-          </p:cNvSpPr>
-          <p:nvPr>
-            <p:ph type="subTitle" idx="1"/>
-          </p:nvPr>
-        </p:nvSpPr>
-        <p:spPr>
-          <a:xfrm>
-            <a:off x="682831" y="497702"/>
-            <a:ext cx="10826338" cy="5862596"/>
-          </a:xfrm>
-        </p:spPr>
-        <p:txBody>
-          <a:bodyPr>
-            <a:noAutofit/>
-          </a:bodyPr>
-          <a:lstStyle/>
-          <a:p>
-            <a:endParaRPr lang="en-US" sz="4400" dirty="0">
-              <a:solidFill>
-                <a:schemeClr val="bg1"/>
-              </a:solidFill>
-              <a:latin typeface="Avenir Medium" panose="02000503020000020003" pitchFamily="2" charset="0"/>
-              <a:ea typeface="Bodoni Ornaments" pitchFamily="2" charset="0"/>
-            </a:endParaRPr>
-          </a:p>
-          <a:p>
-            <a:r>
-              <a:rPr lang="en-US" sz="4400" dirty="0">
-                <a:solidFill>
-                  <a:schemeClr val="bg1"/>
-                </a:solidFill>
-                <a:latin typeface="Avenir Medium" panose="02000503020000020003" pitchFamily="2" charset="0"/>
-                <a:ea typeface="Bodoni Ornaments" pitchFamily="2" charset="0"/>
-              </a:rPr>
-              <a:t>Our sins they are many, </a:t>
-            </a:r>
-          </a:p>
-          <a:p>
-            <a:endParaRPr lang="en-US" sz="4400" dirty="0">
-              <a:solidFill>
-                <a:schemeClr val="bg1"/>
-              </a:solidFill>
-              <a:latin typeface="Avenir Medium" panose="02000503020000020003" pitchFamily="2" charset="0"/>
-              <a:ea typeface="Bodoni Ornaments" pitchFamily="2" charset="0"/>
-            </a:endParaRPr>
-          </a:p>
-          <a:p>
-            <a:r>
-              <a:rPr lang="en-US" sz="4400" dirty="0">
-                <a:solidFill>
-                  <a:schemeClr val="bg1"/>
-                </a:solidFill>
-                <a:latin typeface="Avenir Medium" panose="02000503020000020003" pitchFamily="2" charset="0"/>
-                <a:ea typeface="Bodoni Ornaments" pitchFamily="2" charset="0"/>
-              </a:rPr>
-              <a:t>His mercy is more</a:t>
-            </a:r>
-          </a:p>
-        </p:txBody>
-      </p:sp>
-    </p:spTree>
-    <p:extLst>
-      <p:ext uri="{BB962C8B-B14F-4D97-AF65-F5344CB8AC3E}">
-        <p14:creationId xmlns:p14="http://schemas.microsoft.com/office/powerpoint/2010/main" val="979178852"/>
-      </p:ext>
-    </p:extLst>
-  </p:cSld>
-  <p:clrMapOvr>
-    <a:masterClrMapping/>
-  </p:clrMapOvr>
-</p:sld>
-</file>
-
-<file path=ppt/slides/slide21.xml><?xml version="1.0" encoding="utf-8"?>
-<p:sld xmlns:a="http://schemas.openxmlformats.org/drawingml/2006/main" xmlns:r="http://schemas.openxmlformats.org/officeDocument/2006/relationships" xmlns:p="http://schemas.openxmlformats.org/presentationml/2006/main">
-  <p:cSld>
-    <p:bg>
-      <p:bgPr>
-        <a:solidFill>
-          <a:schemeClr val="accent1"/>
-        </a:solidFill>
-        <a:effectLst/>
-      </p:bgPr>
-    </p:bg>
-    <p:spTree>
-      <p:nvGrpSpPr>
-        <p:cNvPr id="1" name="">
-          <a:extLst>
-            <a:ext uri="{FF2B5EF4-FFF2-40B4-BE49-F238E27FC236}">
-              <a16:creationId xmlns:a16="http://schemas.microsoft.com/office/drawing/2014/main" id="{43ACF013-4574-2AD0-7BFD-6E771B7E5C0B}"/>
-            </a:ext>
-          </a:extLst>
-        </p:cNvPr>
-        <p:cNvGrpSpPr/>
-        <p:nvPr/>
-      </p:nvGrpSpPr>
-      <p:grpSpPr>
-        <a:xfrm>
-          <a:off x="0" y="0"/>
-          <a:ext cx="0" cy="0"/>
-          <a:chOff x="0" y="0"/>
-          <a:chExt cx="0" cy="0"/>
-        </a:xfrm>
-      </p:grpSpPr>
-      <p:sp>
-        <p:nvSpPr>
-          <p:cNvPr id="3" name="Subtitle 2">
-            <a:extLst>
-              <a:ext uri="{FF2B5EF4-FFF2-40B4-BE49-F238E27FC236}">
-                <a16:creationId xmlns:a16="http://schemas.microsoft.com/office/drawing/2014/main" id="{F0FD9A51-1655-DF8C-52C5-2398AD7832C4}"/>
-              </a:ext>
-            </a:extLst>
-          </p:cNvPr>
-          <p:cNvSpPr>
-            <a:spLocks noGrp="1"/>
-          </p:cNvSpPr>
-          <p:nvPr>
-            <p:ph type="subTitle" idx="1"/>
-          </p:nvPr>
-        </p:nvSpPr>
-        <p:spPr>
-          <a:xfrm>
-            <a:off x="682831" y="497702"/>
-            <a:ext cx="10826338" cy="5862596"/>
-          </a:xfrm>
-        </p:spPr>
-        <p:txBody>
-          <a:bodyPr>
-            <a:noAutofit/>
-          </a:bodyPr>
-          <a:lstStyle/>
-          <a:p>
-            <a:endParaRPr lang="en-US" sz="4400" dirty="0">
-              <a:solidFill>
-                <a:schemeClr val="bg1"/>
-              </a:solidFill>
-              <a:latin typeface="Avenir Medium" panose="02000503020000020003" pitchFamily="2" charset="0"/>
-              <a:ea typeface="Bodoni Ornaments" pitchFamily="2" charset="0"/>
-            </a:endParaRPr>
-          </a:p>
-          <a:p>
-            <a:r>
-              <a:rPr lang="en-US" sz="4400" dirty="0">
-                <a:solidFill>
-                  <a:schemeClr val="bg1"/>
-                </a:solidFill>
-                <a:latin typeface="Avenir Medium" panose="02000503020000020003" pitchFamily="2" charset="0"/>
-                <a:ea typeface="Bodoni Ornaments" pitchFamily="2" charset="0"/>
-              </a:rPr>
-              <a:t>What love could remember, </a:t>
-            </a:r>
-          </a:p>
-          <a:p>
-            <a:endParaRPr lang="en-US" sz="4400" dirty="0">
-              <a:solidFill>
-                <a:schemeClr val="bg1"/>
-              </a:solidFill>
-              <a:latin typeface="Avenir Medium" panose="02000503020000020003" pitchFamily="2" charset="0"/>
-              <a:ea typeface="Bodoni Ornaments" pitchFamily="2" charset="0"/>
-            </a:endParaRPr>
-          </a:p>
-          <a:p>
-            <a:r>
-              <a:rPr lang="en-US" sz="4400" dirty="0">
-                <a:solidFill>
-                  <a:schemeClr val="bg1"/>
-                </a:solidFill>
-                <a:latin typeface="Avenir Medium" panose="02000503020000020003" pitchFamily="2" charset="0"/>
-                <a:ea typeface="Bodoni Ornaments" pitchFamily="2" charset="0"/>
-              </a:rPr>
-              <a:t>no wrongs we have done</a:t>
-            </a:r>
-          </a:p>
-          <a:p>
-            <a:endParaRPr lang="en-US" sz="4400" dirty="0">
-              <a:solidFill>
-                <a:schemeClr val="bg1"/>
-              </a:solidFill>
-              <a:latin typeface="Avenir Medium" panose="02000503020000020003" pitchFamily="2" charset="0"/>
-              <a:ea typeface="Bodoni Ornaments" pitchFamily="2" charset="0"/>
-            </a:endParaRPr>
-          </a:p>
-          <a:p>
-            <a:r>
-              <a:rPr lang="en-US" sz="4400" dirty="0">
-                <a:solidFill>
-                  <a:schemeClr val="bg1"/>
-                </a:solidFill>
-                <a:latin typeface="Avenir Medium" panose="02000503020000020003" pitchFamily="2" charset="0"/>
-                <a:ea typeface="Bodoni Ornaments" pitchFamily="2" charset="0"/>
-              </a:rPr>
-              <a:t>Omniscient all-knowing, </a:t>
-            </a:r>
-          </a:p>
-          <a:p>
-            <a:endParaRPr lang="en-US" sz="4400" dirty="0">
-              <a:solidFill>
-                <a:schemeClr val="bg1"/>
-              </a:solidFill>
-              <a:latin typeface="Avenir Medium" panose="02000503020000020003" pitchFamily="2" charset="0"/>
-              <a:ea typeface="Bodoni Ornaments" pitchFamily="2" charset="0"/>
-            </a:endParaRPr>
-          </a:p>
-          <a:p>
-            <a:r>
-              <a:rPr lang="en-US" sz="4400" dirty="0">
-                <a:solidFill>
-                  <a:schemeClr val="bg1"/>
-                </a:solidFill>
-                <a:latin typeface="Avenir Medium" panose="02000503020000020003" pitchFamily="2" charset="0"/>
-                <a:ea typeface="Bodoni Ornaments" pitchFamily="2" charset="0"/>
-              </a:rPr>
-              <a:t>He counts not their sum</a:t>
-            </a:r>
-          </a:p>
-        </p:txBody>
-      </p:sp>
-    </p:spTree>
-    <p:extLst>
-      <p:ext uri="{BB962C8B-B14F-4D97-AF65-F5344CB8AC3E}">
-        <p14:creationId xmlns:p14="http://schemas.microsoft.com/office/powerpoint/2010/main" val="1606047208"/>
-      </p:ext>
-    </p:extLst>
-  </p:cSld>
-  <p:clrMapOvr>
-    <a:masterClrMapping/>
-  </p:clrMapOvr>
-</p:sld>
-</file>
-
-<file path=ppt/slides/slide22.xml><?xml version="1.0" encoding="utf-8"?>
-<p:sld xmlns:a="http://schemas.openxmlformats.org/drawingml/2006/main" xmlns:r="http://schemas.openxmlformats.org/officeDocument/2006/relationships" xmlns:p="http://schemas.openxmlformats.org/presentationml/2006/main">
-  <p:cSld>
-    <p:bg>
-      <p:bgPr>
-        <a:solidFill>
           <a:schemeClr val="accent1"/>
         </a:solidFill>
         <a:effectLst/>
@@ -6077,7 +5796,7 @@
 </p:sld>
 </file>
 
-<file path=ppt/slides/slide23.xml><?xml version="1.0" encoding="utf-8"?>
+<file path=ppt/slides/slide21.xml><?xml version="1.0" encoding="utf-8"?>
 <p:sld xmlns:a="http://schemas.openxmlformats.org/drawingml/2006/main" xmlns:r="http://schemas.openxmlformats.org/officeDocument/2006/relationships" xmlns:p="http://schemas.openxmlformats.org/presentationml/2006/main">
   <p:cSld>
     <p:bg>
@@ -6234,7 +5953,7 @@
 </p:sld>
 </file>
 
-<file path=ppt/slides/slide24.xml><?xml version="1.0" encoding="utf-8"?>
+<file path=ppt/slides/slide22.xml><?xml version="1.0" encoding="utf-8"?>
 <p:sld xmlns:a="http://schemas.openxmlformats.org/drawingml/2006/main" xmlns:r="http://schemas.openxmlformats.org/officeDocument/2006/relationships" xmlns:p="http://schemas.openxmlformats.org/presentationml/2006/main">
   <p:cSld>
     <p:bg>
@@ -6391,7 +6110,7 @@
 </p:sld>
 </file>
 
-<file path=ppt/slides/slide25.xml><?xml version="1.0" encoding="utf-8"?>
+<file path=ppt/slides/slide23.xml><?xml version="1.0" encoding="utf-8"?>
 <p:sld xmlns:a="http://schemas.openxmlformats.org/drawingml/2006/main" xmlns:r="http://schemas.openxmlformats.org/officeDocument/2006/relationships" xmlns:p="http://schemas.openxmlformats.org/presentationml/2006/main">
   <p:cSld>
     <p:bg>
@@ -6548,7 +6267,7 @@
 </p:sld>
 </file>
 
-<file path=ppt/slides/slide26.xml><?xml version="1.0" encoding="utf-8"?>
+<file path=ppt/slides/slide24.xml><?xml version="1.0" encoding="utf-8"?>
 <p:sld xmlns:a="http://schemas.openxmlformats.org/drawingml/2006/main" xmlns:r="http://schemas.openxmlformats.org/officeDocument/2006/relationships" xmlns:p="http://schemas.openxmlformats.org/presentationml/2006/main">
   <p:cSld>
     <p:bg>
@@ -6705,7 +6424,7 @@
 </p:sld>
 </file>
 
-<file path=ppt/slides/slide27.xml><?xml version="1.0" encoding="utf-8"?>
+<file path=ppt/slides/slide25.xml><?xml version="1.0" encoding="utf-8"?>
 <p:sld xmlns:a="http://schemas.openxmlformats.org/drawingml/2006/main" xmlns:r="http://schemas.openxmlformats.org/officeDocument/2006/relationships" xmlns:p="http://schemas.openxmlformats.org/presentationml/2006/main">
   <p:cSld>
     <p:bg>
@@ -6869,7 +6588,7 @@
 </p:sld>
 </file>
 
-<file path=ppt/slides/slide28.xml><?xml version="1.0" encoding="utf-8"?>
+<file path=ppt/slides/slide26.xml><?xml version="1.0" encoding="utf-8"?>
 <p:sld xmlns:a="http://schemas.openxmlformats.org/drawingml/2006/main" xmlns:r="http://schemas.openxmlformats.org/officeDocument/2006/relationships" xmlns:p="http://schemas.openxmlformats.org/presentationml/2006/main">
   <p:cSld>
     <p:bg>
@@ -7017,7 +6736,7 @@
 </p:sld>
 </file>
 
-<file path=ppt/slides/slide29.xml><?xml version="1.0" encoding="utf-8"?>
+<file path=ppt/slides/slide27.xml><?xml version="1.0" encoding="utf-8"?>
 <p:sld xmlns:a="http://schemas.openxmlformats.org/drawingml/2006/main" xmlns:r="http://schemas.openxmlformats.org/officeDocument/2006/relationships" xmlns:p="http://schemas.openxmlformats.org/presentationml/2006/main">
   <p:cSld>
     <p:bg>
@@ -7525,6 +7244,320 @@
     <p:extLst>
       <p:ext uri="{BB962C8B-B14F-4D97-AF65-F5344CB8AC3E}">
         <p14:creationId xmlns:p14="http://schemas.microsoft.com/office/powerpoint/2010/main" val="1364850361"/>
+      </p:ext>
+    </p:extLst>
+  </p:cSld>
+  <p:clrMapOvr>
+    <a:masterClrMapping/>
+  </p:clrMapOvr>
+</p:sld>
+</file>
+
+<file path=ppt/slides/slide28.xml><?xml version="1.0" encoding="utf-8"?>
+<p:sld xmlns:a="http://schemas.openxmlformats.org/drawingml/2006/main" xmlns:r="http://schemas.openxmlformats.org/officeDocument/2006/relationships" xmlns:p="http://schemas.openxmlformats.org/presentationml/2006/main">
+  <p:cSld>
+    <p:bg>
+      <p:bgPr>
+        <a:solidFill>
+          <a:schemeClr val="accent1"/>
+        </a:solidFill>
+        <a:effectLst/>
+      </p:bgPr>
+    </p:bg>
+    <p:spTree>
+      <p:nvGrpSpPr>
+        <p:cNvPr id="1" name="">
+          <a:extLst>
+            <a:ext uri="{FF2B5EF4-FFF2-40B4-BE49-F238E27FC236}">
+              <a16:creationId xmlns:a16="http://schemas.microsoft.com/office/drawing/2014/main" id="{083E1F97-17F4-001F-7673-B8EFA09D831D}"/>
+            </a:ext>
+          </a:extLst>
+        </p:cNvPr>
+        <p:cNvGrpSpPr/>
+        <p:nvPr/>
+      </p:nvGrpSpPr>
+      <p:grpSpPr>
+        <a:xfrm>
+          <a:off x="0" y="0"/>
+          <a:ext cx="0" cy="0"/>
+          <a:chOff x="0" y="0"/>
+          <a:chExt cx="0" cy="0"/>
+        </a:xfrm>
+      </p:grpSpPr>
+      <p:sp>
+        <p:nvSpPr>
+          <p:cNvPr id="3" name="Subtitle 2">
+            <a:extLst>
+              <a:ext uri="{FF2B5EF4-FFF2-40B4-BE49-F238E27FC236}">
+                <a16:creationId xmlns:a16="http://schemas.microsoft.com/office/drawing/2014/main" id="{0F0AA937-867D-D484-37E8-C9B43A905917}"/>
+              </a:ext>
+            </a:extLst>
+          </p:cNvPr>
+          <p:cNvSpPr>
+            <a:spLocks noGrp="1"/>
+          </p:cNvSpPr>
+          <p:nvPr>
+            <p:ph type="subTitle" idx="1"/>
+          </p:nvPr>
+        </p:nvSpPr>
+        <p:spPr>
+          <a:xfrm>
+            <a:off x="682831" y="497702"/>
+            <a:ext cx="10826338" cy="5862596"/>
+          </a:xfrm>
+        </p:spPr>
+        <p:txBody>
+          <a:bodyPr>
+            <a:noAutofit/>
+          </a:bodyPr>
+          <a:lstStyle/>
+          <a:p>
+            <a:endParaRPr lang="en-US" sz="4400" dirty="0">
+              <a:solidFill>
+                <a:schemeClr val="bg1"/>
+              </a:solidFill>
+              <a:latin typeface="Avenir Medium" panose="02000503020000020003" pitchFamily="2" charset="0"/>
+              <a:ea typeface="Bodoni Ornaments" pitchFamily="2" charset="0"/>
+            </a:endParaRPr>
+          </a:p>
+          <a:p>
+            <a:r>
+              <a:rPr lang="en-US" sz="4400" dirty="0">
+                <a:solidFill>
+                  <a:schemeClr val="bg1"/>
+                </a:solidFill>
+                <a:latin typeface="Avenir Medium" panose="02000503020000020003" pitchFamily="2" charset="0"/>
+                <a:ea typeface="Bodoni Ornaments" pitchFamily="2" charset="0"/>
+              </a:rPr>
+              <a:t>All sufficient merit</a:t>
+            </a:r>
+          </a:p>
+          <a:p>
+            <a:endParaRPr lang="en-US" sz="4400" dirty="0">
+              <a:solidFill>
+                <a:schemeClr val="bg1"/>
+              </a:solidFill>
+              <a:latin typeface="Avenir Medium" panose="02000503020000020003" pitchFamily="2" charset="0"/>
+              <a:ea typeface="Bodoni Ornaments" pitchFamily="2" charset="0"/>
+            </a:endParaRPr>
+          </a:p>
+          <a:p>
+            <a:r>
+              <a:rPr lang="en-US" sz="4400" dirty="0">
+                <a:solidFill>
+                  <a:schemeClr val="bg1"/>
+                </a:solidFill>
+                <a:latin typeface="Avenir Medium" panose="02000503020000020003" pitchFamily="2" charset="0"/>
+                <a:ea typeface="Bodoni Ornaments" pitchFamily="2" charset="0"/>
+              </a:rPr>
+              <a:t>Shining like the sun</a:t>
+            </a:r>
+          </a:p>
+          <a:p>
+            <a:endParaRPr lang="en-US" sz="4400" dirty="0">
+              <a:solidFill>
+                <a:schemeClr val="bg1"/>
+              </a:solidFill>
+              <a:latin typeface="Avenir Medium" panose="02000503020000020003" pitchFamily="2" charset="0"/>
+              <a:ea typeface="Bodoni Ornaments" pitchFamily="2" charset="0"/>
+            </a:endParaRPr>
+          </a:p>
+          <a:p>
+            <a:r>
+              <a:rPr lang="en-US" sz="4400" dirty="0">
+                <a:solidFill>
+                  <a:schemeClr val="bg1"/>
+                </a:solidFill>
+                <a:latin typeface="Avenir Medium" panose="02000503020000020003" pitchFamily="2" charset="0"/>
+                <a:ea typeface="Bodoni Ornaments" pitchFamily="2" charset="0"/>
+              </a:rPr>
+              <a:t>A fortune I inherit</a:t>
+            </a:r>
+          </a:p>
+          <a:p>
+            <a:endParaRPr lang="en-US" sz="4400" dirty="0">
+              <a:solidFill>
+                <a:schemeClr val="bg1"/>
+              </a:solidFill>
+              <a:latin typeface="Avenir Medium" panose="02000503020000020003" pitchFamily="2" charset="0"/>
+              <a:ea typeface="Bodoni Ornaments" pitchFamily="2" charset="0"/>
+            </a:endParaRPr>
+          </a:p>
+          <a:p>
+            <a:r>
+              <a:rPr lang="en-US" sz="4400" dirty="0">
+                <a:solidFill>
+                  <a:schemeClr val="bg1"/>
+                </a:solidFill>
+                <a:latin typeface="Avenir Medium" panose="02000503020000020003" pitchFamily="2" charset="0"/>
+                <a:ea typeface="Bodoni Ornaments" pitchFamily="2" charset="0"/>
+              </a:rPr>
+              <a:t>By no work I have done</a:t>
+            </a:r>
+          </a:p>
+        </p:txBody>
+      </p:sp>
+    </p:spTree>
+    <p:extLst>
+      <p:ext uri="{BB962C8B-B14F-4D97-AF65-F5344CB8AC3E}">
+        <p14:creationId xmlns:p14="http://schemas.microsoft.com/office/powerpoint/2010/main" val="2991002073"/>
+      </p:ext>
+    </p:extLst>
+  </p:cSld>
+  <p:clrMapOvr>
+    <a:masterClrMapping/>
+  </p:clrMapOvr>
+</p:sld>
+</file>
+
+<file path=ppt/slides/slide29.xml><?xml version="1.0" encoding="utf-8"?>
+<p:sld xmlns:a="http://schemas.openxmlformats.org/drawingml/2006/main" xmlns:r="http://schemas.openxmlformats.org/officeDocument/2006/relationships" xmlns:p="http://schemas.openxmlformats.org/presentationml/2006/main">
+  <p:cSld>
+    <p:bg>
+      <p:bgPr>
+        <a:solidFill>
+          <a:schemeClr val="accent1"/>
+        </a:solidFill>
+        <a:effectLst/>
+      </p:bgPr>
+    </p:bg>
+    <p:spTree>
+      <p:nvGrpSpPr>
+        <p:cNvPr id="1" name="">
+          <a:extLst>
+            <a:ext uri="{FF2B5EF4-FFF2-40B4-BE49-F238E27FC236}">
+              <a16:creationId xmlns:a16="http://schemas.microsoft.com/office/drawing/2014/main" id="{6E321B20-1F07-D41B-D17B-105DC9065E30}"/>
+            </a:ext>
+          </a:extLst>
+        </p:cNvPr>
+        <p:cNvGrpSpPr/>
+        <p:nvPr/>
+      </p:nvGrpSpPr>
+      <p:grpSpPr>
+        <a:xfrm>
+          <a:off x="0" y="0"/>
+          <a:ext cx="0" cy="0"/>
+          <a:chOff x="0" y="0"/>
+          <a:chExt cx="0" cy="0"/>
+        </a:xfrm>
+      </p:grpSpPr>
+      <p:sp>
+        <p:nvSpPr>
+          <p:cNvPr id="3" name="Subtitle 2">
+            <a:extLst>
+              <a:ext uri="{FF2B5EF4-FFF2-40B4-BE49-F238E27FC236}">
+                <a16:creationId xmlns:a16="http://schemas.microsoft.com/office/drawing/2014/main" id="{34E81914-E1B4-6E96-BBA8-CF33B0DE6570}"/>
+              </a:ext>
+            </a:extLst>
+          </p:cNvPr>
+          <p:cNvSpPr>
+            <a:spLocks noGrp="1"/>
+          </p:cNvSpPr>
+          <p:nvPr>
+            <p:ph type="subTitle" idx="1"/>
+          </p:nvPr>
+        </p:nvSpPr>
+        <p:spPr>
+          <a:xfrm>
+            <a:off x="682831" y="497702"/>
+            <a:ext cx="10826338" cy="5862596"/>
+          </a:xfrm>
+        </p:spPr>
+        <p:txBody>
+          <a:bodyPr>
+            <a:noAutofit/>
+          </a:bodyPr>
+          <a:lstStyle/>
+          <a:p>
+            <a:endParaRPr lang="en-US" sz="4400" dirty="0">
+              <a:solidFill>
+                <a:schemeClr val="bg1"/>
+              </a:solidFill>
+              <a:latin typeface="Avenir Medium" panose="02000503020000020003" pitchFamily="2" charset="0"/>
+              <a:ea typeface="Bodoni Ornaments" pitchFamily="2" charset="0"/>
+            </a:endParaRPr>
+          </a:p>
+          <a:p>
+            <a:r>
+              <a:rPr lang="en-US" sz="4400" dirty="0">
+                <a:solidFill>
+                  <a:schemeClr val="bg1"/>
+                </a:solidFill>
+                <a:latin typeface="Avenir Medium" panose="02000503020000020003" pitchFamily="2" charset="0"/>
+                <a:ea typeface="Bodoni Ornaments" pitchFamily="2" charset="0"/>
+              </a:rPr>
+              <a:t>My righteousness I forfeit</a:t>
+            </a:r>
+          </a:p>
+          <a:p>
+            <a:endParaRPr lang="en-US" sz="4400" dirty="0">
+              <a:solidFill>
+                <a:schemeClr val="bg1"/>
+              </a:solidFill>
+              <a:latin typeface="Avenir Medium" panose="02000503020000020003" pitchFamily="2" charset="0"/>
+              <a:ea typeface="Bodoni Ornaments" pitchFamily="2" charset="0"/>
+            </a:endParaRPr>
+          </a:p>
+          <a:p>
+            <a:r>
+              <a:rPr lang="en-US" sz="4400" dirty="0">
+                <a:solidFill>
+                  <a:schemeClr val="bg1"/>
+                </a:solidFill>
+                <a:latin typeface="Avenir Medium" panose="02000503020000020003" pitchFamily="2" charset="0"/>
+                <a:ea typeface="Bodoni Ornaments" pitchFamily="2" charset="0"/>
+              </a:rPr>
+              <a:t>At my saviors cross</a:t>
+            </a:r>
+          </a:p>
+          <a:p>
+            <a:endParaRPr lang="en-US" sz="4400" dirty="0">
+              <a:solidFill>
+                <a:schemeClr val="bg1"/>
+              </a:solidFill>
+              <a:latin typeface="Avenir Medium" panose="02000503020000020003" pitchFamily="2" charset="0"/>
+              <a:ea typeface="Bodoni Ornaments" pitchFamily="2" charset="0"/>
+            </a:endParaRPr>
+          </a:p>
+          <a:p>
+            <a:r>
+              <a:rPr lang="en-US" sz="4400" dirty="0">
+                <a:solidFill>
+                  <a:schemeClr val="bg1"/>
+                </a:solidFill>
+                <a:latin typeface="Avenir Medium" panose="02000503020000020003" pitchFamily="2" charset="0"/>
+                <a:ea typeface="Bodoni Ornaments" pitchFamily="2" charset="0"/>
+              </a:rPr>
+              <a:t>Where all sufficient merit</a:t>
+            </a:r>
+          </a:p>
+          <a:p>
+            <a:endParaRPr lang="en-US" sz="4400" dirty="0">
+              <a:solidFill>
+                <a:schemeClr val="bg1"/>
+              </a:solidFill>
+              <a:latin typeface="Avenir Medium" panose="02000503020000020003" pitchFamily="2" charset="0"/>
+              <a:ea typeface="Bodoni Ornaments" pitchFamily="2" charset="0"/>
+            </a:endParaRPr>
+          </a:p>
+          <a:p>
+            <a:r>
+              <a:rPr lang="en-US" sz="4400" dirty="0">
+                <a:solidFill>
+                  <a:schemeClr val="bg1"/>
+                </a:solidFill>
+                <a:latin typeface="Avenir Medium" panose="02000503020000020003" pitchFamily="2" charset="0"/>
+                <a:ea typeface="Bodoni Ornaments" pitchFamily="2" charset="0"/>
+              </a:rPr>
+              <a:t>Did what I could not</a:t>
+            </a:r>
+          </a:p>
+        </p:txBody>
+      </p:sp>
+    </p:spTree>
+    <p:extLst>
+      <p:ext uri="{BB962C8B-B14F-4D97-AF65-F5344CB8AC3E}">
+        <p14:creationId xmlns:p14="http://schemas.microsoft.com/office/powerpoint/2010/main" val="1943880644"/>
       </p:ext>
     </p:extLst>
   </p:cSld>
@@ -7674,320 +7707,6 @@
         <p:cNvPr id="1" name="">
           <a:extLst>
             <a:ext uri="{FF2B5EF4-FFF2-40B4-BE49-F238E27FC236}">
-              <a16:creationId xmlns:a16="http://schemas.microsoft.com/office/drawing/2014/main" id="{083E1F97-17F4-001F-7673-B8EFA09D831D}"/>
-            </a:ext>
-          </a:extLst>
-        </p:cNvPr>
-        <p:cNvGrpSpPr/>
-        <p:nvPr/>
-      </p:nvGrpSpPr>
-      <p:grpSpPr>
-        <a:xfrm>
-          <a:off x="0" y="0"/>
-          <a:ext cx="0" cy="0"/>
-          <a:chOff x="0" y="0"/>
-          <a:chExt cx="0" cy="0"/>
-        </a:xfrm>
-      </p:grpSpPr>
-      <p:sp>
-        <p:nvSpPr>
-          <p:cNvPr id="3" name="Subtitle 2">
-            <a:extLst>
-              <a:ext uri="{FF2B5EF4-FFF2-40B4-BE49-F238E27FC236}">
-                <a16:creationId xmlns:a16="http://schemas.microsoft.com/office/drawing/2014/main" id="{0F0AA937-867D-D484-37E8-C9B43A905917}"/>
-              </a:ext>
-            </a:extLst>
-          </p:cNvPr>
-          <p:cNvSpPr>
-            <a:spLocks noGrp="1"/>
-          </p:cNvSpPr>
-          <p:nvPr>
-            <p:ph type="subTitle" idx="1"/>
-          </p:nvPr>
-        </p:nvSpPr>
-        <p:spPr>
-          <a:xfrm>
-            <a:off x="682831" y="497702"/>
-            <a:ext cx="10826338" cy="5862596"/>
-          </a:xfrm>
-        </p:spPr>
-        <p:txBody>
-          <a:bodyPr>
-            <a:noAutofit/>
-          </a:bodyPr>
-          <a:lstStyle/>
-          <a:p>
-            <a:endParaRPr lang="en-US" sz="4400" dirty="0">
-              <a:solidFill>
-                <a:schemeClr val="bg1"/>
-              </a:solidFill>
-              <a:latin typeface="Avenir Medium" panose="02000503020000020003" pitchFamily="2" charset="0"/>
-              <a:ea typeface="Bodoni Ornaments" pitchFamily="2" charset="0"/>
-            </a:endParaRPr>
-          </a:p>
-          <a:p>
-            <a:r>
-              <a:rPr lang="en-US" sz="4400" dirty="0">
-                <a:solidFill>
-                  <a:schemeClr val="bg1"/>
-                </a:solidFill>
-                <a:latin typeface="Avenir Medium" panose="02000503020000020003" pitchFamily="2" charset="0"/>
-                <a:ea typeface="Bodoni Ornaments" pitchFamily="2" charset="0"/>
-              </a:rPr>
-              <a:t>All sufficient merit</a:t>
-            </a:r>
-          </a:p>
-          <a:p>
-            <a:endParaRPr lang="en-US" sz="4400" dirty="0">
-              <a:solidFill>
-                <a:schemeClr val="bg1"/>
-              </a:solidFill>
-              <a:latin typeface="Avenir Medium" panose="02000503020000020003" pitchFamily="2" charset="0"/>
-              <a:ea typeface="Bodoni Ornaments" pitchFamily="2" charset="0"/>
-            </a:endParaRPr>
-          </a:p>
-          <a:p>
-            <a:r>
-              <a:rPr lang="en-US" sz="4400" dirty="0">
-                <a:solidFill>
-                  <a:schemeClr val="bg1"/>
-                </a:solidFill>
-                <a:latin typeface="Avenir Medium" panose="02000503020000020003" pitchFamily="2" charset="0"/>
-                <a:ea typeface="Bodoni Ornaments" pitchFamily="2" charset="0"/>
-              </a:rPr>
-              <a:t>Shining like the sun</a:t>
-            </a:r>
-          </a:p>
-          <a:p>
-            <a:endParaRPr lang="en-US" sz="4400" dirty="0">
-              <a:solidFill>
-                <a:schemeClr val="bg1"/>
-              </a:solidFill>
-              <a:latin typeface="Avenir Medium" panose="02000503020000020003" pitchFamily="2" charset="0"/>
-              <a:ea typeface="Bodoni Ornaments" pitchFamily="2" charset="0"/>
-            </a:endParaRPr>
-          </a:p>
-          <a:p>
-            <a:r>
-              <a:rPr lang="en-US" sz="4400" dirty="0">
-                <a:solidFill>
-                  <a:schemeClr val="bg1"/>
-                </a:solidFill>
-                <a:latin typeface="Avenir Medium" panose="02000503020000020003" pitchFamily="2" charset="0"/>
-                <a:ea typeface="Bodoni Ornaments" pitchFamily="2" charset="0"/>
-              </a:rPr>
-              <a:t>A fortune I inherit</a:t>
-            </a:r>
-          </a:p>
-          <a:p>
-            <a:endParaRPr lang="en-US" sz="4400" dirty="0">
-              <a:solidFill>
-                <a:schemeClr val="bg1"/>
-              </a:solidFill>
-              <a:latin typeface="Avenir Medium" panose="02000503020000020003" pitchFamily="2" charset="0"/>
-              <a:ea typeface="Bodoni Ornaments" pitchFamily="2" charset="0"/>
-            </a:endParaRPr>
-          </a:p>
-          <a:p>
-            <a:r>
-              <a:rPr lang="en-US" sz="4400" dirty="0">
-                <a:solidFill>
-                  <a:schemeClr val="bg1"/>
-                </a:solidFill>
-                <a:latin typeface="Avenir Medium" panose="02000503020000020003" pitchFamily="2" charset="0"/>
-                <a:ea typeface="Bodoni Ornaments" pitchFamily="2" charset="0"/>
-              </a:rPr>
-              <a:t>By no work I have done</a:t>
-            </a:r>
-          </a:p>
-        </p:txBody>
-      </p:sp>
-    </p:spTree>
-    <p:extLst>
-      <p:ext uri="{BB962C8B-B14F-4D97-AF65-F5344CB8AC3E}">
-        <p14:creationId xmlns:p14="http://schemas.microsoft.com/office/powerpoint/2010/main" val="2991002073"/>
-      </p:ext>
-    </p:extLst>
-  </p:cSld>
-  <p:clrMapOvr>
-    <a:masterClrMapping/>
-  </p:clrMapOvr>
-</p:sld>
-</file>
-
-<file path=ppt/slides/slide31.xml><?xml version="1.0" encoding="utf-8"?>
-<p:sld xmlns:a="http://schemas.openxmlformats.org/drawingml/2006/main" xmlns:r="http://schemas.openxmlformats.org/officeDocument/2006/relationships" xmlns:p="http://schemas.openxmlformats.org/presentationml/2006/main">
-  <p:cSld>
-    <p:bg>
-      <p:bgPr>
-        <a:solidFill>
-          <a:schemeClr val="accent1"/>
-        </a:solidFill>
-        <a:effectLst/>
-      </p:bgPr>
-    </p:bg>
-    <p:spTree>
-      <p:nvGrpSpPr>
-        <p:cNvPr id="1" name="">
-          <a:extLst>
-            <a:ext uri="{FF2B5EF4-FFF2-40B4-BE49-F238E27FC236}">
-              <a16:creationId xmlns:a16="http://schemas.microsoft.com/office/drawing/2014/main" id="{6E321B20-1F07-D41B-D17B-105DC9065E30}"/>
-            </a:ext>
-          </a:extLst>
-        </p:cNvPr>
-        <p:cNvGrpSpPr/>
-        <p:nvPr/>
-      </p:nvGrpSpPr>
-      <p:grpSpPr>
-        <a:xfrm>
-          <a:off x="0" y="0"/>
-          <a:ext cx="0" cy="0"/>
-          <a:chOff x="0" y="0"/>
-          <a:chExt cx="0" cy="0"/>
-        </a:xfrm>
-      </p:grpSpPr>
-      <p:sp>
-        <p:nvSpPr>
-          <p:cNvPr id="3" name="Subtitle 2">
-            <a:extLst>
-              <a:ext uri="{FF2B5EF4-FFF2-40B4-BE49-F238E27FC236}">
-                <a16:creationId xmlns:a16="http://schemas.microsoft.com/office/drawing/2014/main" id="{34E81914-E1B4-6E96-BBA8-CF33B0DE6570}"/>
-              </a:ext>
-            </a:extLst>
-          </p:cNvPr>
-          <p:cNvSpPr>
-            <a:spLocks noGrp="1"/>
-          </p:cNvSpPr>
-          <p:nvPr>
-            <p:ph type="subTitle" idx="1"/>
-          </p:nvPr>
-        </p:nvSpPr>
-        <p:spPr>
-          <a:xfrm>
-            <a:off x="682831" y="497702"/>
-            <a:ext cx="10826338" cy="5862596"/>
-          </a:xfrm>
-        </p:spPr>
-        <p:txBody>
-          <a:bodyPr>
-            <a:noAutofit/>
-          </a:bodyPr>
-          <a:lstStyle/>
-          <a:p>
-            <a:endParaRPr lang="en-US" sz="4400" dirty="0">
-              <a:solidFill>
-                <a:schemeClr val="bg1"/>
-              </a:solidFill>
-              <a:latin typeface="Avenir Medium" panose="02000503020000020003" pitchFamily="2" charset="0"/>
-              <a:ea typeface="Bodoni Ornaments" pitchFamily="2" charset="0"/>
-            </a:endParaRPr>
-          </a:p>
-          <a:p>
-            <a:r>
-              <a:rPr lang="en-US" sz="4400" dirty="0">
-                <a:solidFill>
-                  <a:schemeClr val="bg1"/>
-                </a:solidFill>
-                <a:latin typeface="Avenir Medium" panose="02000503020000020003" pitchFamily="2" charset="0"/>
-                <a:ea typeface="Bodoni Ornaments" pitchFamily="2" charset="0"/>
-              </a:rPr>
-              <a:t>My righteousness I forfeit</a:t>
-            </a:r>
-          </a:p>
-          <a:p>
-            <a:endParaRPr lang="en-US" sz="4400" dirty="0">
-              <a:solidFill>
-                <a:schemeClr val="bg1"/>
-              </a:solidFill>
-              <a:latin typeface="Avenir Medium" panose="02000503020000020003" pitchFamily="2" charset="0"/>
-              <a:ea typeface="Bodoni Ornaments" pitchFamily="2" charset="0"/>
-            </a:endParaRPr>
-          </a:p>
-          <a:p>
-            <a:r>
-              <a:rPr lang="en-US" sz="4400" dirty="0">
-                <a:solidFill>
-                  <a:schemeClr val="bg1"/>
-                </a:solidFill>
-                <a:latin typeface="Avenir Medium" panose="02000503020000020003" pitchFamily="2" charset="0"/>
-                <a:ea typeface="Bodoni Ornaments" pitchFamily="2" charset="0"/>
-              </a:rPr>
-              <a:t>At my saviors cross</a:t>
-            </a:r>
-          </a:p>
-          <a:p>
-            <a:endParaRPr lang="en-US" sz="4400" dirty="0">
-              <a:solidFill>
-                <a:schemeClr val="bg1"/>
-              </a:solidFill>
-              <a:latin typeface="Avenir Medium" panose="02000503020000020003" pitchFamily="2" charset="0"/>
-              <a:ea typeface="Bodoni Ornaments" pitchFamily="2" charset="0"/>
-            </a:endParaRPr>
-          </a:p>
-          <a:p>
-            <a:r>
-              <a:rPr lang="en-US" sz="4400" dirty="0">
-                <a:solidFill>
-                  <a:schemeClr val="bg1"/>
-                </a:solidFill>
-                <a:latin typeface="Avenir Medium" panose="02000503020000020003" pitchFamily="2" charset="0"/>
-                <a:ea typeface="Bodoni Ornaments" pitchFamily="2" charset="0"/>
-              </a:rPr>
-              <a:t>Where all sufficient merit</a:t>
-            </a:r>
-          </a:p>
-          <a:p>
-            <a:endParaRPr lang="en-US" sz="4400" dirty="0">
-              <a:solidFill>
-                <a:schemeClr val="bg1"/>
-              </a:solidFill>
-              <a:latin typeface="Avenir Medium" panose="02000503020000020003" pitchFamily="2" charset="0"/>
-              <a:ea typeface="Bodoni Ornaments" pitchFamily="2" charset="0"/>
-            </a:endParaRPr>
-          </a:p>
-          <a:p>
-            <a:r>
-              <a:rPr lang="en-US" sz="4400" dirty="0">
-                <a:solidFill>
-                  <a:schemeClr val="bg1"/>
-                </a:solidFill>
-                <a:latin typeface="Avenir Medium" panose="02000503020000020003" pitchFamily="2" charset="0"/>
-                <a:ea typeface="Bodoni Ornaments" pitchFamily="2" charset="0"/>
-              </a:rPr>
-              <a:t>Did what I could not</a:t>
-            </a:r>
-          </a:p>
-        </p:txBody>
-      </p:sp>
-    </p:spTree>
-    <p:extLst>
-      <p:ext uri="{BB962C8B-B14F-4D97-AF65-F5344CB8AC3E}">
-        <p14:creationId xmlns:p14="http://schemas.microsoft.com/office/powerpoint/2010/main" val="1943880644"/>
-      </p:ext>
-    </p:extLst>
-  </p:cSld>
-  <p:clrMapOvr>
-    <a:masterClrMapping/>
-  </p:clrMapOvr>
-</p:sld>
-</file>
-
-<file path=ppt/slides/slide32.xml><?xml version="1.0" encoding="utf-8"?>
-<p:sld xmlns:a="http://schemas.openxmlformats.org/drawingml/2006/main" xmlns:r="http://schemas.openxmlformats.org/officeDocument/2006/relationships" xmlns:p="http://schemas.openxmlformats.org/presentationml/2006/main">
-  <p:cSld>
-    <p:bg>
-      <p:bgPr>
-        <a:solidFill>
-          <a:schemeClr val="accent1"/>
-        </a:solidFill>
-        <a:effectLst/>
-      </p:bgPr>
-    </p:bg>
-    <p:spTree>
-      <p:nvGrpSpPr>
-        <p:cNvPr id="1" name="">
-          <a:extLst>
-            <a:ext uri="{FF2B5EF4-FFF2-40B4-BE49-F238E27FC236}">
               <a16:creationId xmlns:a16="http://schemas.microsoft.com/office/drawing/2014/main" id="{EB7A8B09-2F31-905B-BD0E-1A22C68CDCD3}"/>
             </a:ext>
           </a:extLst>
@@ -8129,7 +7848,7 @@
 </p:sld>
 </file>
 
-<file path=ppt/slides/slide33.xml><?xml version="1.0" encoding="utf-8"?>
+<file path=ppt/slides/slide31.xml><?xml version="1.0" encoding="utf-8"?>
 <p:sld xmlns:a="http://schemas.openxmlformats.org/drawingml/2006/main" xmlns:r="http://schemas.openxmlformats.org/officeDocument/2006/relationships" xmlns:p="http://schemas.openxmlformats.org/presentationml/2006/main">
   <p:cSld>
     <p:bg>
@@ -8286,7 +8005,7 @@
 </p:sld>
 </file>
 
-<file path=ppt/slides/slide34.xml><?xml version="1.0" encoding="utf-8"?>
+<file path=ppt/slides/slide32.xml><?xml version="1.0" encoding="utf-8"?>
 <p:sld xmlns:a="http://schemas.openxmlformats.org/drawingml/2006/main" xmlns:r="http://schemas.openxmlformats.org/officeDocument/2006/relationships" xmlns:p="http://schemas.openxmlformats.org/presentationml/2006/main">
   <p:cSld>
     <p:bg>
@@ -8422,7 +8141,7 @@
 </p:sld>
 </file>
 
-<file path=ppt/slides/slide35.xml><?xml version="1.0" encoding="utf-8"?>
+<file path=ppt/slides/slide33.xml><?xml version="1.0" encoding="utf-8"?>
 <p:sld xmlns:a="http://schemas.openxmlformats.org/drawingml/2006/main" xmlns:r="http://schemas.openxmlformats.org/officeDocument/2006/relationships" xmlns:p="http://schemas.openxmlformats.org/presentationml/2006/main">
   <p:cSld>
     <p:bg>
@@ -8537,7 +8256,7 @@
 </p:sld>
 </file>
 
-<file path=ppt/slides/slide36.xml><?xml version="1.0" encoding="utf-8"?>
+<file path=ppt/slides/slide34.xml><?xml version="1.0" encoding="utf-8"?>
 <p:sld xmlns:a="http://schemas.openxmlformats.org/drawingml/2006/main" xmlns:r="http://schemas.openxmlformats.org/officeDocument/2006/relationships" xmlns:p="http://schemas.openxmlformats.org/presentationml/2006/main">
   <p:cSld>
     <p:bg>
@@ -8667,7 +8386,7 @@
 </p:sld>
 </file>
 
-<file path=ppt/slides/slide37.xml><?xml version="1.0" encoding="utf-8"?>
+<file path=ppt/slides/slide35.xml><?xml version="1.0" encoding="utf-8"?>
 <p:sld xmlns:a="http://schemas.openxmlformats.org/drawingml/2006/main" xmlns:r="http://schemas.openxmlformats.org/officeDocument/2006/relationships" xmlns:p="http://schemas.openxmlformats.org/presentationml/2006/main">
   <p:cSld>
     <p:bg>
@@ -8824,7 +8543,7 @@
 </p:sld>
 </file>
 
-<file path=ppt/slides/slide38.xml><?xml version="1.0" encoding="utf-8"?>
+<file path=ppt/slides/slide36.xml><?xml version="1.0" encoding="utf-8"?>
 <p:sld xmlns:a="http://schemas.openxmlformats.org/drawingml/2006/main" xmlns:r="http://schemas.openxmlformats.org/officeDocument/2006/relationships" xmlns:p="http://schemas.openxmlformats.org/presentationml/2006/main">
   <p:cSld>
     <p:bg>
@@ -8960,7 +8679,7 @@
 </p:sld>
 </file>
 
-<file path=ppt/slides/slide39.xml><?xml version="1.0" encoding="utf-8"?>
+<file path=ppt/slides/slide37.xml><?xml version="1.0" encoding="utf-8"?>
 <p:sld xmlns:a="http://schemas.openxmlformats.org/drawingml/2006/main" xmlns:r="http://schemas.openxmlformats.org/officeDocument/2006/relationships" xmlns:p="http://schemas.openxmlformats.org/presentationml/2006/main">
   <p:cSld>
     <p:bg>
@@ -9066,6 +8785,323 @@
     <p:extLst>
       <p:ext uri="{BB962C8B-B14F-4D97-AF65-F5344CB8AC3E}">
         <p14:creationId xmlns:p14="http://schemas.microsoft.com/office/powerpoint/2010/main" val="1514148742"/>
+      </p:ext>
+    </p:extLst>
+  </p:cSld>
+  <p:clrMapOvr>
+    <a:masterClrMapping/>
+  </p:clrMapOvr>
+</p:sld>
+</file>
+
+<file path=ppt/slides/slide38.xml><?xml version="1.0" encoding="utf-8"?>
+<p:sld xmlns:a="http://schemas.openxmlformats.org/drawingml/2006/main" xmlns:r="http://schemas.openxmlformats.org/officeDocument/2006/relationships" xmlns:p="http://schemas.openxmlformats.org/presentationml/2006/main">
+  <p:cSld>
+    <p:bg>
+      <p:bgPr>
+        <a:solidFill>
+          <a:schemeClr val="accent1"/>
+        </a:solidFill>
+        <a:effectLst/>
+      </p:bgPr>
+    </p:bg>
+    <p:spTree>
+      <p:nvGrpSpPr>
+        <p:cNvPr id="1" name="">
+          <a:extLst>
+            <a:ext uri="{FF2B5EF4-FFF2-40B4-BE49-F238E27FC236}">
+              <a16:creationId xmlns:a16="http://schemas.microsoft.com/office/drawing/2014/main" id="{7F8EAD9D-411B-BBB0-2853-4AE179FD56CE}"/>
+            </a:ext>
+          </a:extLst>
+        </p:cNvPr>
+        <p:cNvGrpSpPr/>
+        <p:nvPr/>
+      </p:nvGrpSpPr>
+      <p:grpSpPr>
+        <a:xfrm>
+          <a:off x="0" y="0"/>
+          <a:ext cx="0" cy="0"/>
+          <a:chOff x="0" y="0"/>
+          <a:chExt cx="0" cy="0"/>
+        </a:xfrm>
+      </p:grpSpPr>
+      <p:sp>
+        <p:nvSpPr>
+          <p:cNvPr id="3" name="Subtitle 2">
+            <a:extLst>
+              <a:ext uri="{FF2B5EF4-FFF2-40B4-BE49-F238E27FC236}">
+                <a16:creationId xmlns:a16="http://schemas.microsoft.com/office/drawing/2014/main" id="{0AA9DF7F-CB55-F585-2E89-9D375B08731F}"/>
+              </a:ext>
+            </a:extLst>
+          </p:cNvPr>
+          <p:cNvSpPr>
+            <a:spLocks noGrp="1"/>
+          </p:cNvSpPr>
+          <p:nvPr>
+            <p:ph type="subTitle" idx="1"/>
+          </p:nvPr>
+        </p:nvSpPr>
+        <p:spPr>
+          <a:xfrm>
+            <a:off x="682831" y="497702"/>
+            <a:ext cx="10826338" cy="5862596"/>
+          </a:xfrm>
+        </p:spPr>
+        <p:txBody>
+          <a:bodyPr>
+            <a:noAutofit/>
+          </a:bodyPr>
+          <a:lstStyle/>
+          <a:p>
+            <a:endParaRPr lang="en-US" sz="4400" dirty="0">
+              <a:solidFill>
+                <a:schemeClr val="bg1"/>
+              </a:solidFill>
+              <a:latin typeface="Avenir Medium" panose="02000503020000020003" pitchFamily="2" charset="0"/>
+              <a:ea typeface="Bodoni Ornaments" pitchFamily="2" charset="0"/>
+            </a:endParaRPr>
+          </a:p>
+          <a:p>
+            <a:r>
+              <a:rPr lang="en-US" sz="4400" dirty="0">
+                <a:solidFill>
+                  <a:schemeClr val="bg1"/>
+                </a:solidFill>
+                <a:latin typeface="Avenir Medium" panose="02000503020000020003" pitchFamily="2" charset="0"/>
+                <a:ea typeface="Bodoni Ornaments" pitchFamily="2" charset="0"/>
+              </a:rPr>
+              <a:t>All sufficient merit</a:t>
+            </a:r>
+          </a:p>
+          <a:p>
+            <a:endParaRPr lang="en-US" sz="4400" dirty="0">
+              <a:solidFill>
+                <a:schemeClr val="bg1"/>
+              </a:solidFill>
+              <a:latin typeface="Avenir Medium" panose="02000503020000020003" pitchFamily="2" charset="0"/>
+              <a:ea typeface="Bodoni Ornaments" pitchFamily="2" charset="0"/>
+            </a:endParaRPr>
+          </a:p>
+          <a:p>
+            <a:r>
+              <a:rPr lang="en-US" sz="4400" dirty="0">
+                <a:solidFill>
+                  <a:schemeClr val="bg1"/>
+                </a:solidFill>
+                <a:latin typeface="Avenir Medium" panose="02000503020000020003" pitchFamily="2" charset="0"/>
+                <a:ea typeface="Bodoni Ornaments" pitchFamily="2" charset="0"/>
+              </a:rPr>
+              <a:t>Firm in life and death</a:t>
+            </a:r>
+          </a:p>
+          <a:p>
+            <a:endParaRPr lang="en-US" sz="4400" dirty="0">
+              <a:solidFill>
+                <a:schemeClr val="bg1"/>
+              </a:solidFill>
+              <a:latin typeface="Avenir Medium" panose="02000503020000020003" pitchFamily="2" charset="0"/>
+              <a:ea typeface="Bodoni Ornaments" pitchFamily="2" charset="0"/>
+            </a:endParaRPr>
+          </a:p>
+          <a:p>
+            <a:r>
+              <a:rPr lang="en-US" sz="4400" dirty="0">
+                <a:solidFill>
+                  <a:schemeClr val="bg1"/>
+                </a:solidFill>
+                <a:latin typeface="Avenir Medium" panose="02000503020000020003" pitchFamily="2" charset="0"/>
+                <a:ea typeface="Bodoni Ornaments" pitchFamily="2" charset="0"/>
+              </a:rPr>
+              <a:t>The joy of my salvation</a:t>
+            </a:r>
+          </a:p>
+          <a:p>
+            <a:endParaRPr lang="en-US" sz="4400" dirty="0">
+              <a:solidFill>
+                <a:schemeClr val="bg1"/>
+              </a:solidFill>
+              <a:latin typeface="Avenir Medium" panose="02000503020000020003" pitchFamily="2" charset="0"/>
+              <a:ea typeface="Bodoni Ornaments" pitchFamily="2" charset="0"/>
+            </a:endParaRPr>
+          </a:p>
+          <a:p>
+            <a:r>
+              <a:rPr lang="en-US" sz="4400" dirty="0">
+                <a:solidFill>
+                  <a:schemeClr val="bg1"/>
+                </a:solidFill>
+                <a:latin typeface="Avenir Medium" panose="02000503020000020003" pitchFamily="2" charset="0"/>
+                <a:ea typeface="Bodoni Ornaments" pitchFamily="2" charset="0"/>
+              </a:rPr>
+              <a:t>Shall be my final breath</a:t>
+            </a:r>
+          </a:p>
+        </p:txBody>
+      </p:sp>
+    </p:spTree>
+    <p:extLst>
+      <p:ext uri="{BB962C8B-B14F-4D97-AF65-F5344CB8AC3E}">
+        <p14:creationId xmlns:p14="http://schemas.microsoft.com/office/powerpoint/2010/main" val="2372309980"/>
+      </p:ext>
+    </p:extLst>
+  </p:cSld>
+  <p:clrMapOvr>
+    <a:masterClrMapping/>
+  </p:clrMapOvr>
+</p:sld>
+</file>
+
+<file path=ppt/slides/slide39.xml><?xml version="1.0" encoding="utf-8"?>
+<p:sld xmlns:a="http://schemas.openxmlformats.org/drawingml/2006/main" xmlns:r="http://schemas.openxmlformats.org/officeDocument/2006/relationships" xmlns:p="http://schemas.openxmlformats.org/presentationml/2006/main">
+  <p:cSld>
+    <p:bg>
+      <p:bgPr>
+        <a:solidFill>
+          <a:schemeClr val="accent1"/>
+        </a:solidFill>
+        <a:effectLst/>
+      </p:bgPr>
+    </p:bg>
+    <p:spTree>
+      <p:nvGrpSpPr>
+        <p:cNvPr id="1" name="">
+          <a:extLst>
+            <a:ext uri="{FF2B5EF4-FFF2-40B4-BE49-F238E27FC236}">
+              <a16:creationId xmlns:a16="http://schemas.microsoft.com/office/drawing/2014/main" id="{42A0F7E5-CC77-9690-4674-FA9570954E3F}"/>
+            </a:ext>
+          </a:extLst>
+        </p:cNvPr>
+        <p:cNvGrpSpPr/>
+        <p:nvPr/>
+      </p:nvGrpSpPr>
+      <p:grpSpPr>
+        <a:xfrm>
+          <a:off x="0" y="0"/>
+          <a:ext cx="0" cy="0"/>
+          <a:chOff x="0" y="0"/>
+          <a:chExt cx="0" cy="0"/>
+        </a:xfrm>
+      </p:grpSpPr>
+      <p:sp>
+        <p:nvSpPr>
+          <p:cNvPr id="3" name="Subtitle 2">
+            <a:extLst>
+              <a:ext uri="{FF2B5EF4-FFF2-40B4-BE49-F238E27FC236}">
+                <a16:creationId xmlns:a16="http://schemas.microsoft.com/office/drawing/2014/main" id="{4276E9F8-15BB-D1F9-FFD7-553FE54BB111}"/>
+              </a:ext>
+            </a:extLst>
+          </p:cNvPr>
+          <p:cNvSpPr>
+            <a:spLocks noGrp="1"/>
+          </p:cNvSpPr>
+          <p:nvPr>
+            <p:ph type="subTitle" idx="1"/>
+          </p:nvPr>
+        </p:nvSpPr>
+        <p:spPr>
+          <a:xfrm>
+            <a:off x="682831" y="497702"/>
+            <a:ext cx="10826338" cy="5862596"/>
+          </a:xfrm>
+        </p:spPr>
+        <p:txBody>
+          <a:bodyPr>
+            <a:noAutofit/>
+          </a:bodyPr>
+          <a:lstStyle/>
+          <a:p>
+            <a:r>
+              <a:rPr lang="en-US" sz="4400" dirty="0">
+                <a:solidFill>
+                  <a:schemeClr val="bg1"/>
+                </a:solidFill>
+                <a:latin typeface="Avenir Medium" panose="02000503020000020003" pitchFamily="2" charset="0"/>
+                <a:ea typeface="Bodoni Ornaments" pitchFamily="2" charset="0"/>
+              </a:rPr>
+              <a:t>When I stand accepted</a:t>
+            </a:r>
+          </a:p>
+          <a:p>
+            <a:endParaRPr lang="en-US" sz="4400" dirty="0">
+              <a:solidFill>
+                <a:schemeClr val="bg1"/>
+              </a:solidFill>
+              <a:latin typeface="Avenir Medium" panose="02000503020000020003" pitchFamily="2" charset="0"/>
+              <a:ea typeface="Bodoni Ornaments" pitchFamily="2" charset="0"/>
+            </a:endParaRPr>
+          </a:p>
+          <a:p>
+            <a:r>
+              <a:rPr lang="en-US" sz="4400" dirty="0">
+                <a:solidFill>
+                  <a:schemeClr val="bg1"/>
+                </a:solidFill>
+                <a:latin typeface="Avenir Medium" panose="02000503020000020003" pitchFamily="2" charset="0"/>
+                <a:ea typeface="Bodoni Ornaments" pitchFamily="2" charset="0"/>
+              </a:rPr>
+              <a:t>Before the throne of God</a:t>
+            </a:r>
+          </a:p>
+          <a:p>
+            <a:endParaRPr lang="en-US" sz="4400" dirty="0">
+              <a:solidFill>
+                <a:schemeClr val="bg1"/>
+              </a:solidFill>
+              <a:latin typeface="Avenir Medium" panose="02000503020000020003" pitchFamily="2" charset="0"/>
+              <a:ea typeface="Bodoni Ornaments" pitchFamily="2" charset="0"/>
+            </a:endParaRPr>
+          </a:p>
+          <a:p>
+            <a:r>
+              <a:rPr lang="en-US" sz="4400" dirty="0">
+                <a:solidFill>
+                  <a:schemeClr val="bg1"/>
+                </a:solidFill>
+                <a:latin typeface="Avenir Medium" panose="02000503020000020003" pitchFamily="2" charset="0"/>
+                <a:ea typeface="Bodoni Ornaments" pitchFamily="2" charset="0"/>
+              </a:rPr>
+              <a:t>I’ll gaze upon my Jesus</a:t>
+            </a:r>
+          </a:p>
+          <a:p>
+            <a:endParaRPr lang="en-US" sz="4400" dirty="0">
+              <a:solidFill>
+                <a:schemeClr val="bg1"/>
+              </a:solidFill>
+              <a:latin typeface="Avenir Medium" panose="02000503020000020003" pitchFamily="2" charset="0"/>
+              <a:ea typeface="Bodoni Ornaments" pitchFamily="2" charset="0"/>
+            </a:endParaRPr>
+          </a:p>
+          <a:p>
+            <a:r>
+              <a:rPr lang="en-US" sz="4400" dirty="0">
+                <a:solidFill>
+                  <a:schemeClr val="bg1"/>
+                </a:solidFill>
+                <a:latin typeface="Avenir Medium" panose="02000503020000020003" pitchFamily="2" charset="0"/>
+                <a:ea typeface="Bodoni Ornaments" pitchFamily="2" charset="0"/>
+              </a:rPr>
+              <a:t>And thank Him for the cross</a:t>
+            </a:r>
+          </a:p>
+          <a:p>
+            <a:r>
+              <a:rPr lang="en-US" sz="4400" dirty="0">
+                <a:solidFill>
+                  <a:schemeClr val="bg1"/>
+                </a:solidFill>
+                <a:latin typeface="Avenir Medium" panose="02000503020000020003" pitchFamily="2" charset="0"/>
+                <a:ea typeface="Bodoni Ornaments" pitchFamily="2" charset="0"/>
+              </a:rPr>
+              <a:t>Yes I’ll thank Him for the cross</a:t>
+            </a:r>
+          </a:p>
+        </p:txBody>
+      </p:sp>
+    </p:spTree>
+    <p:extLst>
+      <p:ext uri="{BB962C8B-B14F-4D97-AF65-F5344CB8AC3E}">
+        <p14:creationId xmlns:p14="http://schemas.microsoft.com/office/powerpoint/2010/main" val="1613949941"/>
       </p:ext>
     </p:extLst>
   </p:cSld>
@@ -9229,323 +9265,6 @@
     <p:bg>
       <p:bgPr>
         <a:solidFill>
-          <a:schemeClr val="accent1"/>
-        </a:solidFill>
-        <a:effectLst/>
-      </p:bgPr>
-    </p:bg>
-    <p:spTree>
-      <p:nvGrpSpPr>
-        <p:cNvPr id="1" name="">
-          <a:extLst>
-            <a:ext uri="{FF2B5EF4-FFF2-40B4-BE49-F238E27FC236}">
-              <a16:creationId xmlns:a16="http://schemas.microsoft.com/office/drawing/2014/main" id="{7F8EAD9D-411B-BBB0-2853-4AE179FD56CE}"/>
-            </a:ext>
-          </a:extLst>
-        </p:cNvPr>
-        <p:cNvGrpSpPr/>
-        <p:nvPr/>
-      </p:nvGrpSpPr>
-      <p:grpSpPr>
-        <a:xfrm>
-          <a:off x="0" y="0"/>
-          <a:ext cx="0" cy="0"/>
-          <a:chOff x="0" y="0"/>
-          <a:chExt cx="0" cy="0"/>
-        </a:xfrm>
-      </p:grpSpPr>
-      <p:sp>
-        <p:nvSpPr>
-          <p:cNvPr id="3" name="Subtitle 2">
-            <a:extLst>
-              <a:ext uri="{FF2B5EF4-FFF2-40B4-BE49-F238E27FC236}">
-                <a16:creationId xmlns:a16="http://schemas.microsoft.com/office/drawing/2014/main" id="{0AA9DF7F-CB55-F585-2E89-9D375B08731F}"/>
-              </a:ext>
-            </a:extLst>
-          </p:cNvPr>
-          <p:cNvSpPr>
-            <a:spLocks noGrp="1"/>
-          </p:cNvSpPr>
-          <p:nvPr>
-            <p:ph type="subTitle" idx="1"/>
-          </p:nvPr>
-        </p:nvSpPr>
-        <p:spPr>
-          <a:xfrm>
-            <a:off x="682831" y="497702"/>
-            <a:ext cx="10826338" cy="5862596"/>
-          </a:xfrm>
-        </p:spPr>
-        <p:txBody>
-          <a:bodyPr>
-            <a:noAutofit/>
-          </a:bodyPr>
-          <a:lstStyle/>
-          <a:p>
-            <a:endParaRPr lang="en-US" sz="4400" dirty="0">
-              <a:solidFill>
-                <a:schemeClr val="bg1"/>
-              </a:solidFill>
-              <a:latin typeface="Avenir Medium" panose="02000503020000020003" pitchFamily="2" charset="0"/>
-              <a:ea typeface="Bodoni Ornaments" pitchFamily="2" charset="0"/>
-            </a:endParaRPr>
-          </a:p>
-          <a:p>
-            <a:r>
-              <a:rPr lang="en-US" sz="4400" dirty="0">
-                <a:solidFill>
-                  <a:schemeClr val="bg1"/>
-                </a:solidFill>
-                <a:latin typeface="Avenir Medium" panose="02000503020000020003" pitchFamily="2" charset="0"/>
-                <a:ea typeface="Bodoni Ornaments" pitchFamily="2" charset="0"/>
-              </a:rPr>
-              <a:t>All sufficient merit</a:t>
-            </a:r>
-          </a:p>
-          <a:p>
-            <a:endParaRPr lang="en-US" sz="4400" dirty="0">
-              <a:solidFill>
-                <a:schemeClr val="bg1"/>
-              </a:solidFill>
-              <a:latin typeface="Avenir Medium" panose="02000503020000020003" pitchFamily="2" charset="0"/>
-              <a:ea typeface="Bodoni Ornaments" pitchFamily="2" charset="0"/>
-            </a:endParaRPr>
-          </a:p>
-          <a:p>
-            <a:r>
-              <a:rPr lang="en-US" sz="4400" dirty="0">
-                <a:solidFill>
-                  <a:schemeClr val="bg1"/>
-                </a:solidFill>
-                <a:latin typeface="Avenir Medium" panose="02000503020000020003" pitchFamily="2" charset="0"/>
-                <a:ea typeface="Bodoni Ornaments" pitchFamily="2" charset="0"/>
-              </a:rPr>
-              <a:t>Firm in life and death</a:t>
-            </a:r>
-          </a:p>
-          <a:p>
-            <a:endParaRPr lang="en-US" sz="4400" dirty="0">
-              <a:solidFill>
-                <a:schemeClr val="bg1"/>
-              </a:solidFill>
-              <a:latin typeface="Avenir Medium" panose="02000503020000020003" pitchFamily="2" charset="0"/>
-              <a:ea typeface="Bodoni Ornaments" pitchFamily="2" charset="0"/>
-            </a:endParaRPr>
-          </a:p>
-          <a:p>
-            <a:r>
-              <a:rPr lang="en-US" sz="4400" dirty="0">
-                <a:solidFill>
-                  <a:schemeClr val="bg1"/>
-                </a:solidFill>
-                <a:latin typeface="Avenir Medium" panose="02000503020000020003" pitchFamily="2" charset="0"/>
-                <a:ea typeface="Bodoni Ornaments" pitchFamily="2" charset="0"/>
-              </a:rPr>
-              <a:t>The joy of my salvation</a:t>
-            </a:r>
-          </a:p>
-          <a:p>
-            <a:endParaRPr lang="en-US" sz="4400" dirty="0">
-              <a:solidFill>
-                <a:schemeClr val="bg1"/>
-              </a:solidFill>
-              <a:latin typeface="Avenir Medium" panose="02000503020000020003" pitchFamily="2" charset="0"/>
-              <a:ea typeface="Bodoni Ornaments" pitchFamily="2" charset="0"/>
-            </a:endParaRPr>
-          </a:p>
-          <a:p>
-            <a:r>
-              <a:rPr lang="en-US" sz="4400" dirty="0">
-                <a:solidFill>
-                  <a:schemeClr val="bg1"/>
-                </a:solidFill>
-                <a:latin typeface="Avenir Medium" panose="02000503020000020003" pitchFamily="2" charset="0"/>
-                <a:ea typeface="Bodoni Ornaments" pitchFamily="2" charset="0"/>
-              </a:rPr>
-              <a:t>Shall be my final breath</a:t>
-            </a:r>
-          </a:p>
-        </p:txBody>
-      </p:sp>
-    </p:spTree>
-    <p:extLst>
-      <p:ext uri="{BB962C8B-B14F-4D97-AF65-F5344CB8AC3E}">
-        <p14:creationId xmlns:p14="http://schemas.microsoft.com/office/powerpoint/2010/main" val="2372309980"/>
-      </p:ext>
-    </p:extLst>
-  </p:cSld>
-  <p:clrMapOvr>
-    <a:masterClrMapping/>
-  </p:clrMapOvr>
-</p:sld>
-</file>
-
-<file path=ppt/slides/slide41.xml><?xml version="1.0" encoding="utf-8"?>
-<p:sld xmlns:a="http://schemas.openxmlformats.org/drawingml/2006/main" xmlns:r="http://schemas.openxmlformats.org/officeDocument/2006/relationships" xmlns:p="http://schemas.openxmlformats.org/presentationml/2006/main">
-  <p:cSld>
-    <p:bg>
-      <p:bgPr>
-        <a:solidFill>
-          <a:schemeClr val="accent1"/>
-        </a:solidFill>
-        <a:effectLst/>
-      </p:bgPr>
-    </p:bg>
-    <p:spTree>
-      <p:nvGrpSpPr>
-        <p:cNvPr id="1" name="">
-          <a:extLst>
-            <a:ext uri="{FF2B5EF4-FFF2-40B4-BE49-F238E27FC236}">
-              <a16:creationId xmlns:a16="http://schemas.microsoft.com/office/drawing/2014/main" id="{42A0F7E5-CC77-9690-4674-FA9570954E3F}"/>
-            </a:ext>
-          </a:extLst>
-        </p:cNvPr>
-        <p:cNvGrpSpPr/>
-        <p:nvPr/>
-      </p:nvGrpSpPr>
-      <p:grpSpPr>
-        <a:xfrm>
-          <a:off x="0" y="0"/>
-          <a:ext cx="0" cy="0"/>
-          <a:chOff x="0" y="0"/>
-          <a:chExt cx="0" cy="0"/>
-        </a:xfrm>
-      </p:grpSpPr>
-      <p:sp>
-        <p:nvSpPr>
-          <p:cNvPr id="3" name="Subtitle 2">
-            <a:extLst>
-              <a:ext uri="{FF2B5EF4-FFF2-40B4-BE49-F238E27FC236}">
-                <a16:creationId xmlns:a16="http://schemas.microsoft.com/office/drawing/2014/main" id="{4276E9F8-15BB-D1F9-FFD7-553FE54BB111}"/>
-              </a:ext>
-            </a:extLst>
-          </p:cNvPr>
-          <p:cNvSpPr>
-            <a:spLocks noGrp="1"/>
-          </p:cNvSpPr>
-          <p:nvPr>
-            <p:ph type="subTitle" idx="1"/>
-          </p:nvPr>
-        </p:nvSpPr>
-        <p:spPr>
-          <a:xfrm>
-            <a:off x="682831" y="497702"/>
-            <a:ext cx="10826338" cy="5862596"/>
-          </a:xfrm>
-        </p:spPr>
-        <p:txBody>
-          <a:bodyPr>
-            <a:noAutofit/>
-          </a:bodyPr>
-          <a:lstStyle/>
-          <a:p>
-            <a:r>
-              <a:rPr lang="en-US" sz="4400" dirty="0">
-                <a:solidFill>
-                  <a:schemeClr val="bg1"/>
-                </a:solidFill>
-                <a:latin typeface="Avenir Medium" panose="02000503020000020003" pitchFamily="2" charset="0"/>
-                <a:ea typeface="Bodoni Ornaments" pitchFamily="2" charset="0"/>
-              </a:rPr>
-              <a:t>When I stand accepted</a:t>
-            </a:r>
-          </a:p>
-          <a:p>
-            <a:endParaRPr lang="en-US" sz="4400" dirty="0">
-              <a:solidFill>
-                <a:schemeClr val="bg1"/>
-              </a:solidFill>
-              <a:latin typeface="Avenir Medium" panose="02000503020000020003" pitchFamily="2" charset="0"/>
-              <a:ea typeface="Bodoni Ornaments" pitchFamily="2" charset="0"/>
-            </a:endParaRPr>
-          </a:p>
-          <a:p>
-            <a:r>
-              <a:rPr lang="en-US" sz="4400" dirty="0">
-                <a:solidFill>
-                  <a:schemeClr val="bg1"/>
-                </a:solidFill>
-                <a:latin typeface="Avenir Medium" panose="02000503020000020003" pitchFamily="2" charset="0"/>
-                <a:ea typeface="Bodoni Ornaments" pitchFamily="2" charset="0"/>
-              </a:rPr>
-              <a:t>Before the throne of God</a:t>
-            </a:r>
-          </a:p>
-          <a:p>
-            <a:endParaRPr lang="en-US" sz="4400" dirty="0">
-              <a:solidFill>
-                <a:schemeClr val="bg1"/>
-              </a:solidFill>
-              <a:latin typeface="Avenir Medium" panose="02000503020000020003" pitchFamily="2" charset="0"/>
-              <a:ea typeface="Bodoni Ornaments" pitchFamily="2" charset="0"/>
-            </a:endParaRPr>
-          </a:p>
-          <a:p>
-            <a:r>
-              <a:rPr lang="en-US" sz="4400" dirty="0">
-                <a:solidFill>
-                  <a:schemeClr val="bg1"/>
-                </a:solidFill>
-                <a:latin typeface="Avenir Medium" panose="02000503020000020003" pitchFamily="2" charset="0"/>
-                <a:ea typeface="Bodoni Ornaments" pitchFamily="2" charset="0"/>
-              </a:rPr>
-              <a:t>I’ll gaze upon my Jesus</a:t>
-            </a:r>
-          </a:p>
-          <a:p>
-            <a:endParaRPr lang="en-US" sz="4400" dirty="0">
-              <a:solidFill>
-                <a:schemeClr val="bg1"/>
-              </a:solidFill>
-              <a:latin typeface="Avenir Medium" panose="02000503020000020003" pitchFamily="2" charset="0"/>
-              <a:ea typeface="Bodoni Ornaments" pitchFamily="2" charset="0"/>
-            </a:endParaRPr>
-          </a:p>
-          <a:p>
-            <a:r>
-              <a:rPr lang="en-US" sz="4400" dirty="0">
-                <a:solidFill>
-                  <a:schemeClr val="bg1"/>
-                </a:solidFill>
-                <a:latin typeface="Avenir Medium" panose="02000503020000020003" pitchFamily="2" charset="0"/>
-                <a:ea typeface="Bodoni Ornaments" pitchFamily="2" charset="0"/>
-              </a:rPr>
-              <a:t>And thank Him for the cross</a:t>
-            </a:r>
-          </a:p>
-          <a:p>
-            <a:r>
-              <a:rPr lang="en-US" sz="4400" dirty="0">
-                <a:solidFill>
-                  <a:schemeClr val="bg1"/>
-                </a:solidFill>
-                <a:latin typeface="Avenir Medium" panose="02000503020000020003" pitchFamily="2" charset="0"/>
-                <a:ea typeface="Bodoni Ornaments" pitchFamily="2" charset="0"/>
-              </a:rPr>
-              <a:t>Yes I’ll thank Him for the cross</a:t>
-            </a:r>
-          </a:p>
-        </p:txBody>
-      </p:sp>
-    </p:spTree>
-    <p:extLst>
-      <p:ext uri="{BB962C8B-B14F-4D97-AF65-F5344CB8AC3E}">
-        <p14:creationId xmlns:p14="http://schemas.microsoft.com/office/powerpoint/2010/main" val="1613949941"/>
-      </p:ext>
-    </p:extLst>
-  </p:cSld>
-  <p:clrMapOvr>
-    <a:masterClrMapping/>
-  </p:clrMapOvr>
-</p:sld>
-</file>
-
-<file path=ppt/slides/slide42.xml><?xml version="1.0" encoding="utf-8"?>
-<p:sld xmlns:a="http://schemas.openxmlformats.org/drawingml/2006/main" xmlns:r="http://schemas.openxmlformats.org/officeDocument/2006/relationships" xmlns:p="http://schemas.openxmlformats.org/presentationml/2006/main">
-  <p:cSld>
-    <p:bg>
-      <p:bgPr>
-        <a:solidFill>
           <a:srgbClr val="7030A0"/>
         </a:solidFill>
         <a:effectLst/>
@@ -9676,7 +9395,7 @@
 </p:sld>
 </file>
 
-<file path=ppt/slides/slide43.xml><?xml version="1.0" encoding="utf-8"?>
+<file path=ppt/slides/slide41.xml><?xml version="1.0" encoding="utf-8"?>
 <p:sld xmlns:a="http://schemas.openxmlformats.org/drawingml/2006/main" xmlns:r="http://schemas.openxmlformats.org/officeDocument/2006/relationships" xmlns:p="http://schemas.openxmlformats.org/presentationml/2006/main">
   <p:cSld>
     <p:bg>
